--- a/docs/lagacy/sp_moe_pass.pptx
+++ b/docs/lagacy/sp_moe_pass.pptx
@@ -5,14 +5,15 @@
     <p:sldMasterId id="2147483648" r:id="rId1"/>
   </p:sldMasterIdLst>
   <p:notesMasterIdLst>
-    <p:notesMasterId r:id="rId7"/>
+    <p:notesMasterId r:id="rId8"/>
   </p:notesMasterIdLst>
   <p:sldIdLst>
     <p:sldId id="256" r:id="rId2"/>
     <p:sldId id="257" r:id="rId3"/>
-    <p:sldId id="258" r:id="rId4"/>
-    <p:sldId id="259" r:id="rId5"/>
-    <p:sldId id="260" r:id="rId6"/>
+    <p:sldId id="261" r:id="rId4"/>
+    <p:sldId id="258" r:id="rId5"/>
+    <p:sldId id="259" r:id="rId6"/>
+    <p:sldId id="260" r:id="rId7"/>
   </p:sldIdLst>
   <p:sldSz cx="12192000" cy="6858000"/>
   <p:notesSz cx="6858000" cy="9144000"/>
@@ -212,7 +213,7 @@
           <a:p>
             <a:fld id="{D192D1E3-2004-453C-8097-1B80F42173C4}" type="datetimeFigureOut">
               <a:rPr lang="zh-CN" altLang="en-US" smtClean="0"/>
-              <a:t>2026/8/5</a:t>
+              <a:t>2026/9/9</a:t>
             </a:fld>
             <a:endParaRPr lang="zh-CN" altLang="en-US"/>
           </a:p>
@@ -742,7 +743,7 @@
           <a:p>
             <a:fld id="{5BCAD085-E8A6-8845-BD4E-CB4CCA059FC4}" type="datetimeFigureOut">
               <a:rPr lang="en-US" smtClean="0"/>
-              <a:t>8/5/2026</a:t>
+              <a:t>9/9/2026</a:t>
             </a:fld>
             <a:endParaRPr lang="en-US"/>
           </a:p>
@@ -910,7 +911,7 @@
           <a:p>
             <a:fld id="{5BCAD085-E8A6-8845-BD4E-CB4CCA059FC4}" type="datetimeFigureOut">
               <a:rPr lang="en-US" smtClean="0"/>
-              <a:t>8/5/2026</a:t>
+              <a:t>9/9/2026</a:t>
             </a:fld>
             <a:endParaRPr lang="en-US"/>
           </a:p>
@@ -1088,7 +1089,7 @@
           <a:p>
             <a:fld id="{5BCAD085-E8A6-8845-BD4E-CB4CCA059FC4}" type="datetimeFigureOut">
               <a:rPr lang="en-US" smtClean="0"/>
-              <a:t>8/5/2026</a:t>
+              <a:t>9/9/2026</a:t>
             </a:fld>
             <a:endParaRPr lang="en-US"/>
           </a:p>
@@ -1256,7 +1257,7 @@
           <a:p>
             <a:fld id="{5BCAD085-E8A6-8845-BD4E-CB4CCA059FC4}" type="datetimeFigureOut">
               <a:rPr lang="en-US" smtClean="0"/>
-              <a:t>8/5/2026</a:t>
+              <a:t>9/9/2026</a:t>
             </a:fld>
             <a:endParaRPr lang="en-US"/>
           </a:p>
@@ -1501,7 +1502,7 @@
           <a:p>
             <a:fld id="{5BCAD085-E8A6-8845-BD4E-CB4CCA059FC4}" type="datetimeFigureOut">
               <a:rPr lang="en-US" smtClean="0"/>
-              <a:t>8/5/2026</a:t>
+              <a:t>9/9/2026</a:t>
             </a:fld>
             <a:endParaRPr lang="en-US"/>
           </a:p>
@@ -1786,7 +1787,7 @@
           <a:p>
             <a:fld id="{5BCAD085-E8A6-8845-BD4E-CB4CCA059FC4}" type="datetimeFigureOut">
               <a:rPr lang="en-US" smtClean="0"/>
-              <a:t>8/5/2026</a:t>
+              <a:t>9/9/2026</a:t>
             </a:fld>
             <a:endParaRPr lang="en-US"/>
           </a:p>
@@ -2205,7 +2206,7 @@
           <a:p>
             <a:fld id="{5BCAD085-E8A6-8845-BD4E-CB4CCA059FC4}" type="datetimeFigureOut">
               <a:rPr lang="en-US" smtClean="0"/>
-              <a:t>8/5/2026</a:t>
+              <a:t>9/9/2026</a:t>
             </a:fld>
             <a:endParaRPr lang="en-US"/>
           </a:p>
@@ -2322,7 +2323,7 @@
           <a:p>
             <a:fld id="{5BCAD085-E8A6-8845-BD4E-CB4CCA059FC4}" type="datetimeFigureOut">
               <a:rPr lang="en-US" smtClean="0"/>
-              <a:t>8/5/2026</a:t>
+              <a:t>9/9/2026</a:t>
             </a:fld>
             <a:endParaRPr lang="en-US"/>
           </a:p>
@@ -2417,7 +2418,7 @@
           <a:p>
             <a:fld id="{5BCAD085-E8A6-8845-BD4E-CB4CCA059FC4}" type="datetimeFigureOut">
               <a:rPr lang="en-US" smtClean="0"/>
-              <a:t>8/5/2026</a:t>
+              <a:t>9/9/2026</a:t>
             </a:fld>
             <a:endParaRPr lang="en-US"/>
           </a:p>
@@ -2692,7 +2693,7 @@
           <a:p>
             <a:fld id="{5BCAD085-E8A6-8845-BD4E-CB4CCA059FC4}" type="datetimeFigureOut">
               <a:rPr lang="en-US" smtClean="0"/>
-              <a:t>8/5/2026</a:t>
+              <a:t>9/9/2026</a:t>
             </a:fld>
             <a:endParaRPr lang="en-US"/>
           </a:p>
@@ -2944,7 +2945,7 @@
           <a:p>
             <a:fld id="{5BCAD085-E8A6-8845-BD4E-CB4CCA059FC4}" type="datetimeFigureOut">
               <a:rPr lang="en-US" smtClean="0"/>
-              <a:t>8/5/2026</a:t>
+              <a:t>9/9/2026</a:t>
             </a:fld>
             <a:endParaRPr lang="en-US"/>
           </a:p>
@@ -3155,7 +3156,7 @@
           <a:p>
             <a:fld id="{5BCAD085-E8A6-8845-BD4E-CB4CCA059FC4}" type="datetimeFigureOut">
               <a:rPr lang="en-US" smtClean="0"/>
-              <a:t>8/5/2026</a:t>
+              <a:t>9/9/2026</a:t>
             </a:fld>
             <a:endParaRPr lang="en-US"/>
           </a:p>
@@ -4863,84 +4864,6 @@
       </p:grpSpPr>
       <p:sp>
         <p:nvSpPr>
-          <p:cNvPr id="2" name="TextBox 1"/>
-          <p:cNvSpPr txBox="1"/>
-          <p:nvPr/>
-        </p:nvSpPr>
-        <p:spPr>
-          <a:xfrm>
-            <a:off x="457200" y="201168"/>
-            <a:ext cx="11247120" cy="411480"/>
-          </a:xfrm>
-          <a:prstGeom prst="rect">
-            <a:avLst/>
-          </a:prstGeom>
-          <a:noFill/>
-        </p:spPr>
-        <p:txBody>
-          <a:bodyPr wrap="square" lIns="0" tIns="9144" rIns="0" bIns="9144" anchor="t">
-            <a:spAutoFit/>
-          </a:bodyPr>
-          <a:lstStyle/>
-          <a:p>
-            <a:pPr algn="l">
-              <a:lnSpc>
-                <a:spcPct val="100000"/>
-              </a:lnSpc>
-            </a:pPr>
-            <a:r>
-              <a:rPr sz="2000" b="1">
-                <a:solidFill>
-                  <a:srgbClr val="1E293B"/>
-                </a:solidFill>
-                <a:latin typeface="Microsoft YaHei"/>
-              </a:rPr>
-              <a:t>① SP + EP MoE 模式（DP=2, TP=2, EP=4）</a:t>
-            </a:r>
-          </a:p>
-        </p:txBody>
-      </p:sp>
-      <p:sp>
-        <p:nvSpPr>
-          <p:cNvPr id="3" name="TextBox 2"/>
-          <p:cNvSpPr txBox="1"/>
-          <p:nvPr/>
-        </p:nvSpPr>
-        <p:spPr>
-          <a:xfrm>
-            <a:off x="457200" y="621792"/>
-            <a:ext cx="11247120" cy="292608"/>
-          </a:xfrm>
-          <a:prstGeom prst="rect">
-            <a:avLst/>
-          </a:prstGeom>
-          <a:noFill/>
-        </p:spPr>
-        <p:txBody>
-          <a:bodyPr wrap="square" lIns="0" tIns="9144" rIns="0" bIns="9144" anchor="t">
-            <a:spAutoFit/>
-          </a:bodyPr>
-          <a:lstStyle/>
-          <a:p>
-            <a:pPr algn="l">
-              <a:lnSpc>
-                <a:spcPct val="100000"/>
-              </a:lnSpc>
-            </a:pPr>
-            <a:r>
-              <a:rPr sz="1000" b="0">
-                <a:solidFill>
-                  <a:srgbClr val="64748B"/>
-                </a:solidFill>
-                <a:latin typeface="Microsoft YaHei"/>
-              </a:rPr>
-              <a:t>Before 为 pass 前原始 FX 图；After = SP pass ×48 + MoE pass ×96 之后。fused MoE 分片进、分片出。</a:t>
-            </a:r>
-          </a:p>
-        </p:txBody>
-      </p:sp>
-      <p:sp>
-        <p:nvSpPr>
           <p:cNvPr id="4" name="Rounded Rectangle 3"/>
           <p:cNvSpPr/>
           <p:nvPr/>
@@ -4987,14 +4910,20 @@
               </a:lnSpc>
             </a:pPr>
             <a:r>
-              <a:rPr sz="1100" b="1">
+              <a:rPr lang="en-US" sz="1100" b="1" dirty="0">
                 <a:solidFill>
                   <a:srgbClr val="1E293B"/>
                 </a:solidFill>
                 <a:latin typeface="Microsoft YaHei"/>
               </a:rPr>
-              <a:t>Before（原始图）</a:t>
-            </a:r>
+              <a:t>TP</a:t>
+            </a:r>
+            <a:endParaRPr sz="1100" b="1" dirty="0">
+              <a:solidFill>
+                <a:srgbClr val="1E293B"/>
+              </a:solidFill>
+              <a:latin typeface="Microsoft YaHei"/>
+            </a:endParaRPr>
           </a:p>
         </p:txBody>
       </p:sp>
@@ -5046,13 +4975,13 @@
               </a:lnSpc>
             </a:pPr>
             <a:r>
-              <a:rPr sz="1100" b="1">
+              <a:rPr lang="en-US" sz="1100" b="1" dirty="0">
                 <a:solidFill>
                   <a:srgbClr val="1E293B"/>
                 </a:solidFill>
                 <a:latin typeface="Microsoft YaHei"/>
               </a:rPr>
-              <a:t>After（SP ×48 + MoE ×96）</a:t>
+              <a:t>TP+SP</a:t>
             </a:r>
           </a:p>
         </p:txBody>
@@ -7987,137 +7916,6 @@
                 <a:latin typeface="Microsoft YaHei"/>
               </a:rPr>
               <a:t>）</a:t>
-            </a:r>
-          </a:p>
-        </p:txBody>
-      </p:sp>
-      <p:sp>
-        <p:nvSpPr>
-          <p:cNvPr id="50" name="Rounded Rectangle 49"/>
-          <p:cNvSpPr/>
-          <p:nvPr/>
-        </p:nvSpPr>
-        <p:spPr>
-          <a:xfrm>
-            <a:off x="457200" y="5925312"/>
-            <a:ext cx="11292840" cy="804672"/>
-          </a:xfrm>
-          <a:prstGeom prst="roundRect">
-            <a:avLst>
-              <a:gd name="adj" fmla="val 12000"/>
-            </a:avLst>
-          </a:prstGeom>
-          <a:solidFill>
-            <a:srgbClr val="FFFFFF"/>
-          </a:solidFill>
-          <a:ln w="12700">
-            <a:solidFill>
-              <a:srgbClr val="E2E8F0"/>
-            </a:solidFill>
-          </a:ln>
-          <a:effectLst/>
-        </p:spPr>
-        <p:style>
-          <a:lnRef idx="1">
-            <a:schemeClr val="accent1"/>
-          </a:lnRef>
-          <a:fillRef idx="3">
-            <a:schemeClr val="accent1"/>
-          </a:fillRef>
-          <a:effectRef idx="2">
-            <a:schemeClr val="accent1"/>
-          </a:effectRef>
-          <a:fontRef idx="minor">
-            <a:schemeClr val="lt1"/>
-          </a:fontRef>
-        </p:style>
-        <p:txBody>
-          <a:bodyPr wrap="square" lIns="109728" tIns="9144" rIns="109728" bIns="9144" rtlCol="0" anchor="ctr"/>
-          <a:lstStyle/>
-          <a:p>
-            <a:pPr algn="l">
-              <a:lnSpc>
-                <a:spcPct val="100000"/>
-              </a:lnSpc>
-            </a:pPr>
-            <a:r>
-              <a:rPr sz="950" b="1">
-                <a:solidFill>
-                  <a:srgbClr val="1E293B"/>
-                </a:solidFill>
-                <a:latin typeface="Microsoft YaHei"/>
-              </a:rPr>
-              <a:t>• </a:t>
-            </a:r>
-            <a:r>
-              <a:rPr sz="1050" b="0">
-                <a:solidFill>
-                  <a:srgbClr val="1E293B"/>
-                </a:solidFill>
-                <a:latin typeface="Microsoft YaHei"/>
-              </a:rPr>
-              <a:t>每层通信：</a:t>
-            </a:r>
-            <a:r>
-              <a:rPr sz="1050" b="1">
-                <a:solidFill>
-                  <a:srgbClr val="1E293B"/>
-                </a:solidFill>
-                <a:latin typeface="Microsoft YaHei"/>
-              </a:rPr>
-              <a:t>1 all_reduce + 1 all_gather</a:t>
-            </a:r>
-            <a:r>
-              <a:rPr sz="1050" b="0">
-                <a:solidFill>
-                  <a:srgbClr val="1E293B"/>
-                </a:solidFill>
-                <a:latin typeface="Microsoft YaHei"/>
-              </a:rPr>
-              <a:t> → </a:t>
-            </a:r>
-            <a:r>
-              <a:rPr sz="1050" b="1">
-                <a:solidFill>
-                  <a:srgbClr val="1E293B"/>
-                </a:solidFill>
-                <a:latin typeface="Microsoft YaHei"/>
-              </a:rPr>
-              <a:t>1 reduce_scatter + 1 all_gather</a:t>
-            </a:r>
-            <a:r>
-              <a:rPr sz="1050" b="0">
-                <a:solidFill>
-                  <a:srgbClr val="1E293B"/>
-                </a:solidFill>
-                <a:latin typeface="Microsoft YaHei"/>
-              </a:rPr>
-              <a:t>；两处 norm 从 [T, 2048] 降到 [T/2, 2048]，sequence_parallel_chunk 消失。</a:t>
-            </a:r>
-          </a:p>
-          <a:p>
-            <a:pPr algn="l">
-              <a:lnSpc>
-                <a:spcPct val="100000"/>
-              </a:lnSpc>
-            </a:pPr>
-            <a:r>
-              <a:rPr sz="950" b="1">
-                <a:solidFill>
-                  <a:srgbClr val="1E293B"/>
-                </a:solidFill>
-                <a:latin typeface="Microsoft YaHei"/>
-              </a:rPr>
-              <a:t>• </a:t>
-            </a:r>
-            <a:r>
-              <a:rPr sz="1050" b="0">
-                <a:solidFill>
-                  <a:srgbClr val="1E293B"/>
-                </a:solidFill>
-                <a:latin typeface="Microsoft YaHei"/>
-              </a:rPr>
-              <a:t>中间过程：SP pass 先在 MoE 前制造出 all_gather + sp_chunk 恒等往返，MoE pass pattern ① 将其折叠；pattern ② 把 MoE 输出后的 all_gather 挪到下一层 norm 之后（gather 仍保留，因为 attention 需要完整序列）。</a:t>
             </a:r>
           </a:p>
         </p:txBody>
@@ -8255,3181 +8053,12 @@
           <a:chExt cx="0" cy="0"/>
         </a:xfrm>
       </p:grpSpPr>
-      <p:sp>
-        <p:nvSpPr>
-          <p:cNvPr id="2" name="TextBox 1"/>
-          <p:cNvSpPr txBox="1"/>
-          <p:nvPr/>
-        </p:nvSpPr>
-        <p:spPr>
-          <a:xfrm>
-            <a:off x="457200" y="201168"/>
-            <a:ext cx="11247120" cy="411480"/>
-          </a:xfrm>
-          <a:prstGeom prst="rect">
-            <a:avLst/>
-          </a:prstGeom>
-          <a:noFill/>
-        </p:spPr>
-        <p:txBody>
-          <a:bodyPr wrap="square" lIns="0" tIns="9144" rIns="0" bIns="9144" anchor="t">
-            <a:spAutoFit/>
-          </a:bodyPr>
-          <a:lstStyle/>
-          <a:p>
-            <a:pPr algn="l">
-              <a:lnSpc>
-                <a:spcPct val="100000"/>
-              </a:lnSpc>
-            </a:pPr>
-            <a:r>
-              <a:rPr sz="2000" b="1" dirty="0">
-                <a:solidFill>
-                  <a:srgbClr val="1E293B"/>
-                </a:solidFill>
-                <a:latin typeface="Microsoft YaHei"/>
-              </a:rPr>
-              <a:t>② TP </a:t>
-            </a:r>
-            <a:r>
-              <a:rPr sz="2000" b="1" dirty="0" err="1">
-                <a:solidFill>
-                  <a:srgbClr val="1E293B"/>
-                </a:solidFill>
-                <a:latin typeface="Microsoft YaHei"/>
-              </a:rPr>
-              <a:t>模式（DP</a:t>
-            </a:r>
-            <a:r>
-              <a:rPr sz="2000" b="1" dirty="0">
-                <a:solidFill>
-                  <a:srgbClr val="1E293B"/>
-                </a:solidFill>
-                <a:latin typeface="Microsoft YaHei"/>
-              </a:rPr>
-              <a:t>=1, TP=2, EP=2，MoE 非 SP）</a:t>
-            </a:r>
-          </a:p>
-        </p:txBody>
-      </p:sp>
-      <p:sp>
-        <p:nvSpPr>
-          <p:cNvPr id="3" name="TextBox 2"/>
-          <p:cNvSpPr txBox="1"/>
-          <p:nvPr/>
-        </p:nvSpPr>
-        <p:spPr>
-          <a:xfrm>
-            <a:off x="457200" y="621792"/>
-            <a:ext cx="11247120" cy="292608"/>
-          </a:xfrm>
-          <a:prstGeom prst="rect">
-            <a:avLst/>
-          </a:prstGeom>
-          <a:noFill/>
-        </p:spPr>
-        <p:txBody>
-          <a:bodyPr wrap="square" lIns="0" tIns="9144" rIns="0" bIns="9144" anchor="t">
-            <a:spAutoFit/>
-          </a:bodyPr>
-          <a:lstStyle/>
-          <a:p>
-            <a:pPr algn="l">
-              <a:lnSpc>
-                <a:spcPct val="100000"/>
-              </a:lnSpc>
-            </a:pPr>
-            <a:r>
-              <a:rPr sz="1000" b="0" dirty="0" err="1">
-                <a:solidFill>
-                  <a:srgbClr val="64748B"/>
-                </a:solidFill>
-                <a:latin typeface="Microsoft YaHei"/>
-              </a:rPr>
-              <a:t>只有</a:t>
-            </a:r>
-            <a:r>
-              <a:rPr sz="1000" b="0" dirty="0">
-                <a:solidFill>
-                  <a:srgbClr val="64748B"/>
-                </a:solidFill>
-                <a:latin typeface="Microsoft YaHei"/>
-              </a:rPr>
-              <a:t> SP pass </a:t>
-            </a:r>
-            <a:r>
-              <a:rPr sz="1000" b="0" dirty="0" err="1">
-                <a:solidFill>
-                  <a:srgbClr val="64748B"/>
-                </a:solidFill>
-                <a:latin typeface="Microsoft YaHei"/>
-              </a:rPr>
-              <a:t>生效：每层替换</a:t>
-            </a:r>
-            <a:r>
-              <a:rPr sz="1000" b="0" dirty="0">
-                <a:solidFill>
-                  <a:srgbClr val="64748B"/>
-                </a:solidFill>
-                <a:latin typeface="Microsoft YaHei"/>
-              </a:rPr>
-              <a:t> 2 </a:t>
-            </a:r>
-            <a:r>
-              <a:rPr sz="1000" b="0" dirty="0" err="1">
-                <a:solidFill>
-                  <a:srgbClr val="64748B"/>
-                </a:solidFill>
-                <a:latin typeface="Microsoft YaHei"/>
-              </a:rPr>
-              <a:t>处（o_proj</a:t>
-            </a:r>
-            <a:r>
-              <a:rPr sz="1000" b="0" dirty="0">
-                <a:solidFill>
-                  <a:srgbClr val="64748B"/>
-                </a:solidFill>
-                <a:latin typeface="Microsoft YaHei"/>
-              </a:rPr>
-              <a:t> </a:t>
-            </a:r>
-            <a:r>
-              <a:rPr sz="1000" b="0" dirty="0" err="1">
-                <a:solidFill>
-                  <a:srgbClr val="64748B"/>
-                </a:solidFill>
-                <a:latin typeface="Microsoft YaHei"/>
-              </a:rPr>
-              <a:t>后、MoE</a:t>
-            </a:r>
-            <a:r>
-              <a:rPr sz="1000" b="0" dirty="0">
-                <a:solidFill>
-                  <a:srgbClr val="64748B"/>
-                </a:solidFill>
-                <a:latin typeface="Microsoft YaHei"/>
-              </a:rPr>
-              <a:t> </a:t>
-            </a:r>
-            <a:r>
-              <a:rPr sz="1000" b="0" dirty="0" err="1">
-                <a:solidFill>
-                  <a:srgbClr val="64748B"/>
-                </a:solidFill>
-                <a:latin typeface="Microsoft YaHei"/>
-              </a:rPr>
-              <a:t>输出后</a:t>
-            </a:r>
-            <a:r>
-              <a:rPr sz="1000" b="0" dirty="0">
-                <a:solidFill>
-                  <a:srgbClr val="64748B"/>
-                </a:solidFill>
-                <a:latin typeface="Microsoft YaHei"/>
-              </a:rPr>
-              <a:t>），48 </a:t>
-            </a:r>
-            <a:r>
-              <a:rPr sz="1000" b="0" dirty="0" err="1">
-                <a:solidFill>
-                  <a:srgbClr val="64748B"/>
-                </a:solidFill>
-                <a:latin typeface="Microsoft YaHei"/>
-              </a:rPr>
-              <a:t>层共</a:t>
-            </a:r>
-            <a:r>
-              <a:rPr sz="1000" b="0" dirty="0">
-                <a:solidFill>
-                  <a:srgbClr val="64748B"/>
-                </a:solidFill>
-                <a:latin typeface="Microsoft YaHei"/>
-              </a:rPr>
-              <a:t> 96 </a:t>
-            </a:r>
-            <a:r>
-              <a:rPr sz="1000" b="0" dirty="0" err="1">
-                <a:solidFill>
-                  <a:srgbClr val="64748B"/>
-                </a:solidFill>
-                <a:latin typeface="Microsoft YaHei"/>
-              </a:rPr>
-              <a:t>处。fused</a:t>
-            </a:r>
-            <a:r>
-              <a:rPr sz="1000" b="0" dirty="0">
-                <a:solidFill>
-                  <a:srgbClr val="64748B"/>
-                </a:solidFill>
-                <a:latin typeface="Microsoft YaHei"/>
-              </a:rPr>
-              <a:t> </a:t>
-            </a:r>
-            <a:r>
-              <a:rPr sz="1000" b="0" dirty="0" err="1">
-                <a:solidFill>
-                  <a:srgbClr val="64748B"/>
-                </a:solidFill>
-                <a:latin typeface="Microsoft YaHei"/>
-              </a:rPr>
-              <a:t>MoE</a:t>
-            </a:r>
-            <a:r>
-              <a:rPr sz="1000" b="0" dirty="0">
-                <a:solidFill>
-                  <a:srgbClr val="64748B"/>
-                </a:solidFill>
-                <a:latin typeface="Microsoft YaHei"/>
-              </a:rPr>
-              <a:t> </a:t>
-            </a:r>
-            <a:r>
-              <a:rPr sz="1000" b="0" dirty="0" err="1">
-                <a:solidFill>
-                  <a:srgbClr val="64748B"/>
-                </a:solidFill>
-                <a:latin typeface="Microsoft YaHei"/>
-              </a:rPr>
-              <a:t>完整</a:t>
-            </a:r>
-            <a:r>
-              <a:rPr sz="1000" b="0" dirty="0">
-                <a:solidFill>
-                  <a:srgbClr val="64748B"/>
-                </a:solidFill>
-                <a:latin typeface="Microsoft YaHei"/>
-              </a:rPr>
-              <a:t> tensor </a:t>
-            </a:r>
-            <a:r>
-              <a:rPr sz="1000" b="0" dirty="0" err="1">
-                <a:solidFill>
-                  <a:srgbClr val="64748B"/>
-                </a:solidFill>
-                <a:latin typeface="Microsoft YaHei"/>
-              </a:rPr>
-              <a:t>进、完整</a:t>
-            </a:r>
-            <a:r>
-              <a:rPr sz="1000" b="0" dirty="0">
-                <a:solidFill>
-                  <a:srgbClr val="64748B"/>
-                </a:solidFill>
-                <a:latin typeface="Microsoft YaHei"/>
-              </a:rPr>
-              <a:t> tensor 出。</a:t>
-            </a:r>
-          </a:p>
-        </p:txBody>
-      </p:sp>
-      <p:sp>
-        <p:nvSpPr>
-          <p:cNvPr id="4" name="Rounded Rectangle 3"/>
-          <p:cNvSpPr/>
-          <p:nvPr/>
-        </p:nvSpPr>
-        <p:spPr>
-          <a:xfrm>
-            <a:off x="457200" y="987552"/>
-            <a:ext cx="5532120" cy="292608"/>
-          </a:xfrm>
-          <a:prstGeom prst="roundRect">
-            <a:avLst>
-              <a:gd name="adj" fmla="val 12000"/>
-            </a:avLst>
-          </a:prstGeom>
-          <a:solidFill>
-            <a:srgbClr val="F1F5F9"/>
-          </a:solidFill>
-          <a:ln>
-            <a:noFill/>
-          </a:ln>
-          <a:effectLst/>
-        </p:spPr>
-        <p:style>
-          <a:lnRef idx="1">
-            <a:schemeClr val="accent1"/>
-          </a:lnRef>
-          <a:fillRef idx="3">
-            <a:schemeClr val="accent1"/>
-          </a:fillRef>
-          <a:effectRef idx="2">
-            <a:schemeClr val="accent1"/>
-          </a:effectRef>
-          <a:fontRef idx="minor">
-            <a:schemeClr val="lt1"/>
-          </a:fontRef>
-        </p:style>
-        <p:txBody>
-          <a:bodyPr wrap="square" lIns="54864" tIns="9144" rIns="54864" bIns="9144" rtlCol="0" anchor="ctr"/>
-          <a:lstStyle/>
-          <a:p>
-            <a:pPr algn="ctr">
-              <a:lnSpc>
-                <a:spcPct val="100000"/>
-              </a:lnSpc>
-            </a:pPr>
-            <a:r>
-              <a:rPr sz="1100" b="1">
-                <a:solidFill>
-                  <a:srgbClr val="1E293B"/>
-                </a:solidFill>
-                <a:latin typeface="Microsoft YaHei"/>
-              </a:rPr>
-              <a:t>Before（原始图）</a:t>
-            </a:r>
-          </a:p>
-        </p:txBody>
-      </p:sp>
-      <p:sp>
-        <p:nvSpPr>
-          <p:cNvPr id="5" name="Rounded Rectangle 4"/>
-          <p:cNvSpPr/>
-          <p:nvPr/>
-        </p:nvSpPr>
-        <p:spPr>
-          <a:xfrm>
-            <a:off x="6217920" y="987552"/>
-            <a:ext cx="5532120" cy="292608"/>
-          </a:xfrm>
-          <a:prstGeom prst="roundRect">
-            <a:avLst>
-              <a:gd name="adj" fmla="val 12000"/>
-            </a:avLst>
-          </a:prstGeom>
-          <a:solidFill>
-            <a:srgbClr val="F1F5F9"/>
-          </a:solidFill>
-          <a:ln>
-            <a:noFill/>
-          </a:ln>
-          <a:effectLst/>
-        </p:spPr>
-        <p:style>
-          <a:lnRef idx="1">
-            <a:schemeClr val="accent1"/>
-          </a:lnRef>
-          <a:fillRef idx="3">
-            <a:schemeClr val="accent1"/>
-          </a:fillRef>
-          <a:effectRef idx="2">
-            <a:schemeClr val="accent1"/>
-          </a:effectRef>
-          <a:fontRef idx="minor">
-            <a:schemeClr val="lt1"/>
-          </a:fontRef>
-        </p:style>
-        <p:txBody>
-          <a:bodyPr wrap="square" lIns="54864" tIns="9144" rIns="54864" bIns="9144" rtlCol="0" anchor="ctr"/>
-          <a:lstStyle/>
-          <a:p>
-            <a:pPr algn="ctr">
-              <a:lnSpc>
-                <a:spcPct val="100000"/>
-              </a:lnSpc>
-            </a:pPr>
-            <a:r>
-              <a:rPr sz="1100" b="1">
-                <a:solidFill>
-                  <a:srgbClr val="1E293B"/>
-                </a:solidFill>
-                <a:latin typeface="Microsoft YaHei"/>
-              </a:rPr>
-              <a:t>After（SP ×96）</a:t>
-            </a:r>
-          </a:p>
-        </p:txBody>
-      </p:sp>
-      <p:sp>
-        <p:nvSpPr>
-          <p:cNvPr id="6" name="Rounded Rectangle 5"/>
-          <p:cNvSpPr/>
-          <p:nvPr/>
-        </p:nvSpPr>
-        <p:spPr>
-          <a:xfrm>
-            <a:off x="457200" y="1325880"/>
-            <a:ext cx="5532120" cy="382676"/>
-          </a:xfrm>
-          <a:prstGeom prst="roundRect">
-            <a:avLst>
-              <a:gd name="adj" fmla="val 12000"/>
-            </a:avLst>
-          </a:prstGeom>
-          <a:solidFill>
-            <a:srgbClr val="FFFFFF"/>
-          </a:solidFill>
-          <a:ln w="17780">
-            <a:solidFill>
-              <a:srgbClr val="6B7280"/>
-            </a:solidFill>
-            <a:prstDash val="dash"/>
-          </a:ln>
-          <a:effectLst/>
-        </p:spPr>
-        <p:style>
-          <a:lnRef idx="1">
-            <a:schemeClr val="accent1"/>
-          </a:lnRef>
-          <a:fillRef idx="3">
-            <a:schemeClr val="accent1"/>
-          </a:fillRef>
-          <a:effectRef idx="2">
-            <a:schemeClr val="accent1"/>
-          </a:effectRef>
-          <a:fontRef idx="minor">
-            <a:schemeClr val="lt1"/>
-          </a:fontRef>
-        </p:style>
-        <p:txBody>
-          <a:bodyPr wrap="square" lIns="54864" tIns="9144" rIns="54864" bIns="9144" rtlCol="0" anchor="ctr"/>
-          <a:lstStyle/>
-          <a:p>
-            <a:pPr algn="ctr">
-              <a:lnSpc>
-                <a:spcPct val="100000"/>
-              </a:lnSpc>
-            </a:pPr>
-            <a:r>
-              <a:rPr sz="950" b="1" dirty="0" err="1">
-                <a:solidFill>
-                  <a:srgbClr val="334155"/>
-                </a:solidFill>
-                <a:latin typeface="Consolas"/>
-              </a:rPr>
-              <a:t>上一层</a:t>
-            </a:r>
-            <a:r>
-              <a:rPr sz="950" b="1" dirty="0">
-                <a:solidFill>
-                  <a:srgbClr val="334155"/>
-                </a:solidFill>
-                <a:latin typeface="Consolas"/>
-              </a:rPr>
-              <a:t> </a:t>
-            </a:r>
-            <a:r>
-              <a:rPr sz="950" b="1" dirty="0" err="1">
-                <a:solidFill>
-                  <a:srgbClr val="334155"/>
-                </a:solidFill>
-                <a:latin typeface="Consolas"/>
-              </a:rPr>
-              <a:t>MoE</a:t>
-            </a:r>
-            <a:r>
-              <a:rPr sz="950" b="1" dirty="0">
-                <a:solidFill>
-                  <a:srgbClr val="334155"/>
-                </a:solidFill>
-                <a:latin typeface="Consolas"/>
-              </a:rPr>
-              <a:t> </a:t>
-            </a:r>
-            <a:r>
-              <a:rPr sz="950" b="1" dirty="0" err="1">
-                <a:solidFill>
-                  <a:srgbClr val="334155"/>
-                </a:solidFill>
-                <a:latin typeface="Consolas"/>
-              </a:rPr>
-              <a:t>输出（完整</a:t>
-            </a:r>
-            <a:r>
-              <a:rPr sz="950" b="1" dirty="0">
-                <a:solidFill>
-                  <a:srgbClr val="334155"/>
-                </a:solidFill>
-                <a:latin typeface="Consolas"/>
-              </a:rPr>
-              <a:t> tensor）</a:t>
-            </a:r>
-          </a:p>
-          <a:p>
-            <a:pPr algn="ctr">
-              <a:lnSpc>
-                <a:spcPct val="100000"/>
-              </a:lnSpc>
-            </a:pPr>
-            <a:r>
-              <a:rPr sz="700" b="0" dirty="0">
-                <a:solidFill>
-                  <a:srgbClr val="334155"/>
-                </a:solidFill>
-                <a:latin typeface="Consolas"/>
-              </a:rPr>
-              <a:t>[T, 2048]</a:t>
-            </a:r>
-          </a:p>
-        </p:txBody>
-      </p:sp>
-      <p:sp>
-        <p:nvSpPr>
-          <p:cNvPr id="7" name="TextBox 6"/>
-          <p:cNvSpPr txBox="1"/>
-          <p:nvPr/>
-        </p:nvSpPr>
-        <p:spPr>
-          <a:xfrm>
-            <a:off x="457200" y="1708556"/>
-            <a:ext cx="5532120" cy="77724"/>
-          </a:xfrm>
-          <a:prstGeom prst="rect">
-            <a:avLst/>
-          </a:prstGeom>
-          <a:noFill/>
-        </p:spPr>
-        <p:txBody>
-          <a:bodyPr wrap="square" lIns="0" tIns="9144" rIns="0" bIns="9144" anchor="ctr">
-            <a:spAutoFit/>
-          </a:bodyPr>
-          <a:lstStyle/>
-          <a:p>
-            <a:pPr algn="ctr">
-              <a:lnSpc>
-                <a:spcPct val="100000"/>
-              </a:lnSpc>
-            </a:pPr>
-            <a:r>
-              <a:rPr sz="800" b="0">
-                <a:solidFill>
-                  <a:srgbClr val="94A3B8"/>
-                </a:solidFill>
-                <a:latin typeface="Microsoft YaHei"/>
-              </a:rPr>
-              <a:t>↓</a:t>
-            </a:r>
-          </a:p>
-        </p:txBody>
-      </p:sp>
-      <p:sp>
-        <p:nvSpPr>
-          <p:cNvPr id="8" name="Rounded Rectangle 7"/>
-          <p:cNvSpPr/>
-          <p:nvPr/>
-        </p:nvSpPr>
-        <p:spPr>
-          <a:xfrm>
-            <a:off x="457200" y="1786280"/>
-            <a:ext cx="5532120" cy="382676"/>
-          </a:xfrm>
-          <a:prstGeom prst="roundRect">
-            <a:avLst>
-              <a:gd name="adj" fmla="val 12000"/>
-            </a:avLst>
-          </a:prstGeom>
-          <a:solidFill>
-            <a:srgbClr val="D97706"/>
-          </a:solidFill>
-          <a:ln>
-            <a:noFill/>
-          </a:ln>
-          <a:effectLst/>
-        </p:spPr>
-        <p:style>
-          <a:lnRef idx="1">
-            <a:schemeClr val="accent1"/>
-          </a:lnRef>
-          <a:fillRef idx="3">
-            <a:schemeClr val="accent1"/>
-          </a:fillRef>
-          <a:effectRef idx="2">
-            <a:schemeClr val="accent1"/>
-          </a:effectRef>
-          <a:fontRef idx="minor">
-            <a:schemeClr val="lt1"/>
-          </a:fontRef>
-        </p:style>
-        <p:txBody>
-          <a:bodyPr wrap="square" lIns="54864" tIns="9144" rIns="54864" bIns="9144" rtlCol="0" anchor="ctr"/>
-          <a:lstStyle/>
-          <a:p>
-            <a:pPr algn="ctr">
-              <a:lnSpc>
-                <a:spcPct val="100000"/>
-              </a:lnSpc>
-            </a:pPr>
-            <a:r>
-              <a:rPr sz="950" b="1" dirty="0" err="1">
-                <a:solidFill>
-                  <a:srgbClr val="FFFFFF"/>
-                </a:solidFill>
-                <a:latin typeface="Consolas"/>
-              </a:rPr>
-              <a:t>maybe_all_reduce_tensor_model_parallel</a:t>
-            </a:r>
-            <a:endParaRPr sz="950" b="1" dirty="0">
-              <a:solidFill>
-                <a:srgbClr val="FFFFFF"/>
-              </a:solidFill>
-              <a:latin typeface="Consolas"/>
-            </a:endParaRPr>
-          </a:p>
-          <a:p>
-            <a:pPr algn="ctr">
-              <a:lnSpc>
-                <a:spcPct val="100000"/>
-              </a:lnSpc>
-            </a:pPr>
-            <a:r>
-              <a:rPr sz="700" b="0" dirty="0">
-                <a:solidFill>
-                  <a:srgbClr val="FFFFFF"/>
-                </a:solidFill>
-                <a:latin typeface="Consolas"/>
-              </a:rPr>
-              <a:t>[T, 2048]</a:t>
-            </a:r>
-            <a:r>
-              <a:rPr sz="700" b="0" dirty="0">
-                <a:solidFill>
-                  <a:srgbClr val="FFFFFF"/>
-                </a:solidFill>
-                <a:latin typeface="Microsoft YaHei"/>
-              </a:rPr>
-              <a:t>  ·  </a:t>
-            </a:r>
-            <a:r>
-              <a:rPr sz="700" b="0" dirty="0" err="1">
-                <a:solidFill>
-                  <a:srgbClr val="FFFFFF"/>
-                </a:solidFill>
-                <a:latin typeface="Microsoft YaHei"/>
-              </a:rPr>
-              <a:t>MoE</a:t>
-            </a:r>
-            <a:r>
-              <a:rPr sz="700" b="0" dirty="0">
-                <a:solidFill>
-                  <a:srgbClr val="FFFFFF"/>
-                </a:solidFill>
-                <a:latin typeface="Microsoft YaHei"/>
-              </a:rPr>
-              <a:t> </a:t>
-            </a:r>
-            <a:r>
-              <a:rPr sz="700" b="0" dirty="0" err="1">
-                <a:solidFill>
-                  <a:srgbClr val="FFFFFF"/>
-                </a:solidFill>
-                <a:latin typeface="Microsoft YaHei"/>
-              </a:rPr>
-              <a:t>内部最终的</a:t>
-            </a:r>
-            <a:r>
-              <a:rPr sz="700" b="0" dirty="0">
-                <a:solidFill>
-                  <a:srgbClr val="FFFFFF"/>
-                </a:solidFill>
-                <a:latin typeface="Microsoft YaHei"/>
-              </a:rPr>
-              <a:t> TP </a:t>
-            </a:r>
-            <a:r>
-              <a:rPr sz="700" b="0" dirty="0" err="1">
-                <a:solidFill>
-                  <a:srgbClr val="FFFFFF"/>
-                </a:solidFill>
-                <a:latin typeface="Microsoft YaHei"/>
-              </a:rPr>
-              <a:t>all_reduce</a:t>
-            </a:r>
-            <a:endParaRPr sz="700" b="0" dirty="0">
-              <a:solidFill>
-                <a:srgbClr val="FFFFFF"/>
-              </a:solidFill>
-              <a:latin typeface="Microsoft YaHei"/>
-            </a:endParaRPr>
-          </a:p>
-        </p:txBody>
-      </p:sp>
-      <p:sp>
-        <p:nvSpPr>
-          <p:cNvPr id="9" name="TextBox 8"/>
-          <p:cNvSpPr txBox="1"/>
-          <p:nvPr/>
-        </p:nvSpPr>
-        <p:spPr>
-          <a:xfrm>
-            <a:off x="457200" y="2168956"/>
-            <a:ext cx="5532120" cy="77724"/>
-          </a:xfrm>
-          <a:prstGeom prst="rect">
-            <a:avLst/>
-          </a:prstGeom>
-          <a:noFill/>
-        </p:spPr>
-        <p:txBody>
-          <a:bodyPr wrap="square" lIns="0" tIns="9144" rIns="0" bIns="9144" anchor="ctr">
-            <a:spAutoFit/>
-          </a:bodyPr>
-          <a:lstStyle/>
-          <a:p>
-            <a:pPr algn="ctr">
-              <a:lnSpc>
-                <a:spcPct val="100000"/>
-              </a:lnSpc>
-            </a:pPr>
-            <a:r>
-              <a:rPr sz="800" b="0">
-                <a:solidFill>
-                  <a:srgbClr val="94A3B8"/>
-                </a:solidFill>
-                <a:latin typeface="Microsoft YaHei"/>
-              </a:rPr>
-              <a:t>↓</a:t>
-            </a:r>
-          </a:p>
-        </p:txBody>
-      </p:sp>
-      <p:sp>
-        <p:nvSpPr>
-          <p:cNvPr id="10" name="Rounded Rectangle 9"/>
-          <p:cNvSpPr/>
-          <p:nvPr/>
-        </p:nvSpPr>
-        <p:spPr>
-          <a:xfrm>
-            <a:off x="457200" y="2246680"/>
-            <a:ext cx="5532120" cy="382676"/>
-          </a:xfrm>
-          <a:prstGeom prst="roundRect">
-            <a:avLst>
-              <a:gd name="adj" fmla="val 12000"/>
-            </a:avLst>
-          </a:prstGeom>
-          <a:solidFill>
-            <a:srgbClr val="059669"/>
-          </a:solidFill>
-          <a:ln>
-            <a:noFill/>
-          </a:ln>
-          <a:effectLst/>
-        </p:spPr>
-        <p:style>
-          <a:lnRef idx="1">
-            <a:schemeClr val="accent1"/>
-          </a:lnRef>
-          <a:fillRef idx="3">
-            <a:schemeClr val="accent1"/>
-          </a:fillRef>
-          <a:effectRef idx="2">
-            <a:schemeClr val="accent1"/>
-          </a:effectRef>
-          <a:fontRef idx="minor">
-            <a:schemeClr val="lt1"/>
-          </a:fontRef>
-        </p:style>
-        <p:txBody>
-          <a:bodyPr wrap="square" lIns="54864" tIns="9144" rIns="54864" bIns="9144" rtlCol="0" anchor="ctr"/>
-          <a:lstStyle/>
-          <a:p>
-            <a:pPr algn="ctr">
-              <a:lnSpc>
-                <a:spcPct val="100000"/>
-              </a:lnSpc>
-            </a:pPr>
-            <a:r>
-              <a:rPr sz="950" b="1">
-                <a:solidFill>
-                  <a:srgbClr val="FFFFFF"/>
-                </a:solidFill>
-                <a:latin typeface="Consolas"/>
-              </a:rPr>
-              <a:t>maybe_chunk_residual + npu_add_rms_norm_bias</a:t>
-            </a:r>
-          </a:p>
-          <a:p>
-            <a:pPr algn="ctr">
-              <a:lnSpc>
-                <a:spcPct val="100000"/>
-              </a:lnSpc>
-            </a:pPr>
-            <a:r>
-              <a:rPr sz="700" b="0">
-                <a:solidFill>
-                  <a:srgbClr val="FFFFFF"/>
-                </a:solidFill>
-                <a:latin typeface="Consolas"/>
-              </a:rPr>
-              <a:t>[T, 2048]</a:t>
-            </a:r>
-          </a:p>
-        </p:txBody>
-      </p:sp>
-      <p:sp>
-        <p:nvSpPr>
-          <p:cNvPr id="11" name="TextBox 10"/>
-          <p:cNvSpPr txBox="1"/>
-          <p:nvPr/>
-        </p:nvSpPr>
-        <p:spPr>
-          <a:xfrm>
-            <a:off x="457200" y="2629356"/>
-            <a:ext cx="5532120" cy="77724"/>
-          </a:xfrm>
-          <a:prstGeom prst="rect">
-            <a:avLst/>
-          </a:prstGeom>
-          <a:noFill/>
-        </p:spPr>
-        <p:txBody>
-          <a:bodyPr wrap="square" lIns="0" tIns="9144" rIns="0" bIns="9144" anchor="ctr">
-            <a:spAutoFit/>
-          </a:bodyPr>
-          <a:lstStyle/>
-          <a:p>
-            <a:pPr algn="ctr">
-              <a:lnSpc>
-                <a:spcPct val="100000"/>
-              </a:lnSpc>
-            </a:pPr>
-            <a:r>
-              <a:rPr sz="800" b="0">
-                <a:solidFill>
-                  <a:srgbClr val="94A3B8"/>
-                </a:solidFill>
-                <a:latin typeface="Microsoft YaHei"/>
-              </a:rPr>
-              <a:t>↓</a:t>
-            </a:r>
-          </a:p>
-        </p:txBody>
-      </p:sp>
-      <p:sp>
-        <p:nvSpPr>
-          <p:cNvPr id="12" name="Rounded Rectangle 11"/>
-          <p:cNvSpPr/>
-          <p:nvPr/>
-        </p:nvSpPr>
-        <p:spPr>
-          <a:xfrm>
-            <a:off x="457200" y="2707080"/>
-            <a:ext cx="5532120" cy="382676"/>
-          </a:xfrm>
-          <a:prstGeom prst="roundRect">
-            <a:avLst>
-              <a:gd name="adj" fmla="val 12000"/>
-            </a:avLst>
-          </a:prstGeom>
-          <a:solidFill>
-            <a:srgbClr val="2563EB"/>
-          </a:solidFill>
-          <a:ln>
-            <a:noFill/>
-          </a:ln>
-          <a:effectLst/>
-        </p:spPr>
-        <p:style>
-          <a:lnRef idx="1">
-            <a:schemeClr val="accent1"/>
-          </a:lnRef>
-          <a:fillRef idx="3">
-            <a:schemeClr val="accent1"/>
-          </a:fillRef>
-          <a:effectRef idx="2">
-            <a:schemeClr val="accent1"/>
-          </a:effectRef>
-          <a:fontRef idx="minor">
-            <a:schemeClr val="lt1"/>
-          </a:fontRef>
-        </p:style>
-        <p:txBody>
-          <a:bodyPr wrap="square" lIns="54864" tIns="9144" rIns="54864" bIns="9144" rtlCol="0" anchor="ctr"/>
-          <a:lstStyle/>
-          <a:p>
-            <a:pPr algn="ctr">
-              <a:lnSpc>
-                <a:spcPct val="100000"/>
-              </a:lnSpc>
-            </a:pPr>
-            <a:r>
-              <a:rPr sz="950" b="1">
-                <a:solidFill>
-                  <a:srgbClr val="FFFFFF"/>
-                </a:solidFill>
-                <a:latin typeface="Consolas"/>
-              </a:rPr>
-              <a:t>unquantized_gemm (qkv_proj)</a:t>
-            </a:r>
-          </a:p>
-          <a:p>
-            <a:pPr algn="ctr">
-              <a:lnSpc>
-                <a:spcPct val="100000"/>
-              </a:lnSpc>
-            </a:pPr>
-            <a:r>
-              <a:rPr sz="700" b="0">
-                <a:solidFill>
-                  <a:srgbClr val="FFFFFF"/>
-                </a:solidFill>
-                <a:latin typeface="Consolas"/>
-              </a:rPr>
-              <a:t>[T, 2048] × [2048, 2560] → [T, 2560]</a:t>
-            </a:r>
-          </a:p>
-        </p:txBody>
-      </p:sp>
-      <p:sp>
-        <p:nvSpPr>
-          <p:cNvPr id="13" name="TextBox 12"/>
-          <p:cNvSpPr txBox="1"/>
-          <p:nvPr/>
-        </p:nvSpPr>
-        <p:spPr>
-          <a:xfrm>
-            <a:off x="457200" y="3089756"/>
-            <a:ext cx="5532120" cy="77724"/>
-          </a:xfrm>
-          <a:prstGeom prst="rect">
-            <a:avLst/>
-          </a:prstGeom>
-          <a:noFill/>
-        </p:spPr>
-        <p:txBody>
-          <a:bodyPr wrap="square" lIns="0" tIns="9144" rIns="0" bIns="9144" anchor="ctr">
-            <a:spAutoFit/>
-          </a:bodyPr>
-          <a:lstStyle/>
-          <a:p>
-            <a:pPr algn="ctr">
-              <a:lnSpc>
-                <a:spcPct val="100000"/>
-              </a:lnSpc>
-            </a:pPr>
-            <a:r>
-              <a:rPr sz="800" b="0">
-                <a:solidFill>
-                  <a:srgbClr val="94A3B8"/>
-                </a:solidFill>
-                <a:latin typeface="Microsoft YaHei"/>
-              </a:rPr>
-              <a:t>↓</a:t>
-            </a:r>
-          </a:p>
-        </p:txBody>
-      </p:sp>
-      <p:sp>
-        <p:nvSpPr>
-          <p:cNvPr id="14" name="Rounded Rectangle 13"/>
-          <p:cNvSpPr/>
-          <p:nvPr/>
-        </p:nvSpPr>
-        <p:spPr>
-          <a:xfrm>
-            <a:off x="457200" y="3167480"/>
-            <a:ext cx="5532120" cy="382676"/>
-          </a:xfrm>
-          <a:prstGeom prst="roundRect">
-            <a:avLst>
-              <a:gd name="adj" fmla="val 12000"/>
-            </a:avLst>
-          </a:prstGeom>
-          <a:solidFill>
-            <a:srgbClr val="7C3AED"/>
-          </a:solidFill>
-          <a:ln>
-            <a:noFill/>
-          </a:ln>
-          <a:effectLst/>
-        </p:spPr>
-        <p:style>
-          <a:lnRef idx="1">
-            <a:schemeClr val="accent1"/>
-          </a:lnRef>
-          <a:fillRef idx="3">
-            <a:schemeClr val="accent1"/>
-          </a:fillRef>
-          <a:effectRef idx="2">
-            <a:schemeClr val="accent1"/>
-          </a:effectRef>
-          <a:fontRef idx="minor">
-            <a:schemeClr val="lt1"/>
-          </a:fontRef>
-        </p:style>
-        <p:txBody>
-          <a:bodyPr wrap="square" lIns="54864" tIns="9144" rIns="54864" bIns="9144" rtlCol="0" anchor="ctr"/>
-          <a:lstStyle/>
-          <a:p>
-            <a:pPr algn="ctr">
-              <a:lnSpc>
-                <a:spcPct val="100000"/>
-              </a:lnSpc>
-            </a:pPr>
-            <a:r>
-              <a:rPr sz="950" b="1">
-                <a:solidFill>
-                  <a:srgbClr val="FFFFFF"/>
-                </a:solidFill>
-                <a:latin typeface="Consolas"/>
-              </a:rPr>
-              <a:t>qkv_rmsnorm_rope + unified_attention</a:t>
-            </a:r>
-          </a:p>
-          <a:p>
-            <a:pPr algn="ctr">
-              <a:lnSpc>
-                <a:spcPct val="100000"/>
-              </a:lnSpc>
-            </a:pPr>
-            <a:r>
-              <a:rPr sz="700" b="0">
-                <a:solidFill>
-                  <a:srgbClr val="FFFFFF"/>
-                </a:solidFill>
-                <a:latin typeface="Consolas"/>
-              </a:rPr>
-              <a:t>q [T, 16, 128] / kv [T, 2, 128] → [T, 2048]</a:t>
-            </a:r>
-          </a:p>
-        </p:txBody>
-      </p:sp>
-      <p:sp>
-        <p:nvSpPr>
-          <p:cNvPr id="15" name="TextBox 14"/>
-          <p:cNvSpPr txBox="1"/>
-          <p:nvPr/>
-        </p:nvSpPr>
-        <p:spPr>
-          <a:xfrm>
-            <a:off x="457200" y="3550156"/>
-            <a:ext cx="5532120" cy="77724"/>
-          </a:xfrm>
-          <a:prstGeom prst="rect">
-            <a:avLst/>
-          </a:prstGeom>
-          <a:noFill/>
-        </p:spPr>
-        <p:txBody>
-          <a:bodyPr wrap="square" lIns="0" tIns="9144" rIns="0" bIns="9144" anchor="ctr">
-            <a:spAutoFit/>
-          </a:bodyPr>
-          <a:lstStyle/>
-          <a:p>
-            <a:pPr algn="ctr">
-              <a:lnSpc>
-                <a:spcPct val="100000"/>
-              </a:lnSpc>
-            </a:pPr>
-            <a:r>
-              <a:rPr sz="800" b="0">
-                <a:solidFill>
-                  <a:srgbClr val="94A3B8"/>
-                </a:solidFill>
-                <a:latin typeface="Microsoft YaHei"/>
-              </a:rPr>
-              <a:t>↓</a:t>
-            </a:r>
-          </a:p>
-        </p:txBody>
-      </p:sp>
-      <p:sp>
-        <p:nvSpPr>
-          <p:cNvPr id="16" name="Rounded Rectangle 15"/>
-          <p:cNvSpPr/>
-          <p:nvPr/>
-        </p:nvSpPr>
-        <p:spPr>
-          <a:xfrm>
-            <a:off x="457200" y="3627880"/>
-            <a:ext cx="5532120" cy="382676"/>
-          </a:xfrm>
-          <a:prstGeom prst="roundRect">
-            <a:avLst>
-              <a:gd name="adj" fmla="val 12000"/>
-            </a:avLst>
-          </a:prstGeom>
-          <a:solidFill>
-            <a:srgbClr val="2563EB"/>
-          </a:solidFill>
-          <a:ln>
-            <a:noFill/>
-          </a:ln>
-          <a:effectLst/>
-        </p:spPr>
-        <p:style>
-          <a:lnRef idx="1">
-            <a:schemeClr val="accent1"/>
-          </a:lnRef>
-          <a:fillRef idx="3">
-            <a:schemeClr val="accent1"/>
-          </a:fillRef>
-          <a:effectRef idx="2">
-            <a:schemeClr val="accent1"/>
-          </a:effectRef>
-          <a:fontRef idx="minor">
-            <a:schemeClr val="lt1"/>
-          </a:fontRef>
-        </p:style>
-        <p:txBody>
-          <a:bodyPr wrap="square" lIns="54864" tIns="9144" rIns="54864" bIns="9144" rtlCol="0" anchor="ctr"/>
-          <a:lstStyle/>
-          <a:p>
-            <a:pPr algn="ctr">
-              <a:lnSpc>
-                <a:spcPct val="100000"/>
-              </a:lnSpc>
-            </a:pPr>
-            <a:r>
-              <a:rPr sz="950" b="1">
-                <a:solidFill>
-                  <a:srgbClr val="FFFFFF"/>
-                </a:solidFill>
-                <a:latin typeface="Consolas"/>
-              </a:rPr>
-              <a:t>unquantized_gemm (o_proj)</a:t>
-            </a:r>
-          </a:p>
-          <a:p>
-            <a:pPr algn="ctr">
-              <a:lnSpc>
-                <a:spcPct val="100000"/>
-              </a:lnSpc>
-            </a:pPr>
-            <a:r>
-              <a:rPr sz="700" b="0">
-                <a:solidFill>
-                  <a:srgbClr val="FFFFFF"/>
-                </a:solidFill>
-                <a:latin typeface="Consolas"/>
-              </a:rPr>
-              <a:t>[T, 2048] × [2048, 2048] → [T, 2048]</a:t>
-            </a:r>
-          </a:p>
-        </p:txBody>
-      </p:sp>
-      <p:sp>
-        <p:nvSpPr>
-          <p:cNvPr id="17" name="TextBox 16"/>
-          <p:cNvSpPr txBox="1"/>
-          <p:nvPr/>
-        </p:nvSpPr>
-        <p:spPr>
-          <a:xfrm>
-            <a:off x="457200" y="4010556"/>
-            <a:ext cx="5532120" cy="77724"/>
-          </a:xfrm>
-          <a:prstGeom prst="rect">
-            <a:avLst/>
-          </a:prstGeom>
-          <a:noFill/>
-        </p:spPr>
-        <p:txBody>
-          <a:bodyPr wrap="square" lIns="0" tIns="9144" rIns="0" bIns="9144" anchor="ctr">
-            <a:spAutoFit/>
-          </a:bodyPr>
-          <a:lstStyle/>
-          <a:p>
-            <a:pPr algn="ctr">
-              <a:lnSpc>
-                <a:spcPct val="100000"/>
-              </a:lnSpc>
-            </a:pPr>
-            <a:r>
-              <a:rPr sz="800" b="0">
-                <a:solidFill>
-                  <a:srgbClr val="94A3B8"/>
-                </a:solidFill>
-                <a:latin typeface="Microsoft YaHei"/>
-              </a:rPr>
-              <a:t>↓</a:t>
-            </a:r>
-          </a:p>
-        </p:txBody>
-      </p:sp>
-      <p:sp>
-        <p:nvSpPr>
-          <p:cNvPr id="18" name="Rounded Rectangle 17"/>
-          <p:cNvSpPr/>
-          <p:nvPr/>
-        </p:nvSpPr>
-        <p:spPr>
-          <a:xfrm>
-            <a:off x="457200" y="4088280"/>
-            <a:ext cx="5532120" cy="382676"/>
-          </a:xfrm>
-          <a:prstGeom prst="roundRect">
-            <a:avLst>
-              <a:gd name="adj" fmla="val 12000"/>
-            </a:avLst>
-          </a:prstGeom>
-          <a:solidFill>
-            <a:srgbClr val="D97706"/>
-          </a:solidFill>
-          <a:ln>
-            <a:noFill/>
-          </a:ln>
-          <a:effectLst/>
-        </p:spPr>
-        <p:style>
-          <a:lnRef idx="1">
-            <a:schemeClr val="accent1"/>
-          </a:lnRef>
-          <a:fillRef idx="3">
-            <a:schemeClr val="accent1"/>
-          </a:fillRef>
-          <a:effectRef idx="2">
-            <a:schemeClr val="accent1"/>
-          </a:effectRef>
-          <a:fontRef idx="minor">
-            <a:schemeClr val="lt1"/>
-          </a:fontRef>
-        </p:style>
-        <p:txBody>
-          <a:bodyPr wrap="square" lIns="54864" tIns="9144" rIns="54864" bIns="9144" rtlCol="0" anchor="ctr"/>
-          <a:lstStyle/>
-          <a:p>
-            <a:pPr algn="ctr">
-              <a:lnSpc>
-                <a:spcPct val="100000"/>
-              </a:lnSpc>
-            </a:pPr>
-            <a:r>
-              <a:rPr sz="950" b="1">
-                <a:solidFill>
-                  <a:srgbClr val="FFFFFF"/>
-                </a:solidFill>
-                <a:latin typeface="Consolas"/>
-              </a:rPr>
-              <a:t>all_reduce (TP)</a:t>
-            </a:r>
-          </a:p>
-          <a:p>
-            <a:pPr algn="ctr">
-              <a:lnSpc>
-                <a:spcPct val="100000"/>
-              </a:lnSpc>
-            </a:pPr>
-            <a:r>
-              <a:rPr sz="700" b="0">
-                <a:solidFill>
-                  <a:srgbClr val="FFFFFF"/>
-                </a:solidFill>
-                <a:latin typeface="Consolas"/>
-              </a:rPr>
-              <a:t>[T, 2048]</a:t>
-            </a:r>
-          </a:p>
-        </p:txBody>
-      </p:sp>
-      <p:sp>
-        <p:nvSpPr>
-          <p:cNvPr id="19" name="TextBox 18"/>
-          <p:cNvSpPr txBox="1"/>
-          <p:nvPr/>
-        </p:nvSpPr>
-        <p:spPr>
-          <a:xfrm>
-            <a:off x="457200" y="4470956"/>
-            <a:ext cx="5532120" cy="77724"/>
-          </a:xfrm>
-          <a:prstGeom prst="rect">
-            <a:avLst/>
-          </a:prstGeom>
-          <a:noFill/>
-        </p:spPr>
-        <p:txBody>
-          <a:bodyPr wrap="square" lIns="0" tIns="9144" rIns="0" bIns="9144" anchor="ctr">
-            <a:spAutoFit/>
-          </a:bodyPr>
-          <a:lstStyle/>
-          <a:p>
-            <a:pPr algn="ctr">
-              <a:lnSpc>
-                <a:spcPct val="100000"/>
-              </a:lnSpc>
-            </a:pPr>
-            <a:r>
-              <a:rPr sz="800" b="0">
-                <a:solidFill>
-                  <a:srgbClr val="94A3B8"/>
-                </a:solidFill>
-                <a:latin typeface="Microsoft YaHei"/>
-              </a:rPr>
-              <a:t>↓</a:t>
-            </a:r>
-          </a:p>
-        </p:txBody>
-      </p:sp>
-      <p:sp>
-        <p:nvSpPr>
-          <p:cNvPr id="20" name="Rounded Rectangle 19"/>
-          <p:cNvSpPr/>
-          <p:nvPr/>
-        </p:nvSpPr>
-        <p:spPr>
-          <a:xfrm>
-            <a:off x="457200" y="4548680"/>
-            <a:ext cx="5532120" cy="382676"/>
-          </a:xfrm>
-          <a:prstGeom prst="roundRect">
-            <a:avLst>
-              <a:gd name="adj" fmla="val 12000"/>
-            </a:avLst>
-          </a:prstGeom>
-          <a:solidFill>
-            <a:srgbClr val="059669"/>
-          </a:solidFill>
-          <a:ln>
-            <a:noFill/>
-          </a:ln>
-          <a:effectLst/>
-        </p:spPr>
-        <p:style>
-          <a:lnRef idx="1">
-            <a:schemeClr val="accent1"/>
-          </a:lnRef>
-          <a:fillRef idx="3">
-            <a:schemeClr val="accent1"/>
-          </a:fillRef>
-          <a:effectRef idx="2">
-            <a:schemeClr val="accent1"/>
-          </a:effectRef>
-          <a:fontRef idx="minor">
-            <a:schemeClr val="lt1"/>
-          </a:fontRef>
-        </p:style>
-        <p:txBody>
-          <a:bodyPr wrap="square" lIns="54864" tIns="9144" rIns="54864" bIns="9144" rtlCol="0" anchor="ctr"/>
-          <a:lstStyle/>
-          <a:p>
-            <a:pPr algn="ctr">
-              <a:lnSpc>
-                <a:spcPct val="100000"/>
-              </a:lnSpc>
-            </a:pPr>
-            <a:r>
-              <a:rPr sz="950" b="1">
-                <a:solidFill>
-                  <a:srgbClr val="FFFFFF"/>
-                </a:solidFill>
-                <a:latin typeface="Consolas"/>
-              </a:rPr>
-              <a:t>maybe_chunk_residual + npu_add_rms_norm_bias</a:t>
-            </a:r>
-          </a:p>
-          <a:p>
-            <a:pPr algn="ctr">
-              <a:lnSpc>
-                <a:spcPct val="100000"/>
-              </a:lnSpc>
-            </a:pPr>
-            <a:r>
-              <a:rPr sz="700" b="0">
-                <a:solidFill>
-                  <a:srgbClr val="FFFFFF"/>
-                </a:solidFill>
-                <a:latin typeface="Consolas"/>
-              </a:rPr>
-              <a:t>[T, 2048]</a:t>
-            </a:r>
-          </a:p>
-        </p:txBody>
-      </p:sp>
-      <p:sp>
-        <p:nvSpPr>
-          <p:cNvPr id="21" name="TextBox 20"/>
-          <p:cNvSpPr txBox="1"/>
-          <p:nvPr/>
-        </p:nvSpPr>
-        <p:spPr>
-          <a:xfrm>
-            <a:off x="457200" y="4931356"/>
-            <a:ext cx="5532120" cy="77724"/>
-          </a:xfrm>
-          <a:prstGeom prst="rect">
-            <a:avLst/>
-          </a:prstGeom>
-          <a:noFill/>
-        </p:spPr>
-        <p:txBody>
-          <a:bodyPr wrap="square" lIns="0" tIns="9144" rIns="0" bIns="9144" anchor="ctr">
-            <a:spAutoFit/>
-          </a:bodyPr>
-          <a:lstStyle/>
-          <a:p>
-            <a:pPr algn="ctr">
-              <a:lnSpc>
-                <a:spcPct val="100000"/>
-              </a:lnSpc>
-            </a:pPr>
-            <a:r>
-              <a:rPr sz="800" b="0">
-                <a:solidFill>
-                  <a:srgbClr val="94A3B8"/>
-                </a:solidFill>
-                <a:latin typeface="Microsoft YaHei"/>
-              </a:rPr>
-              <a:t>↓</a:t>
-            </a:r>
-          </a:p>
-        </p:txBody>
-      </p:sp>
-      <p:sp>
-        <p:nvSpPr>
-          <p:cNvPr id="22" name="Rounded Rectangle 21"/>
-          <p:cNvSpPr/>
-          <p:nvPr/>
-        </p:nvSpPr>
-        <p:spPr>
-          <a:xfrm>
-            <a:off x="457200" y="5009080"/>
-            <a:ext cx="5532120" cy="382676"/>
-          </a:xfrm>
-          <a:prstGeom prst="roundRect">
-            <a:avLst>
-              <a:gd name="adj" fmla="val 12000"/>
-            </a:avLst>
-          </a:prstGeom>
-          <a:solidFill>
-            <a:srgbClr val="2563EB"/>
-          </a:solidFill>
-          <a:ln>
-            <a:noFill/>
-          </a:ln>
-          <a:effectLst/>
-        </p:spPr>
-        <p:style>
-          <a:lnRef idx="1">
-            <a:schemeClr val="accent1"/>
-          </a:lnRef>
-          <a:fillRef idx="3">
-            <a:schemeClr val="accent1"/>
-          </a:fillRef>
-          <a:effectRef idx="2">
-            <a:schemeClr val="accent1"/>
-          </a:effectRef>
-          <a:fontRef idx="minor">
-            <a:schemeClr val="lt1"/>
-          </a:fontRef>
-        </p:style>
-        <p:txBody>
-          <a:bodyPr wrap="square" lIns="54864" tIns="9144" rIns="54864" bIns="9144" rtlCol="0" anchor="ctr"/>
-          <a:lstStyle/>
-          <a:p>
-            <a:pPr algn="ctr">
-              <a:lnSpc>
-                <a:spcPct val="100000"/>
-              </a:lnSpc>
-            </a:pPr>
-            <a:r>
-              <a:rPr sz="950" b="1">
-                <a:solidFill>
-                  <a:srgbClr val="FFFFFF"/>
-                </a:solidFill>
-                <a:latin typeface="Consolas"/>
-              </a:rPr>
-              <a:t>unquantized_gemm (gate / router)</a:t>
-            </a:r>
-          </a:p>
-          <a:p>
-            <a:pPr algn="ctr">
-              <a:lnSpc>
-                <a:spcPct val="100000"/>
-              </a:lnSpc>
-            </a:pPr>
-            <a:r>
-              <a:rPr sz="700" b="0">
-                <a:solidFill>
-                  <a:srgbClr val="FFFFFF"/>
-                </a:solidFill>
-                <a:latin typeface="Consolas"/>
-              </a:rPr>
-              <a:t>[T, 2048] × [2048, 128] → [T, 128]</a:t>
-            </a:r>
-          </a:p>
-        </p:txBody>
-      </p:sp>
-      <p:sp>
-        <p:nvSpPr>
-          <p:cNvPr id="23" name="TextBox 22"/>
-          <p:cNvSpPr txBox="1"/>
-          <p:nvPr/>
-        </p:nvSpPr>
-        <p:spPr>
-          <a:xfrm>
-            <a:off x="457200" y="5391756"/>
-            <a:ext cx="5532120" cy="77724"/>
-          </a:xfrm>
-          <a:prstGeom prst="rect">
-            <a:avLst/>
-          </a:prstGeom>
-          <a:noFill/>
-        </p:spPr>
-        <p:txBody>
-          <a:bodyPr wrap="square" lIns="0" tIns="9144" rIns="0" bIns="9144" anchor="ctr">
-            <a:spAutoFit/>
-          </a:bodyPr>
-          <a:lstStyle/>
-          <a:p>
-            <a:pPr algn="ctr">
-              <a:lnSpc>
-                <a:spcPct val="100000"/>
-              </a:lnSpc>
-            </a:pPr>
-            <a:r>
-              <a:rPr sz="800" b="0">
-                <a:solidFill>
-                  <a:srgbClr val="94A3B8"/>
-                </a:solidFill>
-                <a:latin typeface="Microsoft YaHei"/>
-              </a:rPr>
-              <a:t>↓</a:t>
-            </a:r>
-          </a:p>
-        </p:txBody>
-      </p:sp>
-      <p:sp>
-        <p:nvSpPr>
-          <p:cNvPr id="24" name="Rounded Rectangle 23"/>
-          <p:cNvSpPr/>
-          <p:nvPr/>
-        </p:nvSpPr>
-        <p:spPr>
-          <a:xfrm>
-            <a:off x="457200" y="5469480"/>
-            <a:ext cx="5532120" cy="382676"/>
-          </a:xfrm>
-          <a:prstGeom prst="roundRect">
-            <a:avLst>
-              <a:gd name="adj" fmla="val 12000"/>
-            </a:avLst>
-          </a:prstGeom>
-          <a:solidFill>
-            <a:srgbClr val="DC2626"/>
-          </a:solidFill>
-          <a:ln>
-            <a:noFill/>
-          </a:ln>
-          <a:effectLst/>
-        </p:spPr>
-        <p:style>
-          <a:lnRef idx="1">
-            <a:schemeClr val="accent1"/>
-          </a:lnRef>
-          <a:fillRef idx="3">
-            <a:schemeClr val="accent1"/>
-          </a:fillRef>
-          <a:effectRef idx="2">
-            <a:schemeClr val="accent1"/>
-          </a:effectRef>
-          <a:fontRef idx="minor">
-            <a:schemeClr val="lt1"/>
-          </a:fontRef>
-        </p:style>
-        <p:txBody>
-          <a:bodyPr wrap="square" lIns="54864" tIns="9144" rIns="54864" bIns="9144" rtlCol="0" anchor="ctr"/>
-          <a:lstStyle/>
-          <a:p>
-            <a:pPr algn="ctr">
-              <a:lnSpc>
-                <a:spcPct val="100000"/>
-              </a:lnSpc>
-            </a:pPr>
-            <a:r>
-              <a:rPr sz="950" b="1">
-                <a:solidFill>
-                  <a:srgbClr val="FFFFFF"/>
-                </a:solidFill>
-                <a:latin typeface="Consolas"/>
-              </a:rPr>
-              <a:t>moe_forward</a:t>
-            </a:r>
-          </a:p>
-          <a:p>
-            <a:pPr algn="ctr">
-              <a:lnSpc>
-                <a:spcPct val="100000"/>
-              </a:lnSpc>
-            </a:pPr>
-            <a:r>
-              <a:rPr sz="700" b="0">
-                <a:solidFill>
-                  <a:srgbClr val="FFFFFF"/>
-                </a:solidFill>
-                <a:latin typeface="Consolas"/>
-              </a:rPr>
-              <a:t>in [T, 2048] → out [T, 2048]</a:t>
-            </a:r>
-            <a:r>
-              <a:rPr sz="700" b="0">
-                <a:solidFill>
-                  <a:srgbClr val="FFFFFF"/>
-                </a:solidFill>
-                <a:latin typeface="Microsoft YaHei"/>
-              </a:rPr>
-              <a:t>  ·  内部 EP all2all（64 experts/rank）+ 最终 TP all_reduce</a:t>
-            </a:r>
-          </a:p>
-        </p:txBody>
-      </p:sp>
-      <p:sp>
-        <p:nvSpPr>
-          <p:cNvPr id="25" name="Rounded Rectangle 24"/>
-          <p:cNvSpPr/>
-          <p:nvPr/>
-        </p:nvSpPr>
-        <p:spPr>
-          <a:xfrm>
-            <a:off x="6217920" y="1325880"/>
-            <a:ext cx="5532120" cy="305943"/>
-          </a:xfrm>
-          <a:prstGeom prst="roundRect">
-            <a:avLst>
-              <a:gd name="adj" fmla="val 12000"/>
-            </a:avLst>
-          </a:prstGeom>
-          <a:solidFill>
-            <a:srgbClr val="FFFFFF"/>
-          </a:solidFill>
-          <a:ln w="17780">
-            <a:solidFill>
-              <a:srgbClr val="6B7280"/>
-            </a:solidFill>
-            <a:prstDash val="dash"/>
-          </a:ln>
-          <a:effectLst/>
-        </p:spPr>
-        <p:style>
-          <a:lnRef idx="1">
-            <a:schemeClr val="accent1"/>
-          </a:lnRef>
-          <a:fillRef idx="3">
-            <a:schemeClr val="accent1"/>
-          </a:fillRef>
-          <a:effectRef idx="2">
-            <a:schemeClr val="accent1"/>
-          </a:effectRef>
-          <a:fontRef idx="minor">
-            <a:schemeClr val="lt1"/>
-          </a:fontRef>
-        </p:style>
-        <p:txBody>
-          <a:bodyPr wrap="square" lIns="54864" tIns="9144" rIns="54864" bIns="9144" rtlCol="0" anchor="ctr"/>
-          <a:lstStyle/>
-          <a:p>
-            <a:pPr algn="ctr">
-              <a:lnSpc>
-                <a:spcPct val="100000"/>
-              </a:lnSpc>
-            </a:pPr>
-            <a:r>
-              <a:rPr sz="950" b="1">
-                <a:solidFill>
-                  <a:srgbClr val="334155"/>
-                </a:solidFill>
-                <a:latin typeface="Consolas"/>
-              </a:rPr>
-              <a:t>上一层 MoE 输出（完整 tensor）</a:t>
-            </a:r>
-          </a:p>
-          <a:p>
-            <a:pPr algn="ctr">
-              <a:lnSpc>
-                <a:spcPct val="100000"/>
-              </a:lnSpc>
-            </a:pPr>
-            <a:r>
-              <a:rPr sz="700" b="0">
-                <a:solidFill>
-                  <a:srgbClr val="334155"/>
-                </a:solidFill>
-                <a:latin typeface="Consolas"/>
-              </a:rPr>
-              <a:t>[T, 2048]</a:t>
-            </a:r>
-          </a:p>
-        </p:txBody>
-      </p:sp>
-      <p:sp>
-        <p:nvSpPr>
-          <p:cNvPr id="26" name="TextBox 25"/>
-          <p:cNvSpPr txBox="1"/>
-          <p:nvPr/>
-        </p:nvSpPr>
-        <p:spPr>
-          <a:xfrm>
-            <a:off x="6217920" y="1631823"/>
-            <a:ext cx="5532120" cy="77724"/>
-          </a:xfrm>
-          <a:prstGeom prst="rect">
-            <a:avLst/>
-          </a:prstGeom>
-          <a:noFill/>
-        </p:spPr>
-        <p:txBody>
-          <a:bodyPr wrap="square" lIns="0" tIns="9144" rIns="0" bIns="9144" anchor="ctr">
-            <a:spAutoFit/>
-          </a:bodyPr>
-          <a:lstStyle/>
-          <a:p>
-            <a:pPr algn="ctr">
-              <a:lnSpc>
-                <a:spcPct val="100000"/>
-              </a:lnSpc>
-            </a:pPr>
-            <a:r>
-              <a:rPr sz="800" b="0">
-                <a:solidFill>
-                  <a:srgbClr val="94A3B8"/>
-                </a:solidFill>
-                <a:latin typeface="Microsoft YaHei"/>
-              </a:rPr>
-              <a:t>↓</a:t>
-            </a:r>
-          </a:p>
-        </p:txBody>
-      </p:sp>
-      <p:sp>
-        <p:nvSpPr>
-          <p:cNvPr id="27" name="Rounded Rectangle 26"/>
-          <p:cNvSpPr/>
-          <p:nvPr/>
-        </p:nvSpPr>
-        <p:spPr>
-          <a:xfrm>
-            <a:off x="6217920" y="1709547"/>
-            <a:ext cx="5532120" cy="305943"/>
-          </a:xfrm>
-          <a:prstGeom prst="roundRect">
-            <a:avLst>
-              <a:gd name="adj" fmla="val 12000"/>
-            </a:avLst>
-          </a:prstGeom>
-          <a:solidFill>
-            <a:srgbClr val="D97706"/>
-          </a:solidFill>
-          <a:ln>
-            <a:noFill/>
-          </a:ln>
-          <a:effectLst/>
-        </p:spPr>
-        <p:style>
-          <a:lnRef idx="1">
-            <a:schemeClr val="accent1"/>
-          </a:lnRef>
-          <a:fillRef idx="3">
-            <a:schemeClr val="accent1"/>
-          </a:fillRef>
-          <a:effectRef idx="2">
-            <a:schemeClr val="accent1"/>
-          </a:effectRef>
-          <a:fontRef idx="minor">
-            <a:schemeClr val="lt1"/>
-          </a:fontRef>
-        </p:style>
-        <p:txBody>
-          <a:bodyPr wrap="square" lIns="54864" tIns="9144" rIns="54864" bIns="9144" rtlCol="0" anchor="ctr"/>
-          <a:lstStyle/>
-          <a:p>
-            <a:pPr algn="ctr">
-              <a:lnSpc>
-                <a:spcPct val="100000"/>
-              </a:lnSpc>
-            </a:pPr>
-            <a:r>
-              <a:rPr sz="950" b="1" dirty="0" err="1">
-                <a:solidFill>
-                  <a:srgbClr val="FFFFFF"/>
-                </a:solidFill>
-                <a:latin typeface="Consolas"/>
-              </a:rPr>
-              <a:t>reduce_scatter</a:t>
-            </a:r>
-            <a:r>
-              <a:rPr sz="950" b="1" dirty="0">
-                <a:solidFill>
-                  <a:srgbClr val="FFFFFF"/>
-                </a:solidFill>
-                <a:latin typeface="Consolas"/>
-              </a:rPr>
-              <a:t> (TP)</a:t>
-            </a:r>
-            <a:r>
-              <a:rPr lang="en-US" sz="950" b="1" dirty="0">
-                <a:solidFill>
-                  <a:srgbClr val="FFFFFF"/>
-                </a:solidFill>
-                <a:latin typeface="Consolas"/>
-              </a:rPr>
-              <a:t>659</a:t>
-            </a:r>
-            <a:endParaRPr sz="950" b="1" dirty="0">
-              <a:solidFill>
-                <a:srgbClr val="FFFFFF"/>
-              </a:solidFill>
-              <a:latin typeface="Consolas"/>
-            </a:endParaRPr>
-          </a:p>
-          <a:p>
-            <a:pPr algn="ctr">
-              <a:lnSpc>
-                <a:spcPct val="100000"/>
-              </a:lnSpc>
-            </a:pPr>
-            <a:r>
-              <a:rPr sz="700" b="0" dirty="0">
-                <a:solidFill>
-                  <a:srgbClr val="FFFFFF"/>
-                </a:solidFill>
-                <a:latin typeface="Consolas"/>
-              </a:rPr>
-              <a:t>[T, 2048] → [T/2, 2048]</a:t>
-            </a:r>
-            <a:r>
-              <a:rPr sz="700" b="0" dirty="0">
-                <a:solidFill>
-                  <a:srgbClr val="FFFFFF"/>
-                </a:solidFill>
-                <a:latin typeface="Microsoft YaHei"/>
-              </a:rPr>
-              <a:t>  ·  SP pass </a:t>
-            </a:r>
-            <a:r>
-              <a:rPr sz="700" b="0" dirty="0" err="1">
-                <a:solidFill>
-                  <a:srgbClr val="FFFFFF"/>
-                </a:solidFill>
-                <a:latin typeface="Microsoft YaHei"/>
-              </a:rPr>
-              <a:t>替换点</a:t>
-            </a:r>
-            <a:r>
-              <a:rPr sz="700" b="0" dirty="0">
-                <a:solidFill>
-                  <a:srgbClr val="FFFFFF"/>
-                </a:solidFill>
-                <a:latin typeface="Microsoft YaHei"/>
-              </a:rPr>
-              <a:t> ②：</a:t>
-            </a:r>
-            <a:r>
-              <a:rPr sz="700" b="0" dirty="0" err="1">
-                <a:solidFill>
-                  <a:srgbClr val="FFFFFF"/>
-                </a:solidFill>
-                <a:latin typeface="Microsoft YaHei"/>
-              </a:rPr>
-              <a:t>MoE</a:t>
-            </a:r>
-            <a:r>
-              <a:rPr sz="700" b="0" dirty="0">
-                <a:solidFill>
-                  <a:srgbClr val="FFFFFF"/>
-                </a:solidFill>
-                <a:latin typeface="Microsoft YaHei"/>
-              </a:rPr>
-              <a:t> </a:t>
-            </a:r>
-            <a:r>
-              <a:rPr sz="700" b="0" dirty="0" err="1">
-                <a:solidFill>
-                  <a:srgbClr val="FFFFFF"/>
-                </a:solidFill>
-                <a:latin typeface="Microsoft YaHei"/>
-              </a:rPr>
-              <a:t>后的</a:t>
-            </a:r>
-            <a:r>
-              <a:rPr sz="700" b="0" dirty="0">
-                <a:solidFill>
-                  <a:srgbClr val="FFFFFF"/>
-                </a:solidFill>
-                <a:latin typeface="Microsoft YaHei"/>
-              </a:rPr>
-              <a:t> </a:t>
-            </a:r>
-            <a:r>
-              <a:rPr sz="700" b="0" dirty="0" err="1">
-                <a:solidFill>
-                  <a:srgbClr val="FFFFFF"/>
-                </a:solidFill>
-                <a:latin typeface="Microsoft YaHei"/>
-              </a:rPr>
-              <a:t>maybe_all_reduce</a:t>
-            </a:r>
-            <a:endParaRPr sz="700" b="0" dirty="0">
-              <a:solidFill>
-                <a:srgbClr val="FFFFFF"/>
-              </a:solidFill>
-              <a:latin typeface="Microsoft YaHei"/>
-            </a:endParaRPr>
-          </a:p>
-        </p:txBody>
-      </p:sp>
-      <p:sp>
-        <p:nvSpPr>
-          <p:cNvPr id="28" name="TextBox 27"/>
-          <p:cNvSpPr txBox="1"/>
-          <p:nvPr/>
-        </p:nvSpPr>
-        <p:spPr>
-          <a:xfrm>
-            <a:off x="6217920" y="2015490"/>
-            <a:ext cx="5532120" cy="77724"/>
-          </a:xfrm>
-          <a:prstGeom prst="rect">
-            <a:avLst/>
-          </a:prstGeom>
-          <a:noFill/>
-        </p:spPr>
-        <p:txBody>
-          <a:bodyPr wrap="square" lIns="0" tIns="9144" rIns="0" bIns="9144" anchor="ctr">
-            <a:spAutoFit/>
-          </a:bodyPr>
-          <a:lstStyle/>
-          <a:p>
-            <a:pPr algn="ctr">
-              <a:lnSpc>
-                <a:spcPct val="100000"/>
-              </a:lnSpc>
-            </a:pPr>
-            <a:r>
-              <a:rPr sz="800" b="0">
-                <a:solidFill>
-                  <a:srgbClr val="94A3B8"/>
-                </a:solidFill>
-                <a:latin typeface="Microsoft YaHei"/>
-              </a:rPr>
-              <a:t>↓</a:t>
-            </a:r>
-          </a:p>
-        </p:txBody>
-      </p:sp>
-      <p:sp>
-        <p:nvSpPr>
-          <p:cNvPr id="29" name="Rounded Rectangle 28"/>
-          <p:cNvSpPr/>
-          <p:nvPr/>
-        </p:nvSpPr>
-        <p:spPr>
-          <a:xfrm>
-            <a:off x="6217920" y="2093214"/>
-            <a:ext cx="5532120" cy="305943"/>
-          </a:xfrm>
-          <a:prstGeom prst="roundRect">
-            <a:avLst>
-              <a:gd name="adj" fmla="val 12000"/>
-            </a:avLst>
-          </a:prstGeom>
-          <a:solidFill>
-            <a:srgbClr val="059669"/>
-          </a:solidFill>
-          <a:ln>
-            <a:noFill/>
-          </a:ln>
-          <a:effectLst/>
-        </p:spPr>
-        <p:style>
-          <a:lnRef idx="1">
-            <a:schemeClr val="accent1"/>
-          </a:lnRef>
-          <a:fillRef idx="3">
-            <a:schemeClr val="accent1"/>
-          </a:fillRef>
-          <a:effectRef idx="2">
-            <a:schemeClr val="accent1"/>
-          </a:effectRef>
-          <a:fontRef idx="minor">
-            <a:schemeClr val="lt1"/>
-          </a:fontRef>
-        </p:style>
-        <p:txBody>
-          <a:bodyPr wrap="square" lIns="54864" tIns="9144" rIns="54864" bIns="9144" rtlCol="0" anchor="ctr"/>
-          <a:lstStyle/>
-          <a:p>
-            <a:pPr algn="ctr">
-              <a:lnSpc>
-                <a:spcPct val="100000"/>
-              </a:lnSpc>
-            </a:pPr>
-            <a:r>
-              <a:rPr sz="950" b="1">
-                <a:solidFill>
-                  <a:srgbClr val="FFFFFF"/>
-                </a:solidFill>
-                <a:latin typeface="Consolas"/>
-              </a:rPr>
-              <a:t>maybe_chunk_residual + npu_add_rms_norm_bias</a:t>
-            </a:r>
-          </a:p>
-          <a:p>
-            <a:pPr algn="ctr">
-              <a:lnSpc>
-                <a:spcPct val="100000"/>
-              </a:lnSpc>
-            </a:pPr>
-            <a:r>
-              <a:rPr sz="700" b="0">
-                <a:solidFill>
-                  <a:srgbClr val="FFFFFF"/>
-                </a:solidFill>
-                <a:latin typeface="Consolas"/>
-              </a:rPr>
-              <a:t>[T/2, 2048]</a:t>
-            </a:r>
-          </a:p>
-        </p:txBody>
-      </p:sp>
-      <p:sp>
-        <p:nvSpPr>
-          <p:cNvPr id="30" name="TextBox 29"/>
-          <p:cNvSpPr txBox="1"/>
-          <p:nvPr/>
-        </p:nvSpPr>
-        <p:spPr>
-          <a:xfrm>
-            <a:off x="6217920" y="2399157"/>
-            <a:ext cx="5532120" cy="77724"/>
-          </a:xfrm>
-          <a:prstGeom prst="rect">
-            <a:avLst/>
-          </a:prstGeom>
-          <a:noFill/>
-        </p:spPr>
-        <p:txBody>
-          <a:bodyPr wrap="square" lIns="0" tIns="9144" rIns="0" bIns="9144" anchor="ctr">
-            <a:spAutoFit/>
-          </a:bodyPr>
-          <a:lstStyle/>
-          <a:p>
-            <a:pPr algn="ctr">
-              <a:lnSpc>
-                <a:spcPct val="100000"/>
-              </a:lnSpc>
-            </a:pPr>
-            <a:r>
-              <a:rPr sz="800" b="0">
-                <a:solidFill>
-                  <a:srgbClr val="94A3B8"/>
-                </a:solidFill>
-                <a:latin typeface="Microsoft YaHei"/>
-              </a:rPr>
-              <a:t>↓</a:t>
-            </a:r>
-          </a:p>
-        </p:txBody>
-      </p:sp>
-      <p:sp>
-        <p:nvSpPr>
-          <p:cNvPr id="31" name="Rounded Rectangle 30"/>
-          <p:cNvSpPr/>
-          <p:nvPr/>
-        </p:nvSpPr>
-        <p:spPr>
-          <a:xfrm>
-            <a:off x="6217920" y="2476881"/>
-            <a:ext cx="5532120" cy="305943"/>
-          </a:xfrm>
-          <a:prstGeom prst="roundRect">
-            <a:avLst>
-              <a:gd name="adj" fmla="val 12000"/>
-            </a:avLst>
-          </a:prstGeom>
-          <a:solidFill>
-            <a:srgbClr val="D97706"/>
-          </a:solidFill>
-          <a:ln>
-            <a:noFill/>
-          </a:ln>
-          <a:effectLst/>
-        </p:spPr>
-        <p:style>
-          <a:lnRef idx="1">
-            <a:schemeClr val="accent1"/>
-          </a:lnRef>
-          <a:fillRef idx="3">
-            <a:schemeClr val="accent1"/>
-          </a:fillRef>
-          <a:effectRef idx="2">
-            <a:schemeClr val="accent1"/>
-          </a:effectRef>
-          <a:fontRef idx="minor">
-            <a:schemeClr val="lt1"/>
-          </a:fontRef>
-        </p:style>
-        <p:txBody>
-          <a:bodyPr wrap="square" lIns="54864" tIns="9144" rIns="54864" bIns="9144" rtlCol="0" anchor="ctr"/>
-          <a:lstStyle/>
-          <a:p>
-            <a:pPr algn="ctr">
-              <a:lnSpc>
-                <a:spcPct val="100000"/>
-              </a:lnSpc>
-            </a:pPr>
-            <a:r>
-              <a:rPr sz="950" b="1">
-                <a:solidFill>
-                  <a:srgbClr val="FFFFFF"/>
-                </a:solidFill>
-                <a:latin typeface="Consolas"/>
-              </a:rPr>
-              <a:t>all_gather (TP)</a:t>
-            </a:r>
-          </a:p>
-          <a:p>
-            <a:pPr algn="ctr">
-              <a:lnSpc>
-                <a:spcPct val="100000"/>
-              </a:lnSpc>
-            </a:pPr>
-            <a:r>
-              <a:rPr sz="700" b="0">
-                <a:solidFill>
-                  <a:srgbClr val="FFFFFF"/>
-                </a:solidFill>
-                <a:latin typeface="Consolas"/>
-              </a:rPr>
-              <a:t>[T/2, 2048] → [T, 2048]</a:t>
-            </a:r>
-            <a:r>
-              <a:rPr sz="700" b="0">
-                <a:solidFill>
-                  <a:srgbClr val="FFFFFF"/>
-                </a:solidFill>
-                <a:latin typeface="Microsoft YaHei"/>
-              </a:rPr>
-              <a:t>  ·  attention 需要完整序列</a:t>
-            </a:r>
-          </a:p>
-        </p:txBody>
-      </p:sp>
-      <p:sp>
-        <p:nvSpPr>
-          <p:cNvPr id="32" name="TextBox 31"/>
-          <p:cNvSpPr txBox="1"/>
-          <p:nvPr/>
-        </p:nvSpPr>
-        <p:spPr>
-          <a:xfrm>
-            <a:off x="6217920" y="2782824"/>
-            <a:ext cx="5532120" cy="77724"/>
-          </a:xfrm>
-          <a:prstGeom prst="rect">
-            <a:avLst/>
-          </a:prstGeom>
-          <a:noFill/>
-        </p:spPr>
-        <p:txBody>
-          <a:bodyPr wrap="square" lIns="0" tIns="9144" rIns="0" bIns="9144" anchor="ctr">
-            <a:spAutoFit/>
-          </a:bodyPr>
-          <a:lstStyle/>
-          <a:p>
-            <a:pPr algn="ctr">
-              <a:lnSpc>
-                <a:spcPct val="100000"/>
-              </a:lnSpc>
-            </a:pPr>
-            <a:r>
-              <a:rPr sz="800" b="0">
-                <a:solidFill>
-                  <a:srgbClr val="94A3B8"/>
-                </a:solidFill>
-                <a:latin typeface="Microsoft YaHei"/>
-              </a:rPr>
-              <a:t>↓</a:t>
-            </a:r>
-          </a:p>
-        </p:txBody>
-      </p:sp>
-      <p:sp>
-        <p:nvSpPr>
-          <p:cNvPr id="33" name="Rounded Rectangle 32"/>
-          <p:cNvSpPr/>
-          <p:nvPr/>
-        </p:nvSpPr>
-        <p:spPr>
-          <a:xfrm>
-            <a:off x="6217920" y="2860548"/>
-            <a:ext cx="5532120" cy="305943"/>
-          </a:xfrm>
-          <a:prstGeom prst="roundRect">
-            <a:avLst>
-              <a:gd name="adj" fmla="val 12000"/>
-            </a:avLst>
-          </a:prstGeom>
-          <a:solidFill>
-            <a:srgbClr val="2563EB"/>
-          </a:solidFill>
-          <a:ln>
-            <a:noFill/>
-          </a:ln>
-          <a:effectLst/>
-        </p:spPr>
-        <p:style>
-          <a:lnRef idx="1">
-            <a:schemeClr val="accent1"/>
-          </a:lnRef>
-          <a:fillRef idx="3">
-            <a:schemeClr val="accent1"/>
-          </a:fillRef>
-          <a:effectRef idx="2">
-            <a:schemeClr val="accent1"/>
-          </a:effectRef>
-          <a:fontRef idx="minor">
-            <a:schemeClr val="lt1"/>
-          </a:fontRef>
-        </p:style>
-        <p:txBody>
-          <a:bodyPr wrap="square" lIns="54864" tIns="9144" rIns="54864" bIns="9144" rtlCol="0" anchor="ctr"/>
-          <a:lstStyle/>
-          <a:p>
-            <a:pPr algn="ctr">
-              <a:lnSpc>
-                <a:spcPct val="100000"/>
-              </a:lnSpc>
-            </a:pPr>
-            <a:r>
-              <a:rPr sz="950" b="1">
-                <a:solidFill>
-                  <a:srgbClr val="FFFFFF"/>
-                </a:solidFill>
-                <a:latin typeface="Consolas"/>
-              </a:rPr>
-              <a:t>unquantized_gemm (qkv_proj)</a:t>
-            </a:r>
-          </a:p>
-          <a:p>
-            <a:pPr algn="ctr">
-              <a:lnSpc>
-                <a:spcPct val="100000"/>
-              </a:lnSpc>
-            </a:pPr>
-            <a:r>
-              <a:rPr sz="700" b="0">
-                <a:solidFill>
-                  <a:srgbClr val="FFFFFF"/>
-                </a:solidFill>
-                <a:latin typeface="Consolas"/>
-              </a:rPr>
-              <a:t>[T, 2048] × [2048, 2560] → [T, 2560]</a:t>
-            </a:r>
-          </a:p>
-        </p:txBody>
-      </p:sp>
-      <p:sp>
-        <p:nvSpPr>
-          <p:cNvPr id="34" name="TextBox 33"/>
-          <p:cNvSpPr txBox="1"/>
-          <p:nvPr/>
-        </p:nvSpPr>
-        <p:spPr>
-          <a:xfrm>
-            <a:off x="6217920" y="3166491"/>
-            <a:ext cx="5532120" cy="77724"/>
-          </a:xfrm>
-          <a:prstGeom prst="rect">
-            <a:avLst/>
-          </a:prstGeom>
-          <a:noFill/>
-        </p:spPr>
-        <p:txBody>
-          <a:bodyPr wrap="square" lIns="0" tIns="9144" rIns="0" bIns="9144" anchor="ctr">
-            <a:spAutoFit/>
-          </a:bodyPr>
-          <a:lstStyle/>
-          <a:p>
-            <a:pPr algn="ctr">
-              <a:lnSpc>
-                <a:spcPct val="100000"/>
-              </a:lnSpc>
-            </a:pPr>
-            <a:r>
-              <a:rPr sz="800" b="0">
-                <a:solidFill>
-                  <a:srgbClr val="94A3B8"/>
-                </a:solidFill>
-                <a:latin typeface="Microsoft YaHei"/>
-              </a:rPr>
-              <a:t>↓</a:t>
-            </a:r>
-          </a:p>
-        </p:txBody>
-      </p:sp>
-      <p:sp>
-        <p:nvSpPr>
-          <p:cNvPr id="35" name="Rounded Rectangle 34"/>
-          <p:cNvSpPr/>
-          <p:nvPr/>
-        </p:nvSpPr>
-        <p:spPr>
-          <a:xfrm>
-            <a:off x="6217920" y="3244215"/>
-            <a:ext cx="5532120" cy="305943"/>
-          </a:xfrm>
-          <a:prstGeom prst="roundRect">
-            <a:avLst>
-              <a:gd name="adj" fmla="val 12000"/>
-            </a:avLst>
-          </a:prstGeom>
-          <a:solidFill>
-            <a:srgbClr val="7C3AED"/>
-          </a:solidFill>
-          <a:ln>
-            <a:noFill/>
-          </a:ln>
-          <a:effectLst/>
-        </p:spPr>
-        <p:style>
-          <a:lnRef idx="1">
-            <a:schemeClr val="accent1"/>
-          </a:lnRef>
-          <a:fillRef idx="3">
-            <a:schemeClr val="accent1"/>
-          </a:fillRef>
-          <a:effectRef idx="2">
-            <a:schemeClr val="accent1"/>
-          </a:effectRef>
-          <a:fontRef idx="minor">
-            <a:schemeClr val="lt1"/>
-          </a:fontRef>
-        </p:style>
-        <p:txBody>
-          <a:bodyPr wrap="square" lIns="54864" tIns="9144" rIns="54864" bIns="9144" rtlCol="0" anchor="ctr"/>
-          <a:lstStyle/>
-          <a:p>
-            <a:pPr algn="ctr">
-              <a:lnSpc>
-                <a:spcPct val="100000"/>
-              </a:lnSpc>
-            </a:pPr>
-            <a:r>
-              <a:rPr sz="950" b="1">
-                <a:solidFill>
-                  <a:srgbClr val="FFFFFF"/>
-                </a:solidFill>
-                <a:latin typeface="Consolas"/>
-              </a:rPr>
-              <a:t>qkv_rmsnorm_rope + unified_attention</a:t>
-            </a:r>
-          </a:p>
-          <a:p>
-            <a:pPr algn="ctr">
-              <a:lnSpc>
-                <a:spcPct val="100000"/>
-              </a:lnSpc>
-            </a:pPr>
-            <a:r>
-              <a:rPr sz="700" b="0">
-                <a:solidFill>
-                  <a:srgbClr val="FFFFFF"/>
-                </a:solidFill>
-                <a:latin typeface="Consolas"/>
-              </a:rPr>
-              <a:t>q [T, 16, 128] / kv [T, 2, 128] → [T, 2048]</a:t>
-            </a:r>
-          </a:p>
-        </p:txBody>
-      </p:sp>
-      <p:sp>
-        <p:nvSpPr>
-          <p:cNvPr id="36" name="TextBox 35"/>
-          <p:cNvSpPr txBox="1"/>
-          <p:nvPr/>
-        </p:nvSpPr>
-        <p:spPr>
-          <a:xfrm>
-            <a:off x="6217920" y="3550158"/>
-            <a:ext cx="5532120" cy="77724"/>
-          </a:xfrm>
-          <a:prstGeom prst="rect">
-            <a:avLst/>
-          </a:prstGeom>
-          <a:noFill/>
-        </p:spPr>
-        <p:txBody>
-          <a:bodyPr wrap="square" lIns="0" tIns="9144" rIns="0" bIns="9144" anchor="ctr">
-            <a:spAutoFit/>
-          </a:bodyPr>
-          <a:lstStyle/>
-          <a:p>
-            <a:pPr algn="ctr">
-              <a:lnSpc>
-                <a:spcPct val="100000"/>
-              </a:lnSpc>
-            </a:pPr>
-            <a:r>
-              <a:rPr sz="800" b="0">
-                <a:solidFill>
-                  <a:srgbClr val="94A3B8"/>
-                </a:solidFill>
-                <a:latin typeface="Microsoft YaHei"/>
-              </a:rPr>
-              <a:t>↓</a:t>
-            </a:r>
-          </a:p>
-        </p:txBody>
-      </p:sp>
-      <p:sp>
-        <p:nvSpPr>
-          <p:cNvPr id="37" name="Rounded Rectangle 36"/>
-          <p:cNvSpPr/>
-          <p:nvPr/>
-        </p:nvSpPr>
-        <p:spPr>
-          <a:xfrm>
-            <a:off x="6217920" y="3627882"/>
-            <a:ext cx="5532120" cy="305943"/>
-          </a:xfrm>
-          <a:prstGeom prst="roundRect">
-            <a:avLst>
-              <a:gd name="adj" fmla="val 12000"/>
-            </a:avLst>
-          </a:prstGeom>
-          <a:solidFill>
-            <a:srgbClr val="2563EB"/>
-          </a:solidFill>
-          <a:ln>
-            <a:noFill/>
-          </a:ln>
-          <a:effectLst/>
-        </p:spPr>
-        <p:style>
-          <a:lnRef idx="1">
-            <a:schemeClr val="accent1"/>
-          </a:lnRef>
-          <a:fillRef idx="3">
-            <a:schemeClr val="accent1"/>
-          </a:fillRef>
-          <a:effectRef idx="2">
-            <a:schemeClr val="accent1"/>
-          </a:effectRef>
-          <a:fontRef idx="minor">
-            <a:schemeClr val="lt1"/>
-          </a:fontRef>
-        </p:style>
-        <p:txBody>
-          <a:bodyPr wrap="square" lIns="54864" tIns="9144" rIns="54864" bIns="9144" rtlCol="0" anchor="ctr"/>
-          <a:lstStyle/>
-          <a:p>
-            <a:pPr algn="ctr">
-              <a:lnSpc>
-                <a:spcPct val="100000"/>
-              </a:lnSpc>
-            </a:pPr>
-            <a:r>
-              <a:rPr sz="950" b="1">
-                <a:solidFill>
-                  <a:srgbClr val="FFFFFF"/>
-                </a:solidFill>
-                <a:latin typeface="Consolas"/>
-              </a:rPr>
-              <a:t>unquantized_gemm (o_proj)</a:t>
-            </a:r>
-          </a:p>
-          <a:p>
-            <a:pPr algn="ctr">
-              <a:lnSpc>
-                <a:spcPct val="100000"/>
-              </a:lnSpc>
-            </a:pPr>
-            <a:r>
-              <a:rPr sz="700" b="0">
-                <a:solidFill>
-                  <a:srgbClr val="FFFFFF"/>
-                </a:solidFill>
-                <a:latin typeface="Consolas"/>
-              </a:rPr>
-              <a:t>[T, 2048] × [2048, 2048] → [T, 2048]</a:t>
-            </a:r>
-          </a:p>
-        </p:txBody>
-      </p:sp>
-      <p:sp>
-        <p:nvSpPr>
-          <p:cNvPr id="38" name="TextBox 37"/>
-          <p:cNvSpPr txBox="1"/>
-          <p:nvPr/>
-        </p:nvSpPr>
-        <p:spPr>
-          <a:xfrm>
-            <a:off x="6217920" y="3933825"/>
-            <a:ext cx="5532120" cy="77724"/>
-          </a:xfrm>
-          <a:prstGeom prst="rect">
-            <a:avLst/>
-          </a:prstGeom>
-          <a:noFill/>
-        </p:spPr>
-        <p:txBody>
-          <a:bodyPr wrap="square" lIns="0" tIns="9144" rIns="0" bIns="9144" anchor="ctr">
-            <a:spAutoFit/>
-          </a:bodyPr>
-          <a:lstStyle/>
-          <a:p>
-            <a:pPr algn="ctr">
-              <a:lnSpc>
-                <a:spcPct val="100000"/>
-              </a:lnSpc>
-            </a:pPr>
-            <a:r>
-              <a:rPr sz="800" b="0">
-                <a:solidFill>
-                  <a:srgbClr val="94A3B8"/>
-                </a:solidFill>
-                <a:latin typeface="Microsoft YaHei"/>
-              </a:rPr>
-              <a:t>↓</a:t>
-            </a:r>
-          </a:p>
-        </p:txBody>
-      </p:sp>
-      <p:sp>
-        <p:nvSpPr>
-          <p:cNvPr id="39" name="Rounded Rectangle 38"/>
-          <p:cNvSpPr/>
-          <p:nvPr/>
-        </p:nvSpPr>
-        <p:spPr>
-          <a:xfrm>
-            <a:off x="6217920" y="4011549"/>
-            <a:ext cx="5532120" cy="305943"/>
-          </a:xfrm>
-          <a:prstGeom prst="roundRect">
-            <a:avLst>
-              <a:gd name="adj" fmla="val 12000"/>
-            </a:avLst>
-          </a:prstGeom>
-          <a:solidFill>
-            <a:srgbClr val="D97706"/>
-          </a:solidFill>
-          <a:ln>
-            <a:noFill/>
-          </a:ln>
-          <a:effectLst/>
-        </p:spPr>
-        <p:style>
-          <a:lnRef idx="1">
-            <a:schemeClr val="accent1"/>
-          </a:lnRef>
-          <a:fillRef idx="3">
-            <a:schemeClr val="accent1"/>
-          </a:fillRef>
-          <a:effectRef idx="2">
-            <a:schemeClr val="accent1"/>
-          </a:effectRef>
-          <a:fontRef idx="minor">
-            <a:schemeClr val="lt1"/>
-          </a:fontRef>
-        </p:style>
-        <p:txBody>
-          <a:bodyPr wrap="square" lIns="54864" tIns="9144" rIns="54864" bIns="9144" rtlCol="0" anchor="ctr"/>
-          <a:lstStyle/>
-          <a:p>
-            <a:pPr algn="ctr">
-              <a:lnSpc>
-                <a:spcPct val="100000"/>
-              </a:lnSpc>
-            </a:pPr>
-            <a:r>
-              <a:rPr sz="950" b="1">
-                <a:solidFill>
-                  <a:srgbClr val="FFFFFF"/>
-                </a:solidFill>
-                <a:latin typeface="Consolas"/>
-              </a:rPr>
-              <a:t>reduce_scatter (TP)</a:t>
-            </a:r>
-          </a:p>
-          <a:p>
-            <a:pPr algn="ctr">
-              <a:lnSpc>
-                <a:spcPct val="100000"/>
-              </a:lnSpc>
-            </a:pPr>
-            <a:r>
-              <a:rPr sz="700" b="0">
-                <a:solidFill>
-                  <a:srgbClr val="FFFFFF"/>
-                </a:solidFill>
-                <a:latin typeface="Consolas"/>
-              </a:rPr>
-              <a:t>[T, 2048] → [T/2, 2048]</a:t>
-            </a:r>
-            <a:r>
-              <a:rPr sz="700" b="0">
-                <a:solidFill>
-                  <a:srgbClr val="FFFFFF"/>
-                </a:solidFill>
-                <a:latin typeface="Microsoft YaHei"/>
-              </a:rPr>
-              <a:t>  ·  SP pass 替换点 ①：o_proj 后的 all_reduce</a:t>
-            </a:r>
-          </a:p>
-        </p:txBody>
-      </p:sp>
-      <p:sp>
-        <p:nvSpPr>
-          <p:cNvPr id="40" name="TextBox 39"/>
-          <p:cNvSpPr txBox="1"/>
-          <p:nvPr/>
-        </p:nvSpPr>
-        <p:spPr>
-          <a:xfrm>
-            <a:off x="6217920" y="4317492"/>
-            <a:ext cx="5532120" cy="77724"/>
-          </a:xfrm>
-          <a:prstGeom prst="rect">
-            <a:avLst/>
-          </a:prstGeom>
-          <a:noFill/>
-        </p:spPr>
-        <p:txBody>
-          <a:bodyPr wrap="square" lIns="0" tIns="9144" rIns="0" bIns="9144" anchor="ctr">
-            <a:spAutoFit/>
-          </a:bodyPr>
-          <a:lstStyle/>
-          <a:p>
-            <a:pPr algn="ctr">
-              <a:lnSpc>
-                <a:spcPct val="100000"/>
-              </a:lnSpc>
-            </a:pPr>
-            <a:r>
-              <a:rPr sz="800" b="0">
-                <a:solidFill>
-                  <a:srgbClr val="94A3B8"/>
-                </a:solidFill>
-                <a:latin typeface="Microsoft YaHei"/>
-              </a:rPr>
-              <a:t>↓</a:t>
-            </a:r>
-          </a:p>
-        </p:txBody>
-      </p:sp>
-      <p:sp>
-        <p:nvSpPr>
-          <p:cNvPr id="41" name="Rounded Rectangle 40"/>
-          <p:cNvSpPr/>
-          <p:nvPr/>
-        </p:nvSpPr>
-        <p:spPr>
-          <a:xfrm>
-            <a:off x="6217920" y="4395216"/>
-            <a:ext cx="5532120" cy="305943"/>
-          </a:xfrm>
-          <a:prstGeom prst="roundRect">
-            <a:avLst>
-              <a:gd name="adj" fmla="val 12000"/>
-            </a:avLst>
-          </a:prstGeom>
-          <a:solidFill>
-            <a:srgbClr val="059669"/>
-          </a:solidFill>
-          <a:ln>
-            <a:noFill/>
-          </a:ln>
-          <a:effectLst/>
-        </p:spPr>
-        <p:style>
-          <a:lnRef idx="1">
-            <a:schemeClr val="accent1"/>
-          </a:lnRef>
-          <a:fillRef idx="3">
-            <a:schemeClr val="accent1"/>
-          </a:fillRef>
-          <a:effectRef idx="2">
-            <a:schemeClr val="accent1"/>
-          </a:effectRef>
-          <a:fontRef idx="minor">
-            <a:schemeClr val="lt1"/>
-          </a:fontRef>
-        </p:style>
-        <p:txBody>
-          <a:bodyPr wrap="square" lIns="54864" tIns="9144" rIns="54864" bIns="9144" rtlCol="0" anchor="ctr"/>
-          <a:lstStyle/>
-          <a:p>
-            <a:pPr algn="ctr">
-              <a:lnSpc>
-                <a:spcPct val="100000"/>
-              </a:lnSpc>
-            </a:pPr>
-            <a:r>
-              <a:rPr sz="950" b="1">
-                <a:solidFill>
-                  <a:srgbClr val="FFFFFF"/>
-                </a:solidFill>
-                <a:latin typeface="Consolas"/>
-              </a:rPr>
-              <a:t>maybe_chunk_residual + npu_add_rms_norm_bias</a:t>
-            </a:r>
-          </a:p>
-          <a:p>
-            <a:pPr algn="ctr">
-              <a:lnSpc>
-                <a:spcPct val="100000"/>
-              </a:lnSpc>
-            </a:pPr>
-            <a:r>
-              <a:rPr sz="700" b="0">
-                <a:solidFill>
-                  <a:srgbClr val="FFFFFF"/>
-                </a:solidFill>
-                <a:latin typeface="Consolas"/>
-              </a:rPr>
-              <a:t>[T/2, 2048]</a:t>
-            </a:r>
-          </a:p>
-        </p:txBody>
-      </p:sp>
-      <p:sp>
-        <p:nvSpPr>
-          <p:cNvPr id="42" name="TextBox 41"/>
-          <p:cNvSpPr txBox="1"/>
-          <p:nvPr/>
-        </p:nvSpPr>
-        <p:spPr>
-          <a:xfrm>
-            <a:off x="6217920" y="4701159"/>
-            <a:ext cx="5532120" cy="77724"/>
-          </a:xfrm>
-          <a:prstGeom prst="rect">
-            <a:avLst/>
-          </a:prstGeom>
-          <a:noFill/>
-        </p:spPr>
-        <p:txBody>
-          <a:bodyPr wrap="square" lIns="0" tIns="9144" rIns="0" bIns="9144" anchor="ctr">
-            <a:spAutoFit/>
-          </a:bodyPr>
-          <a:lstStyle/>
-          <a:p>
-            <a:pPr algn="ctr">
-              <a:lnSpc>
-                <a:spcPct val="100000"/>
-              </a:lnSpc>
-            </a:pPr>
-            <a:r>
-              <a:rPr sz="800" b="0">
-                <a:solidFill>
-                  <a:srgbClr val="94A3B8"/>
-                </a:solidFill>
-                <a:latin typeface="Microsoft YaHei"/>
-              </a:rPr>
-              <a:t>↓</a:t>
-            </a:r>
-          </a:p>
-        </p:txBody>
-      </p:sp>
-      <p:sp>
-        <p:nvSpPr>
-          <p:cNvPr id="43" name="Rounded Rectangle 42"/>
-          <p:cNvSpPr/>
-          <p:nvPr/>
-        </p:nvSpPr>
-        <p:spPr>
-          <a:xfrm>
-            <a:off x="6217920" y="4778883"/>
-            <a:ext cx="5532120" cy="305943"/>
-          </a:xfrm>
-          <a:prstGeom prst="roundRect">
-            <a:avLst>
-              <a:gd name="adj" fmla="val 12000"/>
-            </a:avLst>
-          </a:prstGeom>
-          <a:solidFill>
-            <a:srgbClr val="D97706"/>
-          </a:solidFill>
-          <a:ln>
-            <a:noFill/>
-          </a:ln>
-          <a:effectLst/>
-        </p:spPr>
-        <p:style>
-          <a:lnRef idx="1">
-            <a:schemeClr val="accent1"/>
-          </a:lnRef>
-          <a:fillRef idx="3">
-            <a:schemeClr val="accent1"/>
-          </a:fillRef>
-          <a:effectRef idx="2">
-            <a:schemeClr val="accent1"/>
-          </a:effectRef>
-          <a:fontRef idx="minor">
-            <a:schemeClr val="lt1"/>
-          </a:fontRef>
-        </p:style>
-        <p:txBody>
-          <a:bodyPr wrap="square" lIns="54864" tIns="9144" rIns="54864" bIns="9144" rtlCol="0" anchor="ctr"/>
-          <a:lstStyle/>
-          <a:p>
-            <a:pPr algn="ctr">
-              <a:lnSpc>
-                <a:spcPct val="100000"/>
-              </a:lnSpc>
-            </a:pPr>
-            <a:r>
-              <a:rPr sz="950" b="1">
-                <a:solidFill>
-                  <a:srgbClr val="FFFFFF"/>
-                </a:solidFill>
-                <a:latin typeface="Consolas"/>
-              </a:rPr>
-              <a:t>all_gather (TP)</a:t>
-            </a:r>
-          </a:p>
-          <a:p>
-            <a:pPr algn="ctr">
-              <a:lnSpc>
-                <a:spcPct val="100000"/>
-              </a:lnSpc>
-            </a:pPr>
-            <a:r>
-              <a:rPr sz="700" b="0">
-                <a:solidFill>
-                  <a:srgbClr val="FFFFFF"/>
-                </a:solidFill>
-                <a:latin typeface="Consolas"/>
-              </a:rPr>
-              <a:t>[T/2, 2048] → [T, 2048]</a:t>
-            </a:r>
-            <a:r>
-              <a:rPr sz="700" b="0">
-                <a:solidFill>
-                  <a:srgbClr val="FFFFFF"/>
-                </a:solidFill>
-                <a:latin typeface="Microsoft YaHei"/>
-              </a:rPr>
-              <a:t>  ·  MoE 要求完整 tensor 输入</a:t>
-            </a:r>
-          </a:p>
-        </p:txBody>
-      </p:sp>
-      <p:sp>
-        <p:nvSpPr>
-          <p:cNvPr id="44" name="TextBox 43"/>
-          <p:cNvSpPr txBox="1"/>
-          <p:nvPr/>
-        </p:nvSpPr>
-        <p:spPr>
-          <a:xfrm>
-            <a:off x="6217920" y="5084826"/>
-            <a:ext cx="5532120" cy="77724"/>
-          </a:xfrm>
-          <a:prstGeom prst="rect">
-            <a:avLst/>
-          </a:prstGeom>
-          <a:noFill/>
-        </p:spPr>
-        <p:txBody>
-          <a:bodyPr wrap="square" lIns="0" tIns="9144" rIns="0" bIns="9144" anchor="ctr">
-            <a:spAutoFit/>
-          </a:bodyPr>
-          <a:lstStyle/>
-          <a:p>
-            <a:pPr algn="ctr">
-              <a:lnSpc>
-                <a:spcPct val="100000"/>
-              </a:lnSpc>
-            </a:pPr>
-            <a:r>
-              <a:rPr sz="800" b="0">
-                <a:solidFill>
-                  <a:srgbClr val="94A3B8"/>
-                </a:solidFill>
-                <a:latin typeface="Microsoft YaHei"/>
-              </a:rPr>
-              <a:t>↓</a:t>
-            </a:r>
-          </a:p>
-        </p:txBody>
-      </p:sp>
-      <p:sp>
-        <p:nvSpPr>
-          <p:cNvPr id="45" name="Rounded Rectangle 44"/>
-          <p:cNvSpPr/>
-          <p:nvPr/>
-        </p:nvSpPr>
-        <p:spPr>
-          <a:xfrm>
-            <a:off x="6217920" y="5162550"/>
-            <a:ext cx="5532120" cy="305943"/>
-          </a:xfrm>
-          <a:prstGeom prst="roundRect">
-            <a:avLst>
-              <a:gd name="adj" fmla="val 12000"/>
-            </a:avLst>
-          </a:prstGeom>
-          <a:solidFill>
-            <a:srgbClr val="2563EB"/>
-          </a:solidFill>
-          <a:ln>
-            <a:noFill/>
-          </a:ln>
-          <a:effectLst/>
-        </p:spPr>
-        <p:style>
-          <a:lnRef idx="1">
-            <a:schemeClr val="accent1"/>
-          </a:lnRef>
-          <a:fillRef idx="3">
-            <a:schemeClr val="accent1"/>
-          </a:fillRef>
-          <a:effectRef idx="2">
-            <a:schemeClr val="accent1"/>
-          </a:effectRef>
-          <a:fontRef idx="minor">
-            <a:schemeClr val="lt1"/>
-          </a:fontRef>
-        </p:style>
-        <p:txBody>
-          <a:bodyPr wrap="square" lIns="54864" tIns="9144" rIns="54864" bIns="9144" rtlCol="0" anchor="ctr"/>
-          <a:lstStyle/>
-          <a:p>
-            <a:pPr algn="ctr">
-              <a:lnSpc>
-                <a:spcPct val="100000"/>
-              </a:lnSpc>
-            </a:pPr>
-            <a:r>
-              <a:rPr sz="950" b="1">
-                <a:solidFill>
-                  <a:srgbClr val="FFFFFF"/>
-                </a:solidFill>
-                <a:latin typeface="Consolas"/>
-              </a:rPr>
-              <a:t>unquantized_gemm (gate / router)</a:t>
-            </a:r>
-          </a:p>
-          <a:p>
-            <a:pPr algn="ctr">
-              <a:lnSpc>
-                <a:spcPct val="100000"/>
-              </a:lnSpc>
-            </a:pPr>
-            <a:r>
-              <a:rPr sz="700" b="0">
-                <a:solidFill>
-                  <a:srgbClr val="FFFFFF"/>
-                </a:solidFill>
-                <a:latin typeface="Consolas"/>
-              </a:rPr>
-              <a:t>[T, 2048] × [2048, 128] → [T, 128]</a:t>
-            </a:r>
-          </a:p>
-        </p:txBody>
-      </p:sp>
-      <p:sp>
-        <p:nvSpPr>
-          <p:cNvPr id="46" name="TextBox 45"/>
-          <p:cNvSpPr txBox="1"/>
-          <p:nvPr/>
-        </p:nvSpPr>
-        <p:spPr>
-          <a:xfrm>
-            <a:off x="6217920" y="5468493"/>
-            <a:ext cx="5532120" cy="77724"/>
-          </a:xfrm>
-          <a:prstGeom prst="rect">
-            <a:avLst/>
-          </a:prstGeom>
-          <a:noFill/>
-        </p:spPr>
-        <p:txBody>
-          <a:bodyPr wrap="square" lIns="0" tIns="9144" rIns="0" bIns="9144" anchor="ctr">
-            <a:spAutoFit/>
-          </a:bodyPr>
-          <a:lstStyle/>
-          <a:p>
-            <a:pPr algn="ctr">
-              <a:lnSpc>
-                <a:spcPct val="100000"/>
-              </a:lnSpc>
-            </a:pPr>
-            <a:r>
-              <a:rPr sz="800" b="0">
-                <a:solidFill>
-                  <a:srgbClr val="94A3B8"/>
-                </a:solidFill>
-                <a:latin typeface="Microsoft YaHei"/>
-              </a:rPr>
-              <a:t>↓</a:t>
-            </a:r>
-          </a:p>
-        </p:txBody>
-      </p:sp>
-      <p:sp>
-        <p:nvSpPr>
-          <p:cNvPr id="47" name="Rounded Rectangle 46"/>
-          <p:cNvSpPr/>
-          <p:nvPr/>
-        </p:nvSpPr>
-        <p:spPr>
-          <a:xfrm>
-            <a:off x="6217920" y="5546217"/>
-            <a:ext cx="5532120" cy="305943"/>
-          </a:xfrm>
-          <a:prstGeom prst="roundRect">
-            <a:avLst>
-              <a:gd name="adj" fmla="val 12000"/>
-            </a:avLst>
-          </a:prstGeom>
-          <a:solidFill>
-            <a:srgbClr val="DC2626"/>
-          </a:solidFill>
-          <a:ln>
-            <a:noFill/>
-          </a:ln>
-          <a:effectLst/>
-        </p:spPr>
-        <p:style>
-          <a:lnRef idx="1">
-            <a:schemeClr val="accent1"/>
-          </a:lnRef>
-          <a:fillRef idx="3">
-            <a:schemeClr val="accent1"/>
-          </a:fillRef>
-          <a:effectRef idx="2">
-            <a:schemeClr val="accent1"/>
-          </a:effectRef>
-          <a:fontRef idx="minor">
-            <a:schemeClr val="lt1"/>
-          </a:fontRef>
-        </p:style>
-        <p:txBody>
-          <a:bodyPr wrap="square" lIns="54864" tIns="9144" rIns="54864" bIns="9144" rtlCol="0" anchor="ctr"/>
-          <a:lstStyle/>
-          <a:p>
-            <a:pPr algn="ctr">
-              <a:lnSpc>
-                <a:spcPct val="100000"/>
-              </a:lnSpc>
-            </a:pPr>
-            <a:r>
-              <a:rPr sz="950" b="1">
-                <a:solidFill>
-                  <a:srgbClr val="FFFFFF"/>
-                </a:solidFill>
-                <a:latin typeface="Consolas"/>
-              </a:rPr>
-              <a:t>moe_forward</a:t>
-            </a:r>
-          </a:p>
-          <a:p>
-            <a:pPr algn="ctr">
-              <a:lnSpc>
-                <a:spcPct val="100000"/>
-              </a:lnSpc>
-            </a:pPr>
-            <a:r>
-              <a:rPr sz="700" b="0">
-                <a:solidFill>
-                  <a:srgbClr val="FFFFFF"/>
-                </a:solidFill>
-                <a:latin typeface="Consolas"/>
-              </a:rPr>
-              <a:t>in [T, 2048] → out [T, 2048]</a:t>
-            </a:r>
-            <a:r>
-              <a:rPr sz="700" b="0">
-                <a:solidFill>
-                  <a:srgbClr val="FFFFFF"/>
-                </a:solidFill>
-                <a:latin typeface="Microsoft YaHei"/>
-              </a:rPr>
-              <a:t>  ·  输入输出均为完整 tensor</a:t>
-            </a:r>
-          </a:p>
-        </p:txBody>
-      </p:sp>
-      <p:sp>
-        <p:nvSpPr>
-          <p:cNvPr id="48" name="Rounded Rectangle 47"/>
-          <p:cNvSpPr/>
-          <p:nvPr/>
-        </p:nvSpPr>
-        <p:spPr>
-          <a:xfrm>
-            <a:off x="457200" y="5925312"/>
-            <a:ext cx="11292840" cy="804672"/>
-          </a:xfrm>
-          <a:prstGeom prst="roundRect">
-            <a:avLst>
-              <a:gd name="adj" fmla="val 12000"/>
-            </a:avLst>
-          </a:prstGeom>
-          <a:solidFill>
-            <a:srgbClr val="FFFFFF"/>
-          </a:solidFill>
-          <a:ln w="12700">
-            <a:solidFill>
-              <a:srgbClr val="E2E8F0"/>
-            </a:solidFill>
-          </a:ln>
-          <a:effectLst/>
-        </p:spPr>
-        <p:style>
-          <a:lnRef idx="1">
-            <a:schemeClr val="accent1"/>
-          </a:lnRef>
-          <a:fillRef idx="3">
-            <a:schemeClr val="accent1"/>
-          </a:fillRef>
-          <a:effectRef idx="2">
-            <a:schemeClr val="accent1"/>
-          </a:effectRef>
-          <a:fontRef idx="minor">
-            <a:schemeClr val="lt1"/>
-          </a:fontRef>
-        </p:style>
-        <p:txBody>
-          <a:bodyPr wrap="square" lIns="109728" tIns="9144" rIns="109728" bIns="9144" rtlCol="0" anchor="ctr"/>
-          <a:lstStyle/>
-          <a:p>
-            <a:pPr algn="l">
-              <a:lnSpc>
-                <a:spcPct val="100000"/>
-              </a:lnSpc>
-            </a:pPr>
-            <a:r>
-              <a:rPr sz="950" b="1">
-                <a:solidFill>
-                  <a:srgbClr val="1E293B"/>
-                </a:solidFill>
-                <a:latin typeface="Microsoft YaHei"/>
-              </a:rPr>
-              <a:t>• </a:t>
-            </a:r>
-            <a:r>
-              <a:rPr sz="1050" b="0">
-                <a:solidFill>
-                  <a:srgbClr val="1E293B"/>
-                </a:solidFill>
-                <a:latin typeface="Microsoft YaHei"/>
-              </a:rPr>
-              <a:t>两处 all_reduce（o_proj 后、MoE 后的 maybe_all_reduce）都被拆成 reduce_scatter + all_gather，中间 norm 在 [T/2, 2048] 分片上算。</a:t>
-            </a:r>
-          </a:p>
-          <a:p>
-            <a:pPr algn="l">
-              <a:lnSpc>
-                <a:spcPct val="100000"/>
-              </a:lnSpc>
-            </a:pPr>
-            <a:r>
-              <a:rPr sz="950" b="1">
-                <a:solidFill>
-                  <a:srgbClr val="1E293B"/>
-                </a:solidFill>
-                <a:latin typeface="Microsoft YaHei"/>
-              </a:rPr>
-              <a:t>• </a:t>
-            </a:r>
-            <a:r>
-              <a:rPr sz="1050" b="0">
-                <a:solidFill>
-                  <a:srgbClr val="1E293B"/>
-                </a:solidFill>
-                <a:latin typeface="Microsoft YaHei"/>
-              </a:rPr>
-              <a:t>MoE 入口前必须 all_gather 回 [T, 2048]：该模式 fused MoE 要求完整 tensor。通信量不减（all_reduce ≈ RS+AG），收益在 norm 计算减半与通信/计算重叠。</a:t>
-            </a:r>
-          </a:p>
-        </p:txBody>
-      </p:sp>
     </p:spTree>
+    <p:extLst>
+      <p:ext uri="{BB962C8B-B14F-4D97-AF65-F5344CB8AC3E}">
+        <p14:creationId xmlns:p14="http://schemas.microsoft.com/office/powerpoint/2010/main" val="802254519"/>
+      </p:ext>
+    </p:extLst>
   </p:cSld>
   <p:clrMapOvr>
     <a:masterClrMapping/>
@@ -11482,13 +8111,31 @@
               </a:lnSpc>
             </a:pPr>
             <a:r>
-              <a:rPr sz="2000" b="1">
+              <a:rPr sz="2000" b="1" dirty="0">
                 <a:solidFill>
                   <a:srgbClr val="1E293B"/>
                 </a:solidFill>
                 <a:latin typeface="Microsoft YaHei"/>
               </a:rPr>
-              <a:t>③ TP 模式，EP off（TP=2）</a:t>
+              <a:t>② TP </a:t>
+            </a:r>
+            <a:r>
+              <a:rPr sz="2000" b="1" dirty="0" err="1">
+                <a:solidFill>
+                  <a:srgbClr val="1E293B"/>
+                </a:solidFill>
+                <a:latin typeface="Microsoft YaHei"/>
+              </a:rPr>
+              <a:t>模式（DP</a:t>
+            </a:r>
+            <a:r>
+              <a:rPr sz="2000" b="1" dirty="0">
+                <a:solidFill>
+                  <a:srgbClr val="1E293B"/>
+                </a:solidFill>
+                <a:latin typeface="Microsoft YaHei"/>
+              </a:rPr>
+              <a:t>=1, TP=2, EP=2，MoE 非 SP）</a:t>
             </a:r>
           </a:p>
         </p:txBody>
@@ -11521,13 +8168,184 @@
               </a:lnSpc>
             </a:pPr>
             <a:r>
-              <a:rPr sz="1000" b="0">
+              <a:rPr sz="1000" b="0" dirty="0" err="1">
                 <a:solidFill>
                   <a:srgbClr val="64748B"/>
                 </a:solidFill>
                 <a:latin typeface="Microsoft YaHei"/>
               </a:rPr>
-              <a:t>外部数据流与情况 ② After 完全相同（SP pass ×96）；区别只在 fused MoE 内部。</a:t>
+              <a:t>只有</a:t>
+            </a:r>
+            <a:r>
+              <a:rPr sz="1000" b="0" dirty="0">
+                <a:solidFill>
+                  <a:srgbClr val="64748B"/>
+                </a:solidFill>
+                <a:latin typeface="Microsoft YaHei"/>
+              </a:rPr>
+              <a:t> SP pass </a:t>
+            </a:r>
+            <a:r>
+              <a:rPr sz="1000" b="0" dirty="0" err="1">
+                <a:solidFill>
+                  <a:srgbClr val="64748B"/>
+                </a:solidFill>
+                <a:latin typeface="Microsoft YaHei"/>
+              </a:rPr>
+              <a:t>生效：每层替换</a:t>
+            </a:r>
+            <a:r>
+              <a:rPr sz="1000" b="0" dirty="0">
+                <a:solidFill>
+                  <a:srgbClr val="64748B"/>
+                </a:solidFill>
+                <a:latin typeface="Microsoft YaHei"/>
+              </a:rPr>
+              <a:t> 2 </a:t>
+            </a:r>
+            <a:r>
+              <a:rPr sz="1000" b="0" dirty="0" err="1">
+                <a:solidFill>
+                  <a:srgbClr val="64748B"/>
+                </a:solidFill>
+                <a:latin typeface="Microsoft YaHei"/>
+              </a:rPr>
+              <a:t>处（o_proj</a:t>
+            </a:r>
+            <a:r>
+              <a:rPr sz="1000" b="0" dirty="0">
+                <a:solidFill>
+                  <a:srgbClr val="64748B"/>
+                </a:solidFill>
+                <a:latin typeface="Microsoft YaHei"/>
+              </a:rPr>
+              <a:t> </a:t>
+            </a:r>
+            <a:r>
+              <a:rPr sz="1000" b="0" dirty="0" err="1">
+                <a:solidFill>
+                  <a:srgbClr val="64748B"/>
+                </a:solidFill>
+                <a:latin typeface="Microsoft YaHei"/>
+              </a:rPr>
+              <a:t>后、MoE</a:t>
+            </a:r>
+            <a:r>
+              <a:rPr sz="1000" b="0" dirty="0">
+                <a:solidFill>
+                  <a:srgbClr val="64748B"/>
+                </a:solidFill>
+                <a:latin typeface="Microsoft YaHei"/>
+              </a:rPr>
+              <a:t> </a:t>
+            </a:r>
+            <a:r>
+              <a:rPr sz="1000" b="0" dirty="0" err="1">
+                <a:solidFill>
+                  <a:srgbClr val="64748B"/>
+                </a:solidFill>
+                <a:latin typeface="Microsoft YaHei"/>
+              </a:rPr>
+              <a:t>输出后</a:t>
+            </a:r>
+            <a:r>
+              <a:rPr sz="1000" b="0" dirty="0">
+                <a:solidFill>
+                  <a:srgbClr val="64748B"/>
+                </a:solidFill>
+                <a:latin typeface="Microsoft YaHei"/>
+              </a:rPr>
+              <a:t>），48 </a:t>
+            </a:r>
+            <a:r>
+              <a:rPr sz="1000" b="0" dirty="0" err="1">
+                <a:solidFill>
+                  <a:srgbClr val="64748B"/>
+                </a:solidFill>
+                <a:latin typeface="Microsoft YaHei"/>
+              </a:rPr>
+              <a:t>层共</a:t>
+            </a:r>
+            <a:r>
+              <a:rPr sz="1000" b="0" dirty="0">
+                <a:solidFill>
+                  <a:srgbClr val="64748B"/>
+                </a:solidFill>
+                <a:latin typeface="Microsoft YaHei"/>
+              </a:rPr>
+              <a:t> 96 </a:t>
+            </a:r>
+            <a:r>
+              <a:rPr sz="1000" b="0" dirty="0" err="1">
+                <a:solidFill>
+                  <a:srgbClr val="64748B"/>
+                </a:solidFill>
+                <a:latin typeface="Microsoft YaHei"/>
+              </a:rPr>
+              <a:t>处。fused</a:t>
+            </a:r>
+            <a:r>
+              <a:rPr sz="1000" b="0" dirty="0">
+                <a:solidFill>
+                  <a:srgbClr val="64748B"/>
+                </a:solidFill>
+                <a:latin typeface="Microsoft YaHei"/>
+              </a:rPr>
+              <a:t> </a:t>
+            </a:r>
+            <a:r>
+              <a:rPr sz="1000" b="0" dirty="0" err="1">
+                <a:solidFill>
+                  <a:srgbClr val="64748B"/>
+                </a:solidFill>
+                <a:latin typeface="Microsoft YaHei"/>
+              </a:rPr>
+              <a:t>MoE</a:t>
+            </a:r>
+            <a:r>
+              <a:rPr sz="1000" b="0" dirty="0">
+                <a:solidFill>
+                  <a:srgbClr val="64748B"/>
+                </a:solidFill>
+                <a:latin typeface="Microsoft YaHei"/>
+              </a:rPr>
+              <a:t> </a:t>
+            </a:r>
+            <a:r>
+              <a:rPr sz="1000" b="0" dirty="0" err="1">
+                <a:solidFill>
+                  <a:srgbClr val="64748B"/>
+                </a:solidFill>
+                <a:latin typeface="Microsoft YaHei"/>
+              </a:rPr>
+              <a:t>完整</a:t>
+            </a:r>
+            <a:r>
+              <a:rPr sz="1000" b="0" dirty="0">
+                <a:solidFill>
+                  <a:srgbClr val="64748B"/>
+                </a:solidFill>
+                <a:latin typeface="Microsoft YaHei"/>
+              </a:rPr>
+              <a:t> tensor </a:t>
+            </a:r>
+            <a:r>
+              <a:rPr sz="1000" b="0" dirty="0" err="1">
+                <a:solidFill>
+                  <a:srgbClr val="64748B"/>
+                </a:solidFill>
+                <a:latin typeface="Microsoft YaHei"/>
+              </a:rPr>
+              <a:t>进、完整</a:t>
+            </a:r>
+            <a:r>
+              <a:rPr sz="1000" b="0" dirty="0">
+                <a:solidFill>
+                  <a:srgbClr val="64748B"/>
+                </a:solidFill>
+                <a:latin typeface="Microsoft YaHei"/>
+              </a:rPr>
+              <a:t> tensor 出。</a:t>
             </a:r>
           </a:p>
         </p:txBody>
@@ -11540,8 +8358,8 @@
         </p:nvSpPr>
         <p:spPr>
           <a:xfrm>
-            <a:off x="3063240" y="987552"/>
-            <a:ext cx="6080760" cy="292608"/>
+            <a:off x="457200" y="987552"/>
+            <a:ext cx="5532120" cy="292608"/>
           </a:xfrm>
           <a:prstGeom prst="roundRect">
             <a:avLst>
@@ -11586,7 +8404,7 @@
                 </a:solidFill>
                 <a:latin typeface="Microsoft YaHei"/>
               </a:rPr>
-              <a:t>After（SP ×96，同情况 ②）</a:t>
+              <a:t>Before（原始图）</a:t>
             </a:r>
           </a:p>
         </p:txBody>
@@ -11599,8 +8417,67 @@
         </p:nvSpPr>
         <p:spPr>
           <a:xfrm>
-            <a:off x="3063240" y="1325880"/>
-            <a:ext cx="6080760" cy="305943"/>
+            <a:off x="6217920" y="987552"/>
+            <a:ext cx="5532120" cy="292608"/>
+          </a:xfrm>
+          <a:prstGeom prst="roundRect">
+            <a:avLst>
+              <a:gd name="adj" fmla="val 12000"/>
+            </a:avLst>
+          </a:prstGeom>
+          <a:solidFill>
+            <a:srgbClr val="F1F5F9"/>
+          </a:solidFill>
+          <a:ln>
+            <a:noFill/>
+          </a:ln>
+          <a:effectLst/>
+        </p:spPr>
+        <p:style>
+          <a:lnRef idx="1">
+            <a:schemeClr val="accent1"/>
+          </a:lnRef>
+          <a:fillRef idx="3">
+            <a:schemeClr val="accent1"/>
+          </a:fillRef>
+          <a:effectRef idx="2">
+            <a:schemeClr val="accent1"/>
+          </a:effectRef>
+          <a:fontRef idx="minor">
+            <a:schemeClr val="lt1"/>
+          </a:fontRef>
+        </p:style>
+        <p:txBody>
+          <a:bodyPr wrap="square" lIns="54864" tIns="9144" rIns="54864" bIns="9144" rtlCol="0" anchor="ctr"/>
+          <a:lstStyle/>
+          <a:p>
+            <a:pPr algn="ctr">
+              <a:lnSpc>
+                <a:spcPct val="100000"/>
+              </a:lnSpc>
+            </a:pPr>
+            <a:r>
+              <a:rPr sz="1100" b="1">
+                <a:solidFill>
+                  <a:srgbClr val="1E293B"/>
+                </a:solidFill>
+                <a:latin typeface="Microsoft YaHei"/>
+              </a:rPr>
+              <a:t>After（SP ×96）</a:t>
+            </a:r>
+          </a:p>
+        </p:txBody>
+      </p:sp>
+      <p:sp>
+        <p:nvSpPr>
+          <p:cNvPr id="6" name="Rounded Rectangle 5"/>
+          <p:cNvSpPr/>
+          <p:nvPr/>
+        </p:nvSpPr>
+        <p:spPr>
+          <a:xfrm>
+            <a:off x="457200" y="1325880"/>
+            <a:ext cx="5532120" cy="382676"/>
           </a:xfrm>
           <a:prstGeom prst="roundRect">
             <a:avLst>
@@ -11642,28 +8519,73 @@
               </a:lnSpc>
             </a:pPr>
             <a:r>
-              <a:rPr sz="950" b="1">
+              <a:rPr sz="950" b="1" dirty="0" err="1">
                 <a:solidFill>
                   <a:srgbClr val="334155"/>
                 </a:solidFill>
                 <a:latin typeface="Consolas"/>
               </a:rPr>
-              <a:t>上一层 MoE 输出（完整 tensor）</a:t>
-            </a:r>
-          </a:p>
-          <a:p>
-            <a:pPr algn="ctr">
-              <a:lnSpc>
-                <a:spcPct val="100000"/>
-              </a:lnSpc>
-            </a:pPr>
-            <a:r>
-              <a:rPr sz="700" b="0">
+              <a:t>上一层</a:t>
+            </a:r>
+            <a:r>
+              <a:rPr sz="950" b="1" dirty="0">
                 <a:solidFill>
                   <a:srgbClr val="334155"/>
                 </a:solidFill>
                 <a:latin typeface="Consolas"/>
               </a:rPr>
+              <a:t> </a:t>
+            </a:r>
+            <a:r>
+              <a:rPr sz="950" b="1" dirty="0" err="1">
+                <a:solidFill>
+                  <a:srgbClr val="334155"/>
+                </a:solidFill>
+                <a:latin typeface="Consolas"/>
+              </a:rPr>
+              <a:t>MoE</a:t>
+            </a:r>
+            <a:r>
+              <a:rPr sz="950" b="1" dirty="0">
+                <a:solidFill>
+                  <a:srgbClr val="334155"/>
+                </a:solidFill>
+                <a:latin typeface="Consolas"/>
+              </a:rPr>
+              <a:t> </a:t>
+            </a:r>
+            <a:r>
+              <a:rPr sz="950" b="1" dirty="0" err="1">
+                <a:solidFill>
+                  <a:srgbClr val="334155"/>
+                </a:solidFill>
+                <a:latin typeface="Consolas"/>
+              </a:rPr>
+              <a:t>输出（完整</a:t>
+            </a:r>
+            <a:r>
+              <a:rPr sz="950" b="1" dirty="0">
+                <a:solidFill>
+                  <a:srgbClr val="334155"/>
+                </a:solidFill>
+                <a:latin typeface="Consolas"/>
+              </a:rPr>
+              <a:t> tensor）</a:t>
+            </a:r>
+          </a:p>
+          <a:p>
+            <a:pPr algn="ctr">
+              <a:lnSpc>
+                <a:spcPct val="100000"/>
+              </a:lnSpc>
+            </a:pPr>
+            <a:r>
+              <a:rPr sz="700" b="0" dirty="0">
+                <a:solidFill>
+                  <a:srgbClr val="334155"/>
+                </a:solidFill>
+                <a:latin typeface="Consolas"/>
+              </a:rPr>
               <a:t>[T, 2048]</a:t>
             </a:r>
           </a:p>
@@ -11671,14 +8593,14 @@
       </p:sp>
       <p:sp>
         <p:nvSpPr>
-          <p:cNvPr id="6" name="TextBox 5"/>
+          <p:cNvPr id="7" name="TextBox 6"/>
           <p:cNvSpPr txBox="1"/>
           <p:nvPr/>
         </p:nvSpPr>
         <p:spPr>
           <a:xfrm>
-            <a:off x="3063240" y="1631823"/>
-            <a:ext cx="6080760" cy="77724"/>
+            <a:off x="457200" y="1708556"/>
+            <a:ext cx="5532120" cy="77724"/>
           </a:xfrm>
           <a:prstGeom prst="rect">
             <a:avLst/>
@@ -11710,14 +8632,14 @@
       </p:sp>
       <p:sp>
         <p:nvSpPr>
-          <p:cNvPr id="7" name="Rounded Rectangle 6"/>
+          <p:cNvPr id="8" name="Rounded Rectangle 7"/>
           <p:cNvSpPr/>
           <p:nvPr/>
         </p:nvSpPr>
         <p:spPr>
           <a:xfrm>
-            <a:off x="3063240" y="1709547"/>
-            <a:ext cx="6080760" cy="305943"/>
+            <a:off x="457200" y="1786280"/>
+            <a:ext cx="5532120" cy="382676"/>
           </a:xfrm>
           <a:prstGeom prst="roundRect">
             <a:avLst>
@@ -11756,52 +8678,109 @@
               </a:lnSpc>
             </a:pPr>
             <a:r>
-              <a:rPr sz="950" b="1">
+              <a:rPr sz="950" b="1" dirty="0" err="1">
                 <a:solidFill>
                   <a:srgbClr val="FFFFFF"/>
                 </a:solidFill>
                 <a:latin typeface="Consolas"/>
               </a:rPr>
-              <a:t>reduce_scatter (TP)</a:t>
-            </a:r>
-          </a:p>
-          <a:p>
-            <a:pPr algn="ctr">
-              <a:lnSpc>
-                <a:spcPct val="100000"/>
-              </a:lnSpc>
-            </a:pPr>
-            <a:r>
-              <a:rPr sz="700" b="0">
+              <a:t>maybe_all_reduce_tensor_model_parallel</a:t>
+            </a:r>
+            <a:endParaRPr sz="950" b="1" dirty="0">
+              <a:solidFill>
+                <a:srgbClr val="FFFFFF"/>
+              </a:solidFill>
+              <a:latin typeface="Consolas"/>
+            </a:endParaRPr>
+          </a:p>
+          <a:p>
+            <a:pPr algn="ctr">
+              <a:lnSpc>
+                <a:spcPct val="100000"/>
+              </a:lnSpc>
+            </a:pPr>
+            <a:r>
+              <a:rPr sz="700" b="0" dirty="0">
                 <a:solidFill>
                   <a:srgbClr val="FFFFFF"/>
                 </a:solidFill>
                 <a:latin typeface="Consolas"/>
               </a:rPr>
-              <a:t>[T, 2048] → [T/2, 2048]</a:t>
-            </a:r>
-            <a:r>
-              <a:rPr sz="700" b="0">
-                <a:solidFill>
-                  <a:srgbClr val="FFFFFF"/>
-                </a:solidFill>
-                <a:latin typeface="Microsoft YaHei"/>
-              </a:rPr>
-              <a:t>  ·  充当 expert combine 的前半段</a:t>
-            </a:r>
-          </a:p>
-        </p:txBody>
-      </p:sp>
-      <p:sp>
-        <p:nvSpPr>
-          <p:cNvPr id="8" name="TextBox 7"/>
+              <a:t>[T, 2048]</a:t>
+            </a:r>
+            <a:r>
+              <a:rPr sz="700" b="0" dirty="0">
+                <a:solidFill>
+                  <a:srgbClr val="FFFFFF"/>
+                </a:solidFill>
+                <a:latin typeface="Microsoft YaHei"/>
+              </a:rPr>
+              <a:t>  ·  </a:t>
+            </a:r>
+            <a:r>
+              <a:rPr sz="700" b="0" dirty="0" err="1">
+                <a:solidFill>
+                  <a:srgbClr val="FFFFFF"/>
+                </a:solidFill>
+                <a:latin typeface="Microsoft YaHei"/>
+              </a:rPr>
+              <a:t>MoE</a:t>
+            </a:r>
+            <a:r>
+              <a:rPr sz="700" b="0" dirty="0">
+                <a:solidFill>
+                  <a:srgbClr val="FFFFFF"/>
+                </a:solidFill>
+                <a:latin typeface="Microsoft YaHei"/>
+              </a:rPr>
+              <a:t> </a:t>
+            </a:r>
+            <a:r>
+              <a:rPr sz="700" b="0" dirty="0" err="1">
+                <a:solidFill>
+                  <a:srgbClr val="FFFFFF"/>
+                </a:solidFill>
+                <a:latin typeface="Microsoft YaHei"/>
+              </a:rPr>
+              <a:t>内部最终的</a:t>
+            </a:r>
+            <a:r>
+              <a:rPr sz="700" b="0" dirty="0">
+                <a:solidFill>
+                  <a:srgbClr val="FFFFFF"/>
+                </a:solidFill>
+                <a:latin typeface="Microsoft YaHei"/>
+              </a:rPr>
+              <a:t> TP </a:t>
+            </a:r>
+            <a:r>
+              <a:rPr sz="700" b="0" dirty="0" err="1">
+                <a:solidFill>
+                  <a:srgbClr val="FFFFFF"/>
+                </a:solidFill>
+                <a:latin typeface="Microsoft YaHei"/>
+              </a:rPr>
+              <a:t>all_reduce</a:t>
+            </a:r>
+            <a:endParaRPr sz="700" b="0" dirty="0">
+              <a:solidFill>
+                <a:srgbClr val="FFFFFF"/>
+              </a:solidFill>
+              <a:latin typeface="Microsoft YaHei"/>
+            </a:endParaRPr>
+          </a:p>
+        </p:txBody>
+      </p:sp>
+      <p:sp>
+        <p:nvSpPr>
+          <p:cNvPr id="9" name="TextBox 8"/>
           <p:cNvSpPr txBox="1"/>
           <p:nvPr/>
         </p:nvSpPr>
         <p:spPr>
           <a:xfrm>
-            <a:off x="3063240" y="2015490"/>
-            <a:ext cx="6080760" cy="77724"/>
+            <a:off x="457200" y="2168956"/>
+            <a:ext cx="5532120" cy="77724"/>
           </a:xfrm>
           <a:prstGeom prst="rect">
             <a:avLst/>
@@ -11833,14 +8812,14 @@
       </p:sp>
       <p:sp>
         <p:nvSpPr>
-          <p:cNvPr id="9" name="Rounded Rectangle 8"/>
+          <p:cNvPr id="10" name="Rounded Rectangle 9"/>
           <p:cNvSpPr/>
           <p:nvPr/>
         </p:nvSpPr>
         <p:spPr>
           <a:xfrm>
-            <a:off x="3063240" y="2093214"/>
-            <a:ext cx="6080760" cy="305943"/>
+            <a:off x="457200" y="2246680"/>
+            <a:ext cx="5532120" cy="382676"/>
           </a:xfrm>
           <a:prstGeom prst="roundRect">
             <a:avLst>
@@ -11901,21 +8880,21 @@
                 </a:solidFill>
                 <a:latin typeface="Consolas"/>
               </a:rPr>
-              <a:t>[T/2, 2048]</a:t>
-            </a:r>
-          </a:p>
-        </p:txBody>
-      </p:sp>
-      <p:sp>
-        <p:nvSpPr>
-          <p:cNvPr id="10" name="TextBox 9"/>
+              <a:t>[T, 2048]</a:t>
+            </a:r>
+          </a:p>
+        </p:txBody>
+      </p:sp>
+      <p:sp>
+        <p:nvSpPr>
+          <p:cNvPr id="11" name="TextBox 10"/>
           <p:cNvSpPr txBox="1"/>
           <p:nvPr/>
         </p:nvSpPr>
         <p:spPr>
           <a:xfrm>
-            <a:off x="3063240" y="2399157"/>
-            <a:ext cx="6080760" cy="77724"/>
+            <a:off x="457200" y="2629356"/>
+            <a:ext cx="5532120" cy="77724"/>
           </a:xfrm>
           <a:prstGeom prst="rect">
             <a:avLst/>
@@ -11947,14 +8926,356 @@
       </p:sp>
       <p:sp>
         <p:nvSpPr>
-          <p:cNvPr id="11" name="Rounded Rectangle 10"/>
+          <p:cNvPr id="12" name="Rounded Rectangle 11"/>
           <p:cNvSpPr/>
           <p:nvPr/>
         </p:nvSpPr>
         <p:spPr>
           <a:xfrm>
-            <a:off x="3063240" y="2476881"/>
-            <a:ext cx="6080760" cy="305943"/>
+            <a:off x="457200" y="2707080"/>
+            <a:ext cx="5532120" cy="382676"/>
+          </a:xfrm>
+          <a:prstGeom prst="roundRect">
+            <a:avLst>
+              <a:gd name="adj" fmla="val 12000"/>
+            </a:avLst>
+          </a:prstGeom>
+          <a:solidFill>
+            <a:srgbClr val="2563EB"/>
+          </a:solidFill>
+          <a:ln>
+            <a:noFill/>
+          </a:ln>
+          <a:effectLst/>
+        </p:spPr>
+        <p:style>
+          <a:lnRef idx="1">
+            <a:schemeClr val="accent1"/>
+          </a:lnRef>
+          <a:fillRef idx="3">
+            <a:schemeClr val="accent1"/>
+          </a:fillRef>
+          <a:effectRef idx="2">
+            <a:schemeClr val="accent1"/>
+          </a:effectRef>
+          <a:fontRef idx="minor">
+            <a:schemeClr val="lt1"/>
+          </a:fontRef>
+        </p:style>
+        <p:txBody>
+          <a:bodyPr wrap="square" lIns="54864" tIns="9144" rIns="54864" bIns="9144" rtlCol="0" anchor="ctr"/>
+          <a:lstStyle/>
+          <a:p>
+            <a:pPr algn="ctr">
+              <a:lnSpc>
+                <a:spcPct val="100000"/>
+              </a:lnSpc>
+            </a:pPr>
+            <a:r>
+              <a:rPr sz="950" b="1">
+                <a:solidFill>
+                  <a:srgbClr val="FFFFFF"/>
+                </a:solidFill>
+                <a:latin typeface="Consolas"/>
+              </a:rPr>
+              <a:t>unquantized_gemm (qkv_proj)</a:t>
+            </a:r>
+          </a:p>
+          <a:p>
+            <a:pPr algn="ctr">
+              <a:lnSpc>
+                <a:spcPct val="100000"/>
+              </a:lnSpc>
+            </a:pPr>
+            <a:r>
+              <a:rPr sz="700" b="0">
+                <a:solidFill>
+                  <a:srgbClr val="FFFFFF"/>
+                </a:solidFill>
+                <a:latin typeface="Consolas"/>
+              </a:rPr>
+              <a:t>[T, 2048] × [2048, 2560] → [T, 2560]</a:t>
+            </a:r>
+          </a:p>
+        </p:txBody>
+      </p:sp>
+      <p:sp>
+        <p:nvSpPr>
+          <p:cNvPr id="13" name="TextBox 12"/>
+          <p:cNvSpPr txBox="1"/>
+          <p:nvPr/>
+        </p:nvSpPr>
+        <p:spPr>
+          <a:xfrm>
+            <a:off x="457200" y="3089756"/>
+            <a:ext cx="5532120" cy="77724"/>
+          </a:xfrm>
+          <a:prstGeom prst="rect">
+            <a:avLst/>
+          </a:prstGeom>
+          <a:noFill/>
+        </p:spPr>
+        <p:txBody>
+          <a:bodyPr wrap="square" lIns="0" tIns="9144" rIns="0" bIns="9144" anchor="ctr">
+            <a:spAutoFit/>
+          </a:bodyPr>
+          <a:lstStyle/>
+          <a:p>
+            <a:pPr algn="ctr">
+              <a:lnSpc>
+                <a:spcPct val="100000"/>
+              </a:lnSpc>
+            </a:pPr>
+            <a:r>
+              <a:rPr sz="800" b="0">
+                <a:solidFill>
+                  <a:srgbClr val="94A3B8"/>
+                </a:solidFill>
+                <a:latin typeface="Microsoft YaHei"/>
+              </a:rPr>
+              <a:t>↓</a:t>
+            </a:r>
+          </a:p>
+        </p:txBody>
+      </p:sp>
+      <p:sp>
+        <p:nvSpPr>
+          <p:cNvPr id="14" name="Rounded Rectangle 13"/>
+          <p:cNvSpPr/>
+          <p:nvPr/>
+        </p:nvSpPr>
+        <p:spPr>
+          <a:xfrm>
+            <a:off x="457200" y="3167480"/>
+            <a:ext cx="5532120" cy="382676"/>
+          </a:xfrm>
+          <a:prstGeom prst="roundRect">
+            <a:avLst>
+              <a:gd name="adj" fmla="val 12000"/>
+            </a:avLst>
+          </a:prstGeom>
+          <a:solidFill>
+            <a:srgbClr val="7C3AED"/>
+          </a:solidFill>
+          <a:ln>
+            <a:noFill/>
+          </a:ln>
+          <a:effectLst/>
+        </p:spPr>
+        <p:style>
+          <a:lnRef idx="1">
+            <a:schemeClr val="accent1"/>
+          </a:lnRef>
+          <a:fillRef idx="3">
+            <a:schemeClr val="accent1"/>
+          </a:fillRef>
+          <a:effectRef idx="2">
+            <a:schemeClr val="accent1"/>
+          </a:effectRef>
+          <a:fontRef idx="minor">
+            <a:schemeClr val="lt1"/>
+          </a:fontRef>
+        </p:style>
+        <p:txBody>
+          <a:bodyPr wrap="square" lIns="54864" tIns="9144" rIns="54864" bIns="9144" rtlCol="0" anchor="ctr"/>
+          <a:lstStyle/>
+          <a:p>
+            <a:pPr algn="ctr">
+              <a:lnSpc>
+                <a:spcPct val="100000"/>
+              </a:lnSpc>
+            </a:pPr>
+            <a:r>
+              <a:rPr sz="950" b="1">
+                <a:solidFill>
+                  <a:srgbClr val="FFFFFF"/>
+                </a:solidFill>
+                <a:latin typeface="Consolas"/>
+              </a:rPr>
+              <a:t>qkv_rmsnorm_rope + unified_attention</a:t>
+            </a:r>
+          </a:p>
+          <a:p>
+            <a:pPr algn="ctr">
+              <a:lnSpc>
+                <a:spcPct val="100000"/>
+              </a:lnSpc>
+            </a:pPr>
+            <a:r>
+              <a:rPr sz="700" b="0">
+                <a:solidFill>
+                  <a:srgbClr val="FFFFFF"/>
+                </a:solidFill>
+                <a:latin typeface="Consolas"/>
+              </a:rPr>
+              <a:t>q [T, 16, 128] / kv [T, 2, 128] → [T, 2048]</a:t>
+            </a:r>
+          </a:p>
+        </p:txBody>
+      </p:sp>
+      <p:sp>
+        <p:nvSpPr>
+          <p:cNvPr id="15" name="TextBox 14"/>
+          <p:cNvSpPr txBox="1"/>
+          <p:nvPr/>
+        </p:nvSpPr>
+        <p:spPr>
+          <a:xfrm>
+            <a:off x="457200" y="3550156"/>
+            <a:ext cx="5532120" cy="77724"/>
+          </a:xfrm>
+          <a:prstGeom prst="rect">
+            <a:avLst/>
+          </a:prstGeom>
+          <a:noFill/>
+        </p:spPr>
+        <p:txBody>
+          <a:bodyPr wrap="square" lIns="0" tIns="9144" rIns="0" bIns="9144" anchor="ctr">
+            <a:spAutoFit/>
+          </a:bodyPr>
+          <a:lstStyle/>
+          <a:p>
+            <a:pPr algn="ctr">
+              <a:lnSpc>
+                <a:spcPct val="100000"/>
+              </a:lnSpc>
+            </a:pPr>
+            <a:r>
+              <a:rPr sz="800" b="0">
+                <a:solidFill>
+                  <a:srgbClr val="94A3B8"/>
+                </a:solidFill>
+                <a:latin typeface="Microsoft YaHei"/>
+              </a:rPr>
+              <a:t>↓</a:t>
+            </a:r>
+          </a:p>
+        </p:txBody>
+      </p:sp>
+      <p:sp>
+        <p:nvSpPr>
+          <p:cNvPr id="16" name="Rounded Rectangle 15"/>
+          <p:cNvSpPr/>
+          <p:nvPr/>
+        </p:nvSpPr>
+        <p:spPr>
+          <a:xfrm>
+            <a:off x="457200" y="3627880"/>
+            <a:ext cx="5532120" cy="382676"/>
+          </a:xfrm>
+          <a:prstGeom prst="roundRect">
+            <a:avLst>
+              <a:gd name="adj" fmla="val 12000"/>
+            </a:avLst>
+          </a:prstGeom>
+          <a:solidFill>
+            <a:srgbClr val="2563EB"/>
+          </a:solidFill>
+          <a:ln>
+            <a:noFill/>
+          </a:ln>
+          <a:effectLst/>
+        </p:spPr>
+        <p:style>
+          <a:lnRef idx="1">
+            <a:schemeClr val="accent1"/>
+          </a:lnRef>
+          <a:fillRef idx="3">
+            <a:schemeClr val="accent1"/>
+          </a:fillRef>
+          <a:effectRef idx="2">
+            <a:schemeClr val="accent1"/>
+          </a:effectRef>
+          <a:fontRef idx="minor">
+            <a:schemeClr val="lt1"/>
+          </a:fontRef>
+        </p:style>
+        <p:txBody>
+          <a:bodyPr wrap="square" lIns="54864" tIns="9144" rIns="54864" bIns="9144" rtlCol="0" anchor="ctr"/>
+          <a:lstStyle/>
+          <a:p>
+            <a:pPr algn="ctr">
+              <a:lnSpc>
+                <a:spcPct val="100000"/>
+              </a:lnSpc>
+            </a:pPr>
+            <a:r>
+              <a:rPr sz="950" b="1">
+                <a:solidFill>
+                  <a:srgbClr val="FFFFFF"/>
+                </a:solidFill>
+                <a:latin typeface="Consolas"/>
+              </a:rPr>
+              <a:t>unquantized_gemm (o_proj)</a:t>
+            </a:r>
+          </a:p>
+          <a:p>
+            <a:pPr algn="ctr">
+              <a:lnSpc>
+                <a:spcPct val="100000"/>
+              </a:lnSpc>
+            </a:pPr>
+            <a:r>
+              <a:rPr sz="700" b="0">
+                <a:solidFill>
+                  <a:srgbClr val="FFFFFF"/>
+                </a:solidFill>
+                <a:latin typeface="Consolas"/>
+              </a:rPr>
+              <a:t>[T, 2048] × [2048, 2048] → [T, 2048]</a:t>
+            </a:r>
+          </a:p>
+        </p:txBody>
+      </p:sp>
+      <p:sp>
+        <p:nvSpPr>
+          <p:cNvPr id="17" name="TextBox 16"/>
+          <p:cNvSpPr txBox="1"/>
+          <p:nvPr/>
+        </p:nvSpPr>
+        <p:spPr>
+          <a:xfrm>
+            <a:off x="457200" y="4010556"/>
+            <a:ext cx="5532120" cy="77724"/>
+          </a:xfrm>
+          <a:prstGeom prst="rect">
+            <a:avLst/>
+          </a:prstGeom>
+          <a:noFill/>
+        </p:spPr>
+        <p:txBody>
+          <a:bodyPr wrap="square" lIns="0" tIns="9144" rIns="0" bIns="9144" anchor="ctr">
+            <a:spAutoFit/>
+          </a:bodyPr>
+          <a:lstStyle/>
+          <a:p>
+            <a:pPr algn="ctr">
+              <a:lnSpc>
+                <a:spcPct val="100000"/>
+              </a:lnSpc>
+            </a:pPr>
+            <a:r>
+              <a:rPr sz="800" b="0">
+                <a:solidFill>
+                  <a:srgbClr val="94A3B8"/>
+                </a:solidFill>
+                <a:latin typeface="Microsoft YaHei"/>
+              </a:rPr>
+              <a:t>↓</a:t>
+            </a:r>
+          </a:p>
+        </p:txBody>
+      </p:sp>
+      <p:sp>
+        <p:nvSpPr>
+          <p:cNvPr id="18" name="Rounded Rectangle 17"/>
+          <p:cNvSpPr/>
+          <p:nvPr/>
+        </p:nvSpPr>
+        <p:spPr>
+          <a:xfrm>
+            <a:off x="457200" y="4088280"/>
+            <a:ext cx="5532120" cy="382676"/>
           </a:xfrm>
           <a:prstGeom prst="roundRect">
             <a:avLst>
@@ -11999,7 +9320,7 @@
                 </a:solidFill>
                 <a:latin typeface="Consolas"/>
               </a:rPr>
-              <a:t>all_gather (TP)</a:t>
+              <a:t>all_reduce (TP)</a:t>
             </a:r>
           </a:p>
           <a:p>
@@ -12015,21 +9336,21 @@
                 </a:solidFill>
                 <a:latin typeface="Consolas"/>
               </a:rPr>
-              <a:t>[T/2, 2048] → [T, 2048]</a:t>
-            </a:r>
-          </a:p>
-        </p:txBody>
-      </p:sp>
-      <p:sp>
-        <p:nvSpPr>
-          <p:cNvPr id="12" name="TextBox 11"/>
+              <a:t>[T, 2048]</a:t>
+            </a:r>
+          </a:p>
+        </p:txBody>
+      </p:sp>
+      <p:sp>
+        <p:nvSpPr>
+          <p:cNvPr id="19" name="TextBox 18"/>
           <p:cNvSpPr txBox="1"/>
           <p:nvPr/>
         </p:nvSpPr>
         <p:spPr>
           <a:xfrm>
-            <a:off x="3063240" y="2782824"/>
-            <a:ext cx="6080760" cy="77724"/>
+            <a:off x="457200" y="4470956"/>
+            <a:ext cx="5532120" cy="77724"/>
           </a:xfrm>
           <a:prstGeom prst="rect">
             <a:avLst/>
@@ -12061,14 +9382,128 @@
       </p:sp>
       <p:sp>
         <p:nvSpPr>
-          <p:cNvPr id="13" name="Rounded Rectangle 12"/>
+          <p:cNvPr id="20" name="Rounded Rectangle 19"/>
           <p:cNvSpPr/>
           <p:nvPr/>
         </p:nvSpPr>
         <p:spPr>
           <a:xfrm>
-            <a:off x="3063240" y="2860548"/>
-            <a:ext cx="6080760" cy="305943"/>
+            <a:off x="457200" y="4548680"/>
+            <a:ext cx="5532120" cy="382676"/>
+          </a:xfrm>
+          <a:prstGeom prst="roundRect">
+            <a:avLst>
+              <a:gd name="adj" fmla="val 12000"/>
+            </a:avLst>
+          </a:prstGeom>
+          <a:solidFill>
+            <a:srgbClr val="059669"/>
+          </a:solidFill>
+          <a:ln>
+            <a:noFill/>
+          </a:ln>
+          <a:effectLst/>
+        </p:spPr>
+        <p:style>
+          <a:lnRef idx="1">
+            <a:schemeClr val="accent1"/>
+          </a:lnRef>
+          <a:fillRef idx="3">
+            <a:schemeClr val="accent1"/>
+          </a:fillRef>
+          <a:effectRef idx="2">
+            <a:schemeClr val="accent1"/>
+          </a:effectRef>
+          <a:fontRef idx="minor">
+            <a:schemeClr val="lt1"/>
+          </a:fontRef>
+        </p:style>
+        <p:txBody>
+          <a:bodyPr wrap="square" lIns="54864" tIns="9144" rIns="54864" bIns="9144" rtlCol="0" anchor="ctr"/>
+          <a:lstStyle/>
+          <a:p>
+            <a:pPr algn="ctr">
+              <a:lnSpc>
+                <a:spcPct val="100000"/>
+              </a:lnSpc>
+            </a:pPr>
+            <a:r>
+              <a:rPr sz="950" b="1">
+                <a:solidFill>
+                  <a:srgbClr val="FFFFFF"/>
+                </a:solidFill>
+                <a:latin typeface="Consolas"/>
+              </a:rPr>
+              <a:t>maybe_chunk_residual + npu_add_rms_norm_bias</a:t>
+            </a:r>
+          </a:p>
+          <a:p>
+            <a:pPr algn="ctr">
+              <a:lnSpc>
+                <a:spcPct val="100000"/>
+              </a:lnSpc>
+            </a:pPr>
+            <a:r>
+              <a:rPr sz="700" b="0">
+                <a:solidFill>
+                  <a:srgbClr val="FFFFFF"/>
+                </a:solidFill>
+                <a:latin typeface="Consolas"/>
+              </a:rPr>
+              <a:t>[T, 2048]</a:t>
+            </a:r>
+          </a:p>
+        </p:txBody>
+      </p:sp>
+      <p:sp>
+        <p:nvSpPr>
+          <p:cNvPr id="21" name="TextBox 20"/>
+          <p:cNvSpPr txBox="1"/>
+          <p:nvPr/>
+        </p:nvSpPr>
+        <p:spPr>
+          <a:xfrm>
+            <a:off x="457200" y="4931356"/>
+            <a:ext cx="5532120" cy="77724"/>
+          </a:xfrm>
+          <a:prstGeom prst="rect">
+            <a:avLst/>
+          </a:prstGeom>
+          <a:noFill/>
+        </p:spPr>
+        <p:txBody>
+          <a:bodyPr wrap="square" lIns="0" tIns="9144" rIns="0" bIns="9144" anchor="ctr">
+            <a:spAutoFit/>
+          </a:bodyPr>
+          <a:lstStyle/>
+          <a:p>
+            <a:pPr algn="ctr">
+              <a:lnSpc>
+                <a:spcPct val="100000"/>
+              </a:lnSpc>
+            </a:pPr>
+            <a:r>
+              <a:rPr sz="800" b="0">
+                <a:solidFill>
+                  <a:srgbClr val="94A3B8"/>
+                </a:solidFill>
+                <a:latin typeface="Microsoft YaHei"/>
+              </a:rPr>
+              <a:t>↓</a:t>
+            </a:r>
+          </a:p>
+        </p:txBody>
+      </p:sp>
+      <p:sp>
+        <p:nvSpPr>
+          <p:cNvPr id="22" name="Rounded Rectangle 21"/>
+          <p:cNvSpPr/>
+          <p:nvPr/>
+        </p:nvSpPr>
+        <p:spPr>
+          <a:xfrm>
+            <a:off x="457200" y="5009080"/>
+            <a:ext cx="5532120" cy="382676"/>
           </a:xfrm>
           <a:prstGeom prst="roundRect">
             <a:avLst>
@@ -12113,7 +9548,7 @@
                 </a:solidFill>
                 <a:latin typeface="Consolas"/>
               </a:rPr>
-              <a:t>unquantized_gemm (qkv_proj)</a:t>
+              <a:t>unquantized_gemm (gate / router)</a:t>
             </a:r>
           </a:p>
           <a:p>
@@ -12129,21 +9564,21 @@
                 </a:solidFill>
                 <a:latin typeface="Consolas"/>
               </a:rPr>
-              <a:t>[T, 2048] × [2048, 2560] → [T, 2560]</a:t>
-            </a:r>
-          </a:p>
-        </p:txBody>
-      </p:sp>
-      <p:sp>
-        <p:nvSpPr>
-          <p:cNvPr id="14" name="TextBox 13"/>
+              <a:t>[T, 2048] × [2048, 128] → [T, 128]</a:t>
+            </a:r>
+          </a:p>
+        </p:txBody>
+      </p:sp>
+      <p:sp>
+        <p:nvSpPr>
+          <p:cNvPr id="23" name="TextBox 22"/>
           <p:cNvSpPr txBox="1"/>
           <p:nvPr/>
         </p:nvSpPr>
         <p:spPr>
           <a:xfrm>
-            <a:off x="3063240" y="3166491"/>
-            <a:ext cx="6080760" cy="77724"/>
+            <a:off x="457200" y="5391756"/>
+            <a:ext cx="5532120" cy="77724"/>
           </a:xfrm>
           <a:prstGeom prst="rect">
             <a:avLst/>
@@ -12175,14 +9610,782 @@
       </p:sp>
       <p:sp>
         <p:nvSpPr>
-          <p:cNvPr id="15" name="Rounded Rectangle 14"/>
+          <p:cNvPr id="24" name="Rounded Rectangle 23"/>
           <p:cNvSpPr/>
           <p:nvPr/>
         </p:nvSpPr>
         <p:spPr>
           <a:xfrm>
-            <a:off x="3063240" y="3244215"/>
-            <a:ext cx="6080760" cy="305943"/>
+            <a:off x="457200" y="5469480"/>
+            <a:ext cx="5532120" cy="382676"/>
+          </a:xfrm>
+          <a:prstGeom prst="roundRect">
+            <a:avLst>
+              <a:gd name="adj" fmla="val 12000"/>
+            </a:avLst>
+          </a:prstGeom>
+          <a:solidFill>
+            <a:srgbClr val="DC2626"/>
+          </a:solidFill>
+          <a:ln>
+            <a:noFill/>
+          </a:ln>
+          <a:effectLst/>
+        </p:spPr>
+        <p:style>
+          <a:lnRef idx="1">
+            <a:schemeClr val="accent1"/>
+          </a:lnRef>
+          <a:fillRef idx="3">
+            <a:schemeClr val="accent1"/>
+          </a:fillRef>
+          <a:effectRef idx="2">
+            <a:schemeClr val="accent1"/>
+          </a:effectRef>
+          <a:fontRef idx="minor">
+            <a:schemeClr val="lt1"/>
+          </a:fontRef>
+        </p:style>
+        <p:txBody>
+          <a:bodyPr wrap="square" lIns="54864" tIns="9144" rIns="54864" bIns="9144" rtlCol="0" anchor="ctr"/>
+          <a:lstStyle/>
+          <a:p>
+            <a:pPr algn="ctr">
+              <a:lnSpc>
+                <a:spcPct val="100000"/>
+              </a:lnSpc>
+            </a:pPr>
+            <a:r>
+              <a:rPr sz="950" b="1">
+                <a:solidFill>
+                  <a:srgbClr val="FFFFFF"/>
+                </a:solidFill>
+                <a:latin typeface="Consolas"/>
+              </a:rPr>
+              <a:t>moe_forward</a:t>
+            </a:r>
+          </a:p>
+          <a:p>
+            <a:pPr algn="ctr">
+              <a:lnSpc>
+                <a:spcPct val="100000"/>
+              </a:lnSpc>
+            </a:pPr>
+            <a:r>
+              <a:rPr sz="700" b="0">
+                <a:solidFill>
+                  <a:srgbClr val="FFFFFF"/>
+                </a:solidFill>
+                <a:latin typeface="Consolas"/>
+              </a:rPr>
+              <a:t>in [T, 2048] → out [T, 2048]</a:t>
+            </a:r>
+            <a:r>
+              <a:rPr sz="700" b="0">
+                <a:solidFill>
+                  <a:srgbClr val="FFFFFF"/>
+                </a:solidFill>
+                <a:latin typeface="Microsoft YaHei"/>
+              </a:rPr>
+              <a:t>  ·  内部 EP all2all（64 experts/rank）+ 最终 TP all_reduce</a:t>
+            </a:r>
+          </a:p>
+        </p:txBody>
+      </p:sp>
+      <p:sp>
+        <p:nvSpPr>
+          <p:cNvPr id="25" name="Rounded Rectangle 24"/>
+          <p:cNvSpPr/>
+          <p:nvPr/>
+        </p:nvSpPr>
+        <p:spPr>
+          <a:xfrm>
+            <a:off x="6217920" y="1325880"/>
+            <a:ext cx="5532120" cy="305943"/>
+          </a:xfrm>
+          <a:prstGeom prst="roundRect">
+            <a:avLst>
+              <a:gd name="adj" fmla="val 12000"/>
+            </a:avLst>
+          </a:prstGeom>
+          <a:solidFill>
+            <a:srgbClr val="FFFFFF"/>
+          </a:solidFill>
+          <a:ln w="17780">
+            <a:solidFill>
+              <a:srgbClr val="6B7280"/>
+            </a:solidFill>
+            <a:prstDash val="dash"/>
+          </a:ln>
+          <a:effectLst/>
+        </p:spPr>
+        <p:style>
+          <a:lnRef idx="1">
+            <a:schemeClr val="accent1"/>
+          </a:lnRef>
+          <a:fillRef idx="3">
+            <a:schemeClr val="accent1"/>
+          </a:fillRef>
+          <a:effectRef idx="2">
+            <a:schemeClr val="accent1"/>
+          </a:effectRef>
+          <a:fontRef idx="minor">
+            <a:schemeClr val="lt1"/>
+          </a:fontRef>
+        </p:style>
+        <p:txBody>
+          <a:bodyPr wrap="square" lIns="54864" tIns="9144" rIns="54864" bIns="9144" rtlCol="0" anchor="ctr"/>
+          <a:lstStyle/>
+          <a:p>
+            <a:pPr algn="ctr">
+              <a:lnSpc>
+                <a:spcPct val="100000"/>
+              </a:lnSpc>
+            </a:pPr>
+            <a:r>
+              <a:rPr sz="950" b="1">
+                <a:solidFill>
+                  <a:srgbClr val="334155"/>
+                </a:solidFill>
+                <a:latin typeface="Consolas"/>
+              </a:rPr>
+              <a:t>上一层 MoE 输出（完整 tensor）</a:t>
+            </a:r>
+          </a:p>
+          <a:p>
+            <a:pPr algn="ctr">
+              <a:lnSpc>
+                <a:spcPct val="100000"/>
+              </a:lnSpc>
+            </a:pPr>
+            <a:r>
+              <a:rPr sz="700" b="0">
+                <a:solidFill>
+                  <a:srgbClr val="334155"/>
+                </a:solidFill>
+                <a:latin typeface="Consolas"/>
+              </a:rPr>
+              <a:t>[T, 2048]</a:t>
+            </a:r>
+          </a:p>
+        </p:txBody>
+      </p:sp>
+      <p:sp>
+        <p:nvSpPr>
+          <p:cNvPr id="26" name="TextBox 25"/>
+          <p:cNvSpPr txBox="1"/>
+          <p:nvPr/>
+        </p:nvSpPr>
+        <p:spPr>
+          <a:xfrm>
+            <a:off x="6217920" y="1631823"/>
+            <a:ext cx="5532120" cy="77724"/>
+          </a:xfrm>
+          <a:prstGeom prst="rect">
+            <a:avLst/>
+          </a:prstGeom>
+          <a:noFill/>
+        </p:spPr>
+        <p:txBody>
+          <a:bodyPr wrap="square" lIns="0" tIns="9144" rIns="0" bIns="9144" anchor="ctr">
+            <a:spAutoFit/>
+          </a:bodyPr>
+          <a:lstStyle/>
+          <a:p>
+            <a:pPr algn="ctr">
+              <a:lnSpc>
+                <a:spcPct val="100000"/>
+              </a:lnSpc>
+            </a:pPr>
+            <a:r>
+              <a:rPr sz="800" b="0">
+                <a:solidFill>
+                  <a:srgbClr val="94A3B8"/>
+                </a:solidFill>
+                <a:latin typeface="Microsoft YaHei"/>
+              </a:rPr>
+              <a:t>↓</a:t>
+            </a:r>
+          </a:p>
+        </p:txBody>
+      </p:sp>
+      <p:sp>
+        <p:nvSpPr>
+          <p:cNvPr id="27" name="Rounded Rectangle 26"/>
+          <p:cNvSpPr/>
+          <p:nvPr/>
+        </p:nvSpPr>
+        <p:spPr>
+          <a:xfrm>
+            <a:off x="6217920" y="1709547"/>
+            <a:ext cx="5532120" cy="305943"/>
+          </a:xfrm>
+          <a:prstGeom prst="roundRect">
+            <a:avLst>
+              <a:gd name="adj" fmla="val 12000"/>
+            </a:avLst>
+          </a:prstGeom>
+          <a:solidFill>
+            <a:srgbClr val="D97706"/>
+          </a:solidFill>
+          <a:ln>
+            <a:noFill/>
+          </a:ln>
+          <a:effectLst/>
+        </p:spPr>
+        <p:style>
+          <a:lnRef idx="1">
+            <a:schemeClr val="accent1"/>
+          </a:lnRef>
+          <a:fillRef idx="3">
+            <a:schemeClr val="accent1"/>
+          </a:fillRef>
+          <a:effectRef idx="2">
+            <a:schemeClr val="accent1"/>
+          </a:effectRef>
+          <a:fontRef idx="minor">
+            <a:schemeClr val="lt1"/>
+          </a:fontRef>
+        </p:style>
+        <p:txBody>
+          <a:bodyPr wrap="square" lIns="54864" tIns="9144" rIns="54864" bIns="9144" rtlCol="0" anchor="ctr"/>
+          <a:lstStyle/>
+          <a:p>
+            <a:pPr algn="ctr">
+              <a:lnSpc>
+                <a:spcPct val="100000"/>
+              </a:lnSpc>
+            </a:pPr>
+            <a:r>
+              <a:rPr sz="950" b="1" dirty="0" err="1">
+                <a:solidFill>
+                  <a:srgbClr val="FFFFFF"/>
+                </a:solidFill>
+                <a:latin typeface="Consolas"/>
+              </a:rPr>
+              <a:t>reduce_scatter</a:t>
+            </a:r>
+            <a:r>
+              <a:rPr sz="950" b="1" dirty="0">
+                <a:solidFill>
+                  <a:srgbClr val="FFFFFF"/>
+                </a:solidFill>
+                <a:latin typeface="Consolas"/>
+              </a:rPr>
+              <a:t> (TP)</a:t>
+            </a:r>
+            <a:r>
+              <a:rPr lang="en-US" sz="950" b="1" dirty="0">
+                <a:solidFill>
+                  <a:srgbClr val="FFFFFF"/>
+                </a:solidFill>
+                <a:latin typeface="Consolas"/>
+              </a:rPr>
+              <a:t>659</a:t>
+            </a:r>
+            <a:endParaRPr sz="950" b="1" dirty="0">
+              <a:solidFill>
+                <a:srgbClr val="FFFFFF"/>
+              </a:solidFill>
+              <a:latin typeface="Consolas"/>
+            </a:endParaRPr>
+          </a:p>
+          <a:p>
+            <a:pPr algn="ctr">
+              <a:lnSpc>
+                <a:spcPct val="100000"/>
+              </a:lnSpc>
+            </a:pPr>
+            <a:r>
+              <a:rPr sz="700" b="0" dirty="0">
+                <a:solidFill>
+                  <a:srgbClr val="FFFFFF"/>
+                </a:solidFill>
+                <a:latin typeface="Consolas"/>
+              </a:rPr>
+              <a:t>[T, 2048] → [T/2, 2048]</a:t>
+            </a:r>
+            <a:r>
+              <a:rPr sz="700" b="0" dirty="0">
+                <a:solidFill>
+                  <a:srgbClr val="FFFFFF"/>
+                </a:solidFill>
+                <a:latin typeface="Microsoft YaHei"/>
+              </a:rPr>
+              <a:t>  ·  SP pass </a:t>
+            </a:r>
+            <a:r>
+              <a:rPr sz="700" b="0" dirty="0" err="1">
+                <a:solidFill>
+                  <a:srgbClr val="FFFFFF"/>
+                </a:solidFill>
+                <a:latin typeface="Microsoft YaHei"/>
+              </a:rPr>
+              <a:t>替换点</a:t>
+            </a:r>
+            <a:r>
+              <a:rPr sz="700" b="0" dirty="0">
+                <a:solidFill>
+                  <a:srgbClr val="FFFFFF"/>
+                </a:solidFill>
+                <a:latin typeface="Microsoft YaHei"/>
+              </a:rPr>
+              <a:t> ②：</a:t>
+            </a:r>
+            <a:r>
+              <a:rPr sz="700" b="0" dirty="0" err="1">
+                <a:solidFill>
+                  <a:srgbClr val="FFFFFF"/>
+                </a:solidFill>
+                <a:latin typeface="Microsoft YaHei"/>
+              </a:rPr>
+              <a:t>MoE</a:t>
+            </a:r>
+            <a:r>
+              <a:rPr sz="700" b="0" dirty="0">
+                <a:solidFill>
+                  <a:srgbClr val="FFFFFF"/>
+                </a:solidFill>
+                <a:latin typeface="Microsoft YaHei"/>
+              </a:rPr>
+              <a:t> </a:t>
+            </a:r>
+            <a:r>
+              <a:rPr sz="700" b="0" dirty="0" err="1">
+                <a:solidFill>
+                  <a:srgbClr val="FFFFFF"/>
+                </a:solidFill>
+                <a:latin typeface="Microsoft YaHei"/>
+              </a:rPr>
+              <a:t>后的</a:t>
+            </a:r>
+            <a:r>
+              <a:rPr sz="700" b="0" dirty="0">
+                <a:solidFill>
+                  <a:srgbClr val="FFFFFF"/>
+                </a:solidFill>
+                <a:latin typeface="Microsoft YaHei"/>
+              </a:rPr>
+              <a:t> </a:t>
+            </a:r>
+            <a:r>
+              <a:rPr sz="700" b="0" dirty="0" err="1">
+                <a:solidFill>
+                  <a:srgbClr val="FFFFFF"/>
+                </a:solidFill>
+                <a:latin typeface="Microsoft YaHei"/>
+              </a:rPr>
+              <a:t>maybe_all_reduce</a:t>
+            </a:r>
+            <a:endParaRPr sz="700" b="0" dirty="0">
+              <a:solidFill>
+                <a:srgbClr val="FFFFFF"/>
+              </a:solidFill>
+              <a:latin typeface="Microsoft YaHei"/>
+            </a:endParaRPr>
+          </a:p>
+        </p:txBody>
+      </p:sp>
+      <p:sp>
+        <p:nvSpPr>
+          <p:cNvPr id="28" name="TextBox 27"/>
+          <p:cNvSpPr txBox="1"/>
+          <p:nvPr/>
+        </p:nvSpPr>
+        <p:spPr>
+          <a:xfrm>
+            <a:off x="6217920" y="2015490"/>
+            <a:ext cx="5532120" cy="77724"/>
+          </a:xfrm>
+          <a:prstGeom prst="rect">
+            <a:avLst/>
+          </a:prstGeom>
+          <a:noFill/>
+        </p:spPr>
+        <p:txBody>
+          <a:bodyPr wrap="square" lIns="0" tIns="9144" rIns="0" bIns="9144" anchor="ctr">
+            <a:spAutoFit/>
+          </a:bodyPr>
+          <a:lstStyle/>
+          <a:p>
+            <a:pPr algn="ctr">
+              <a:lnSpc>
+                <a:spcPct val="100000"/>
+              </a:lnSpc>
+            </a:pPr>
+            <a:r>
+              <a:rPr sz="800" b="0">
+                <a:solidFill>
+                  <a:srgbClr val="94A3B8"/>
+                </a:solidFill>
+                <a:latin typeface="Microsoft YaHei"/>
+              </a:rPr>
+              <a:t>↓</a:t>
+            </a:r>
+          </a:p>
+        </p:txBody>
+      </p:sp>
+      <p:sp>
+        <p:nvSpPr>
+          <p:cNvPr id="29" name="Rounded Rectangle 28"/>
+          <p:cNvSpPr/>
+          <p:nvPr/>
+        </p:nvSpPr>
+        <p:spPr>
+          <a:xfrm>
+            <a:off x="6217920" y="2093214"/>
+            <a:ext cx="5532120" cy="305943"/>
+          </a:xfrm>
+          <a:prstGeom prst="roundRect">
+            <a:avLst>
+              <a:gd name="adj" fmla="val 12000"/>
+            </a:avLst>
+          </a:prstGeom>
+          <a:solidFill>
+            <a:srgbClr val="059669"/>
+          </a:solidFill>
+          <a:ln>
+            <a:noFill/>
+          </a:ln>
+          <a:effectLst/>
+        </p:spPr>
+        <p:style>
+          <a:lnRef idx="1">
+            <a:schemeClr val="accent1"/>
+          </a:lnRef>
+          <a:fillRef idx="3">
+            <a:schemeClr val="accent1"/>
+          </a:fillRef>
+          <a:effectRef idx="2">
+            <a:schemeClr val="accent1"/>
+          </a:effectRef>
+          <a:fontRef idx="minor">
+            <a:schemeClr val="lt1"/>
+          </a:fontRef>
+        </p:style>
+        <p:txBody>
+          <a:bodyPr wrap="square" lIns="54864" tIns="9144" rIns="54864" bIns="9144" rtlCol="0" anchor="ctr"/>
+          <a:lstStyle/>
+          <a:p>
+            <a:pPr algn="ctr">
+              <a:lnSpc>
+                <a:spcPct val="100000"/>
+              </a:lnSpc>
+            </a:pPr>
+            <a:r>
+              <a:rPr sz="950" b="1">
+                <a:solidFill>
+                  <a:srgbClr val="FFFFFF"/>
+                </a:solidFill>
+                <a:latin typeface="Consolas"/>
+              </a:rPr>
+              <a:t>maybe_chunk_residual + npu_add_rms_norm_bias</a:t>
+            </a:r>
+          </a:p>
+          <a:p>
+            <a:pPr algn="ctr">
+              <a:lnSpc>
+                <a:spcPct val="100000"/>
+              </a:lnSpc>
+            </a:pPr>
+            <a:r>
+              <a:rPr sz="700" b="0">
+                <a:solidFill>
+                  <a:srgbClr val="FFFFFF"/>
+                </a:solidFill>
+                <a:latin typeface="Consolas"/>
+              </a:rPr>
+              <a:t>[T/2, 2048]</a:t>
+            </a:r>
+          </a:p>
+        </p:txBody>
+      </p:sp>
+      <p:sp>
+        <p:nvSpPr>
+          <p:cNvPr id="30" name="TextBox 29"/>
+          <p:cNvSpPr txBox="1"/>
+          <p:nvPr/>
+        </p:nvSpPr>
+        <p:spPr>
+          <a:xfrm>
+            <a:off x="6217920" y="2399157"/>
+            <a:ext cx="5532120" cy="77724"/>
+          </a:xfrm>
+          <a:prstGeom prst="rect">
+            <a:avLst/>
+          </a:prstGeom>
+          <a:noFill/>
+        </p:spPr>
+        <p:txBody>
+          <a:bodyPr wrap="square" lIns="0" tIns="9144" rIns="0" bIns="9144" anchor="ctr">
+            <a:spAutoFit/>
+          </a:bodyPr>
+          <a:lstStyle/>
+          <a:p>
+            <a:pPr algn="ctr">
+              <a:lnSpc>
+                <a:spcPct val="100000"/>
+              </a:lnSpc>
+            </a:pPr>
+            <a:r>
+              <a:rPr sz="800" b="0">
+                <a:solidFill>
+                  <a:srgbClr val="94A3B8"/>
+                </a:solidFill>
+                <a:latin typeface="Microsoft YaHei"/>
+              </a:rPr>
+              <a:t>↓</a:t>
+            </a:r>
+          </a:p>
+        </p:txBody>
+      </p:sp>
+      <p:sp>
+        <p:nvSpPr>
+          <p:cNvPr id="31" name="Rounded Rectangle 30"/>
+          <p:cNvSpPr/>
+          <p:nvPr/>
+        </p:nvSpPr>
+        <p:spPr>
+          <a:xfrm>
+            <a:off x="6217920" y="2476881"/>
+            <a:ext cx="5532120" cy="305943"/>
+          </a:xfrm>
+          <a:prstGeom prst="roundRect">
+            <a:avLst>
+              <a:gd name="adj" fmla="val 12000"/>
+            </a:avLst>
+          </a:prstGeom>
+          <a:solidFill>
+            <a:srgbClr val="D97706"/>
+          </a:solidFill>
+          <a:ln>
+            <a:noFill/>
+          </a:ln>
+          <a:effectLst/>
+        </p:spPr>
+        <p:style>
+          <a:lnRef idx="1">
+            <a:schemeClr val="accent1"/>
+          </a:lnRef>
+          <a:fillRef idx="3">
+            <a:schemeClr val="accent1"/>
+          </a:fillRef>
+          <a:effectRef idx="2">
+            <a:schemeClr val="accent1"/>
+          </a:effectRef>
+          <a:fontRef idx="minor">
+            <a:schemeClr val="lt1"/>
+          </a:fontRef>
+        </p:style>
+        <p:txBody>
+          <a:bodyPr wrap="square" lIns="54864" tIns="9144" rIns="54864" bIns="9144" rtlCol="0" anchor="ctr"/>
+          <a:lstStyle/>
+          <a:p>
+            <a:pPr algn="ctr">
+              <a:lnSpc>
+                <a:spcPct val="100000"/>
+              </a:lnSpc>
+            </a:pPr>
+            <a:r>
+              <a:rPr sz="950" b="1">
+                <a:solidFill>
+                  <a:srgbClr val="FFFFFF"/>
+                </a:solidFill>
+                <a:latin typeface="Consolas"/>
+              </a:rPr>
+              <a:t>all_gather (TP)</a:t>
+            </a:r>
+          </a:p>
+          <a:p>
+            <a:pPr algn="ctr">
+              <a:lnSpc>
+                <a:spcPct val="100000"/>
+              </a:lnSpc>
+            </a:pPr>
+            <a:r>
+              <a:rPr sz="700" b="0">
+                <a:solidFill>
+                  <a:srgbClr val="FFFFFF"/>
+                </a:solidFill>
+                <a:latin typeface="Consolas"/>
+              </a:rPr>
+              <a:t>[T/2, 2048] → [T, 2048]</a:t>
+            </a:r>
+            <a:r>
+              <a:rPr sz="700" b="0">
+                <a:solidFill>
+                  <a:srgbClr val="FFFFFF"/>
+                </a:solidFill>
+                <a:latin typeface="Microsoft YaHei"/>
+              </a:rPr>
+              <a:t>  ·  attention 需要完整序列</a:t>
+            </a:r>
+          </a:p>
+        </p:txBody>
+      </p:sp>
+      <p:sp>
+        <p:nvSpPr>
+          <p:cNvPr id="32" name="TextBox 31"/>
+          <p:cNvSpPr txBox="1"/>
+          <p:nvPr/>
+        </p:nvSpPr>
+        <p:spPr>
+          <a:xfrm>
+            <a:off x="6217920" y="2782824"/>
+            <a:ext cx="5532120" cy="77724"/>
+          </a:xfrm>
+          <a:prstGeom prst="rect">
+            <a:avLst/>
+          </a:prstGeom>
+          <a:noFill/>
+        </p:spPr>
+        <p:txBody>
+          <a:bodyPr wrap="square" lIns="0" tIns="9144" rIns="0" bIns="9144" anchor="ctr">
+            <a:spAutoFit/>
+          </a:bodyPr>
+          <a:lstStyle/>
+          <a:p>
+            <a:pPr algn="ctr">
+              <a:lnSpc>
+                <a:spcPct val="100000"/>
+              </a:lnSpc>
+            </a:pPr>
+            <a:r>
+              <a:rPr sz="800" b="0">
+                <a:solidFill>
+                  <a:srgbClr val="94A3B8"/>
+                </a:solidFill>
+                <a:latin typeface="Microsoft YaHei"/>
+              </a:rPr>
+              <a:t>↓</a:t>
+            </a:r>
+          </a:p>
+        </p:txBody>
+      </p:sp>
+      <p:sp>
+        <p:nvSpPr>
+          <p:cNvPr id="33" name="Rounded Rectangle 32"/>
+          <p:cNvSpPr/>
+          <p:nvPr/>
+        </p:nvSpPr>
+        <p:spPr>
+          <a:xfrm>
+            <a:off x="6217920" y="2860548"/>
+            <a:ext cx="5532120" cy="305943"/>
+          </a:xfrm>
+          <a:prstGeom prst="roundRect">
+            <a:avLst>
+              <a:gd name="adj" fmla="val 12000"/>
+            </a:avLst>
+          </a:prstGeom>
+          <a:solidFill>
+            <a:srgbClr val="2563EB"/>
+          </a:solidFill>
+          <a:ln>
+            <a:noFill/>
+          </a:ln>
+          <a:effectLst/>
+        </p:spPr>
+        <p:style>
+          <a:lnRef idx="1">
+            <a:schemeClr val="accent1"/>
+          </a:lnRef>
+          <a:fillRef idx="3">
+            <a:schemeClr val="accent1"/>
+          </a:fillRef>
+          <a:effectRef idx="2">
+            <a:schemeClr val="accent1"/>
+          </a:effectRef>
+          <a:fontRef idx="minor">
+            <a:schemeClr val="lt1"/>
+          </a:fontRef>
+        </p:style>
+        <p:txBody>
+          <a:bodyPr wrap="square" lIns="54864" tIns="9144" rIns="54864" bIns="9144" rtlCol="0" anchor="ctr"/>
+          <a:lstStyle/>
+          <a:p>
+            <a:pPr algn="ctr">
+              <a:lnSpc>
+                <a:spcPct val="100000"/>
+              </a:lnSpc>
+            </a:pPr>
+            <a:r>
+              <a:rPr sz="950" b="1">
+                <a:solidFill>
+                  <a:srgbClr val="FFFFFF"/>
+                </a:solidFill>
+                <a:latin typeface="Consolas"/>
+              </a:rPr>
+              <a:t>unquantized_gemm (qkv_proj)</a:t>
+            </a:r>
+          </a:p>
+          <a:p>
+            <a:pPr algn="ctr">
+              <a:lnSpc>
+                <a:spcPct val="100000"/>
+              </a:lnSpc>
+            </a:pPr>
+            <a:r>
+              <a:rPr sz="700" b="0">
+                <a:solidFill>
+                  <a:srgbClr val="FFFFFF"/>
+                </a:solidFill>
+                <a:latin typeface="Consolas"/>
+              </a:rPr>
+              <a:t>[T, 2048] × [2048, 2560] → [T, 2560]</a:t>
+            </a:r>
+          </a:p>
+        </p:txBody>
+      </p:sp>
+      <p:sp>
+        <p:nvSpPr>
+          <p:cNvPr id="34" name="TextBox 33"/>
+          <p:cNvSpPr txBox="1"/>
+          <p:nvPr/>
+        </p:nvSpPr>
+        <p:spPr>
+          <a:xfrm>
+            <a:off x="6217920" y="3166491"/>
+            <a:ext cx="5532120" cy="77724"/>
+          </a:xfrm>
+          <a:prstGeom prst="rect">
+            <a:avLst/>
+          </a:prstGeom>
+          <a:noFill/>
+        </p:spPr>
+        <p:txBody>
+          <a:bodyPr wrap="square" lIns="0" tIns="9144" rIns="0" bIns="9144" anchor="ctr">
+            <a:spAutoFit/>
+          </a:bodyPr>
+          <a:lstStyle/>
+          <a:p>
+            <a:pPr algn="ctr">
+              <a:lnSpc>
+                <a:spcPct val="100000"/>
+              </a:lnSpc>
+            </a:pPr>
+            <a:r>
+              <a:rPr sz="800" b="0">
+                <a:solidFill>
+                  <a:srgbClr val="94A3B8"/>
+                </a:solidFill>
+                <a:latin typeface="Microsoft YaHei"/>
+              </a:rPr>
+              <a:t>↓</a:t>
+            </a:r>
+          </a:p>
+        </p:txBody>
+      </p:sp>
+      <p:sp>
+        <p:nvSpPr>
+          <p:cNvPr id="35" name="Rounded Rectangle 34"/>
+          <p:cNvSpPr/>
+          <p:nvPr/>
+        </p:nvSpPr>
+        <p:spPr>
+          <a:xfrm>
+            <a:off x="6217920" y="3244215"/>
+            <a:ext cx="5532120" cy="305943"/>
           </a:xfrm>
           <a:prstGeom prst="roundRect">
             <a:avLst>
@@ -12250,14 +10453,14 @@
       </p:sp>
       <p:sp>
         <p:nvSpPr>
-          <p:cNvPr id="16" name="TextBox 15"/>
+          <p:cNvPr id="36" name="TextBox 35"/>
           <p:cNvSpPr txBox="1"/>
           <p:nvPr/>
         </p:nvSpPr>
         <p:spPr>
           <a:xfrm>
-            <a:off x="3063240" y="3550158"/>
-            <a:ext cx="6080760" cy="77724"/>
+            <a:off x="6217920" y="3550158"/>
+            <a:ext cx="5532120" cy="77724"/>
           </a:xfrm>
           <a:prstGeom prst="rect">
             <a:avLst/>
@@ -12289,14 +10492,14 @@
       </p:sp>
       <p:sp>
         <p:nvSpPr>
-          <p:cNvPr id="17" name="Rounded Rectangle 16"/>
+          <p:cNvPr id="37" name="Rounded Rectangle 36"/>
           <p:cNvSpPr/>
           <p:nvPr/>
         </p:nvSpPr>
         <p:spPr>
           <a:xfrm>
-            <a:off x="3063240" y="3627882"/>
-            <a:ext cx="6080760" cy="305943"/>
+            <a:off x="6217920" y="3627882"/>
+            <a:ext cx="5532120" cy="305943"/>
           </a:xfrm>
           <a:prstGeom prst="roundRect">
             <a:avLst>
@@ -12364,14 +10567,14 @@
       </p:sp>
       <p:sp>
         <p:nvSpPr>
-          <p:cNvPr id="18" name="TextBox 17"/>
+          <p:cNvPr id="38" name="TextBox 37"/>
           <p:cNvSpPr txBox="1"/>
           <p:nvPr/>
         </p:nvSpPr>
         <p:spPr>
           <a:xfrm>
-            <a:off x="3063240" y="3933825"/>
-            <a:ext cx="6080760" cy="77724"/>
+            <a:off x="6217920" y="3933825"/>
+            <a:ext cx="5532120" cy="77724"/>
           </a:xfrm>
           <a:prstGeom prst="rect">
             <a:avLst/>
@@ -12403,14 +10606,14 @@
       </p:sp>
       <p:sp>
         <p:nvSpPr>
-          <p:cNvPr id="19" name="Rounded Rectangle 18"/>
+          <p:cNvPr id="39" name="Rounded Rectangle 38"/>
           <p:cNvSpPr/>
           <p:nvPr/>
         </p:nvSpPr>
         <p:spPr>
           <a:xfrm>
-            <a:off x="3063240" y="4011549"/>
-            <a:ext cx="6080760" cy="305943"/>
+            <a:off x="6217920" y="4011549"/>
+            <a:ext cx="5532120" cy="305943"/>
           </a:xfrm>
           <a:prstGeom prst="roundRect">
             <a:avLst>
@@ -12473,19 +10676,28 @@
               </a:rPr>
               <a:t>[T, 2048] → [T/2, 2048]</a:t>
             </a:r>
-          </a:p>
-        </p:txBody>
-      </p:sp>
-      <p:sp>
-        <p:nvSpPr>
-          <p:cNvPr id="20" name="TextBox 19"/>
+            <a:r>
+              <a:rPr sz="700" b="0">
+                <a:solidFill>
+                  <a:srgbClr val="FFFFFF"/>
+                </a:solidFill>
+                <a:latin typeface="Microsoft YaHei"/>
+              </a:rPr>
+              <a:t>  ·  SP pass 替换点 ①：o_proj 后的 all_reduce</a:t>
+            </a:r>
+          </a:p>
+        </p:txBody>
+      </p:sp>
+      <p:sp>
+        <p:nvSpPr>
+          <p:cNvPr id="40" name="TextBox 39"/>
           <p:cNvSpPr txBox="1"/>
           <p:nvPr/>
         </p:nvSpPr>
         <p:spPr>
           <a:xfrm>
-            <a:off x="3063240" y="4317492"/>
-            <a:ext cx="6080760" cy="77724"/>
+            <a:off x="6217920" y="4317492"/>
+            <a:ext cx="5532120" cy="77724"/>
           </a:xfrm>
           <a:prstGeom prst="rect">
             <a:avLst/>
@@ -12517,14 +10729,14 @@
       </p:sp>
       <p:sp>
         <p:nvSpPr>
-          <p:cNvPr id="21" name="Rounded Rectangle 20"/>
+          <p:cNvPr id="41" name="Rounded Rectangle 40"/>
           <p:cNvSpPr/>
           <p:nvPr/>
         </p:nvSpPr>
         <p:spPr>
           <a:xfrm>
-            <a:off x="3063240" y="4395216"/>
-            <a:ext cx="6080760" cy="305943"/>
+            <a:off x="6217920" y="4395216"/>
+            <a:ext cx="5532120" cy="305943"/>
           </a:xfrm>
           <a:prstGeom prst="roundRect">
             <a:avLst>
@@ -12592,14 +10804,14 @@
       </p:sp>
       <p:sp>
         <p:nvSpPr>
-          <p:cNvPr id="22" name="TextBox 21"/>
+          <p:cNvPr id="42" name="TextBox 41"/>
           <p:cNvSpPr txBox="1"/>
           <p:nvPr/>
         </p:nvSpPr>
         <p:spPr>
           <a:xfrm>
-            <a:off x="3063240" y="4701159"/>
-            <a:ext cx="6080760" cy="77724"/>
+            <a:off x="6217920" y="4701159"/>
+            <a:ext cx="5532120" cy="77724"/>
           </a:xfrm>
           <a:prstGeom prst="rect">
             <a:avLst/>
@@ -12631,14 +10843,14 @@
       </p:sp>
       <p:sp>
         <p:nvSpPr>
-          <p:cNvPr id="23" name="Rounded Rectangle 22"/>
+          <p:cNvPr id="43" name="Rounded Rectangle 42"/>
           <p:cNvSpPr/>
           <p:nvPr/>
         </p:nvSpPr>
         <p:spPr>
           <a:xfrm>
-            <a:off x="3063240" y="4778883"/>
-            <a:ext cx="6080760" cy="305943"/>
+            <a:off x="6217920" y="4778883"/>
+            <a:ext cx="5532120" cy="305943"/>
           </a:xfrm>
           <a:prstGeom prst="roundRect">
             <a:avLst>
@@ -12708,21 +10920,21 @@
                 </a:solidFill>
                 <a:latin typeface="Microsoft YaHei"/>
               </a:rPr>
-              <a:t>  ·  充当 expert dispatch</a:t>
-            </a:r>
-          </a:p>
-        </p:txBody>
-      </p:sp>
-      <p:sp>
-        <p:nvSpPr>
-          <p:cNvPr id="24" name="TextBox 23"/>
+              <a:t>  ·  MoE 要求完整 tensor 输入</a:t>
+            </a:r>
+          </a:p>
+        </p:txBody>
+      </p:sp>
+      <p:sp>
+        <p:nvSpPr>
+          <p:cNvPr id="44" name="TextBox 43"/>
           <p:cNvSpPr txBox="1"/>
           <p:nvPr/>
         </p:nvSpPr>
         <p:spPr>
           <a:xfrm>
-            <a:off x="3063240" y="5084826"/>
-            <a:ext cx="6080760" cy="77724"/>
+            <a:off x="6217920" y="5084826"/>
+            <a:ext cx="5532120" cy="77724"/>
           </a:xfrm>
           <a:prstGeom prst="rect">
             <a:avLst/>
@@ -12754,14 +10966,14 @@
       </p:sp>
       <p:sp>
         <p:nvSpPr>
-          <p:cNvPr id="25" name="Rounded Rectangle 24"/>
+          <p:cNvPr id="45" name="Rounded Rectangle 44"/>
           <p:cNvSpPr/>
           <p:nvPr/>
         </p:nvSpPr>
         <p:spPr>
           <a:xfrm>
-            <a:off x="3063240" y="5162550"/>
-            <a:ext cx="6080760" cy="305943"/>
+            <a:off x="6217920" y="5162550"/>
+            <a:ext cx="5532120" cy="305943"/>
           </a:xfrm>
           <a:prstGeom prst="roundRect">
             <a:avLst>
@@ -12829,14 +11041,14 @@
       </p:sp>
       <p:sp>
         <p:nvSpPr>
-          <p:cNvPr id="26" name="TextBox 25"/>
+          <p:cNvPr id="46" name="TextBox 45"/>
           <p:cNvSpPr txBox="1"/>
           <p:nvPr/>
         </p:nvSpPr>
         <p:spPr>
           <a:xfrm>
-            <a:off x="3063240" y="5468493"/>
-            <a:ext cx="6080760" cy="77724"/>
+            <a:off x="6217920" y="5468493"/>
+            <a:ext cx="5532120" cy="77724"/>
           </a:xfrm>
           <a:prstGeom prst="rect">
             <a:avLst/>
@@ -12868,14 +11080,14 @@
       </p:sp>
       <p:sp>
         <p:nvSpPr>
-          <p:cNvPr id="27" name="Rounded Rectangle 26"/>
+          <p:cNvPr id="47" name="Rounded Rectangle 46"/>
           <p:cNvSpPr/>
           <p:nvPr/>
         </p:nvSpPr>
         <p:spPr>
           <a:xfrm>
-            <a:off x="3063240" y="5546217"/>
-            <a:ext cx="6080760" cy="305943"/>
+            <a:off x="6217920" y="5546217"/>
+            <a:ext cx="5532120" cy="305943"/>
           </a:xfrm>
           <a:prstGeom prst="roundRect">
             <a:avLst>
@@ -12945,14 +11157,14 @@
                 </a:solidFill>
                 <a:latin typeface="Microsoft YaHei"/>
               </a:rPr>
-              <a:t>  ·  无 all2all；expert 按 TP 切分（intermediate 768 → 384/rank）</a:t>
-            </a:r>
-          </a:p>
-        </p:txBody>
-      </p:sp>
-      <p:sp>
-        <p:nvSpPr>
-          <p:cNvPr id="28" name="Rounded Rectangle 27"/>
+              <a:t>  ·  输入输出均为完整 tensor</a:t>
+            </a:r>
+          </a:p>
+        </p:txBody>
+      </p:sp>
+      <p:sp>
+        <p:nvSpPr>
+          <p:cNvPr id="48" name="Rounded Rectangle 47"/>
           <p:cNvSpPr/>
           <p:nvPr/>
         </p:nvSpPr>
@@ -13000,7 +11212,7 @@
               </a:lnSpc>
             </a:pPr>
             <a:r>
-              <a:rPr sz="1050" b="1">
+              <a:rPr sz="950" b="1">
                 <a:solidFill>
                   <a:srgbClr val="1E293B"/>
                 </a:solidFill>
@@ -13009,13 +11221,13 @@
               <a:t>• </a:t>
             </a:r>
             <a:r>
-              <a:rPr sz="950" b="0">
+              <a:rPr sz="1050" b="0">
                 <a:solidFill>
                   <a:srgbClr val="1E293B"/>
                 </a:solidFill>
                 <a:latin typeface="Microsoft YaHei"/>
               </a:rPr>
-              <a:t>MoE 内部无 all2all：expert 权重按 TP 切分（moe_intermediate 768 → 384/rank），输入输出均为 [T, 2048] 完整 tensor。</a:t>
+              <a:t>两处 all_reduce（o_proj 后、MoE 后的 maybe_all_reduce）都被拆成 reduce_scatter + all_gather，中间 norm 在 [T/2, 2048] 分片上算。</a:t>
             </a:r>
           </a:p>
           <a:p>
@@ -13025,7 +11237,7 @@
               </a:lnSpc>
             </a:pPr>
             <a:r>
-              <a:rPr sz="1050" b="1">
+              <a:rPr sz="950" b="1">
                 <a:solidFill>
                   <a:srgbClr val="1E293B"/>
                 </a:solidFill>
@@ -13034,49 +11246,13 @@
               <a:t>• </a:t>
             </a:r>
             <a:r>
-              <a:rPr sz="950" b="0">
+              <a:rPr sz="1050" b="0">
                 <a:solidFill>
                   <a:srgbClr val="1E293B"/>
                 </a:solidFill>
                 <a:latin typeface="Microsoft YaHei"/>
               </a:rPr>
-              <a:t>MoE 前的 all_gather 实际充当 expert </a:t>
-            </a:r>
-            <a:r>
-              <a:rPr sz="950" b="1">
-                <a:solidFill>
-                  <a:srgbClr val="1E293B"/>
-                </a:solidFill>
-                <a:latin typeface="Microsoft YaHei"/>
-              </a:rPr>
-              <a:t>dispatch</a:t>
-            </a:r>
-            <a:r>
-              <a:rPr sz="950" b="0">
-                <a:solidFill>
-                  <a:srgbClr val="1E293B"/>
-                </a:solidFill>
-                <a:latin typeface="Microsoft YaHei"/>
-              </a:rPr>
-              <a:t>，MoE 后的 reduce_scatter + all_gather 充当 </a:t>
-            </a:r>
-            <a:r>
-              <a:rPr sz="950" b="1">
-                <a:solidFill>
-                  <a:srgbClr val="1E293B"/>
-                </a:solidFill>
-                <a:latin typeface="Microsoft YaHei"/>
-              </a:rPr>
-              <a:t>combine</a:t>
-            </a:r>
-            <a:r>
-              <a:rPr sz="950" b="0">
-                <a:solidFill>
-                  <a:srgbClr val="1E293B"/>
-                </a:solidFill>
-                <a:latin typeface="Microsoft YaHei"/>
-              </a:rPr>
-              <a:t>。</a:t>
+              <a:t>MoE 入口前必须 all_gather 回 [T, 2048]：该模式 fused MoE 要求完整 tensor。通信量不减（all_reduce ≈ RS+AG），收益在 norm 计算减半与通信/计算重叠。</a:t>
             </a:r>
           </a:p>
         </p:txBody>
@@ -13090,6 +11266,1658 @@
 </file>
 
 <file path=ppt/slides/slide5.xml><?xml version="1.0" encoding="utf-8"?>
+<p:sld xmlns:a="http://schemas.openxmlformats.org/drawingml/2006/main" xmlns:r="http://schemas.openxmlformats.org/officeDocument/2006/relationships" xmlns:p="http://schemas.openxmlformats.org/presentationml/2006/main">
+  <p:cSld>
+    <p:spTree>
+      <p:nvGrpSpPr>
+        <p:cNvPr id="1" name=""/>
+        <p:cNvGrpSpPr/>
+        <p:nvPr/>
+      </p:nvGrpSpPr>
+      <p:grpSpPr>
+        <a:xfrm>
+          <a:off x="0" y="0"/>
+          <a:ext cx="0" cy="0"/>
+          <a:chOff x="0" y="0"/>
+          <a:chExt cx="0" cy="0"/>
+        </a:xfrm>
+      </p:grpSpPr>
+      <p:sp>
+        <p:nvSpPr>
+          <p:cNvPr id="2" name="TextBox 1"/>
+          <p:cNvSpPr txBox="1"/>
+          <p:nvPr/>
+        </p:nvSpPr>
+        <p:spPr>
+          <a:xfrm>
+            <a:off x="457200" y="201168"/>
+            <a:ext cx="11247120" cy="411480"/>
+          </a:xfrm>
+          <a:prstGeom prst="rect">
+            <a:avLst/>
+          </a:prstGeom>
+          <a:noFill/>
+        </p:spPr>
+        <p:txBody>
+          <a:bodyPr wrap="square" lIns="0" tIns="9144" rIns="0" bIns="9144" anchor="t">
+            <a:spAutoFit/>
+          </a:bodyPr>
+          <a:lstStyle/>
+          <a:p>
+            <a:pPr algn="l">
+              <a:lnSpc>
+                <a:spcPct val="100000"/>
+              </a:lnSpc>
+            </a:pPr>
+            <a:r>
+              <a:rPr sz="2000" b="1">
+                <a:solidFill>
+                  <a:srgbClr val="1E293B"/>
+                </a:solidFill>
+                <a:latin typeface="Microsoft YaHei"/>
+              </a:rPr>
+              <a:t>③ TP 模式，EP off（TP=2）</a:t>
+            </a:r>
+          </a:p>
+        </p:txBody>
+      </p:sp>
+      <p:sp>
+        <p:nvSpPr>
+          <p:cNvPr id="3" name="TextBox 2"/>
+          <p:cNvSpPr txBox="1"/>
+          <p:nvPr/>
+        </p:nvSpPr>
+        <p:spPr>
+          <a:xfrm>
+            <a:off x="457200" y="621792"/>
+            <a:ext cx="11247120" cy="292608"/>
+          </a:xfrm>
+          <a:prstGeom prst="rect">
+            <a:avLst/>
+          </a:prstGeom>
+          <a:noFill/>
+        </p:spPr>
+        <p:txBody>
+          <a:bodyPr wrap="square" lIns="0" tIns="9144" rIns="0" bIns="9144" anchor="t">
+            <a:spAutoFit/>
+          </a:bodyPr>
+          <a:lstStyle/>
+          <a:p>
+            <a:pPr algn="l">
+              <a:lnSpc>
+                <a:spcPct val="100000"/>
+              </a:lnSpc>
+            </a:pPr>
+            <a:r>
+              <a:rPr sz="1000" b="0">
+                <a:solidFill>
+                  <a:srgbClr val="64748B"/>
+                </a:solidFill>
+                <a:latin typeface="Microsoft YaHei"/>
+              </a:rPr>
+              <a:t>外部数据流与情况 ② After 完全相同（SP pass ×96）；区别只在 fused MoE 内部。</a:t>
+            </a:r>
+          </a:p>
+        </p:txBody>
+      </p:sp>
+      <p:sp>
+        <p:nvSpPr>
+          <p:cNvPr id="4" name="Rounded Rectangle 3"/>
+          <p:cNvSpPr/>
+          <p:nvPr/>
+        </p:nvSpPr>
+        <p:spPr>
+          <a:xfrm>
+            <a:off x="3063240" y="987552"/>
+            <a:ext cx="6080760" cy="292608"/>
+          </a:xfrm>
+          <a:prstGeom prst="roundRect">
+            <a:avLst>
+              <a:gd name="adj" fmla="val 12000"/>
+            </a:avLst>
+          </a:prstGeom>
+          <a:solidFill>
+            <a:srgbClr val="F1F5F9"/>
+          </a:solidFill>
+          <a:ln>
+            <a:noFill/>
+          </a:ln>
+          <a:effectLst/>
+        </p:spPr>
+        <p:style>
+          <a:lnRef idx="1">
+            <a:schemeClr val="accent1"/>
+          </a:lnRef>
+          <a:fillRef idx="3">
+            <a:schemeClr val="accent1"/>
+          </a:fillRef>
+          <a:effectRef idx="2">
+            <a:schemeClr val="accent1"/>
+          </a:effectRef>
+          <a:fontRef idx="minor">
+            <a:schemeClr val="lt1"/>
+          </a:fontRef>
+        </p:style>
+        <p:txBody>
+          <a:bodyPr wrap="square" lIns="54864" tIns="9144" rIns="54864" bIns="9144" rtlCol="0" anchor="ctr"/>
+          <a:lstStyle/>
+          <a:p>
+            <a:pPr algn="ctr">
+              <a:lnSpc>
+                <a:spcPct val="100000"/>
+              </a:lnSpc>
+            </a:pPr>
+            <a:r>
+              <a:rPr sz="1100" b="1">
+                <a:solidFill>
+                  <a:srgbClr val="1E293B"/>
+                </a:solidFill>
+                <a:latin typeface="Microsoft YaHei"/>
+              </a:rPr>
+              <a:t>After（SP ×96，同情况 ②）</a:t>
+            </a:r>
+          </a:p>
+        </p:txBody>
+      </p:sp>
+      <p:sp>
+        <p:nvSpPr>
+          <p:cNvPr id="5" name="Rounded Rectangle 4"/>
+          <p:cNvSpPr/>
+          <p:nvPr/>
+        </p:nvSpPr>
+        <p:spPr>
+          <a:xfrm>
+            <a:off x="3063240" y="1325880"/>
+            <a:ext cx="6080760" cy="305943"/>
+          </a:xfrm>
+          <a:prstGeom prst="roundRect">
+            <a:avLst>
+              <a:gd name="adj" fmla="val 12000"/>
+            </a:avLst>
+          </a:prstGeom>
+          <a:solidFill>
+            <a:srgbClr val="FFFFFF"/>
+          </a:solidFill>
+          <a:ln w="17780">
+            <a:solidFill>
+              <a:srgbClr val="6B7280"/>
+            </a:solidFill>
+            <a:prstDash val="dash"/>
+          </a:ln>
+          <a:effectLst/>
+        </p:spPr>
+        <p:style>
+          <a:lnRef idx="1">
+            <a:schemeClr val="accent1"/>
+          </a:lnRef>
+          <a:fillRef idx="3">
+            <a:schemeClr val="accent1"/>
+          </a:fillRef>
+          <a:effectRef idx="2">
+            <a:schemeClr val="accent1"/>
+          </a:effectRef>
+          <a:fontRef idx="minor">
+            <a:schemeClr val="lt1"/>
+          </a:fontRef>
+        </p:style>
+        <p:txBody>
+          <a:bodyPr wrap="square" lIns="54864" tIns="9144" rIns="54864" bIns="9144" rtlCol="0" anchor="ctr"/>
+          <a:lstStyle/>
+          <a:p>
+            <a:pPr algn="ctr">
+              <a:lnSpc>
+                <a:spcPct val="100000"/>
+              </a:lnSpc>
+            </a:pPr>
+            <a:r>
+              <a:rPr sz="950" b="1">
+                <a:solidFill>
+                  <a:srgbClr val="334155"/>
+                </a:solidFill>
+                <a:latin typeface="Consolas"/>
+              </a:rPr>
+              <a:t>上一层 MoE 输出（完整 tensor）</a:t>
+            </a:r>
+          </a:p>
+          <a:p>
+            <a:pPr algn="ctr">
+              <a:lnSpc>
+                <a:spcPct val="100000"/>
+              </a:lnSpc>
+            </a:pPr>
+            <a:r>
+              <a:rPr sz="700" b="0">
+                <a:solidFill>
+                  <a:srgbClr val="334155"/>
+                </a:solidFill>
+                <a:latin typeface="Consolas"/>
+              </a:rPr>
+              <a:t>[T, 2048]</a:t>
+            </a:r>
+          </a:p>
+        </p:txBody>
+      </p:sp>
+      <p:sp>
+        <p:nvSpPr>
+          <p:cNvPr id="6" name="TextBox 5"/>
+          <p:cNvSpPr txBox="1"/>
+          <p:nvPr/>
+        </p:nvSpPr>
+        <p:spPr>
+          <a:xfrm>
+            <a:off x="3063240" y="1631823"/>
+            <a:ext cx="6080760" cy="77724"/>
+          </a:xfrm>
+          <a:prstGeom prst="rect">
+            <a:avLst/>
+          </a:prstGeom>
+          <a:noFill/>
+        </p:spPr>
+        <p:txBody>
+          <a:bodyPr wrap="square" lIns="0" tIns="9144" rIns="0" bIns="9144" anchor="ctr">
+            <a:spAutoFit/>
+          </a:bodyPr>
+          <a:lstStyle/>
+          <a:p>
+            <a:pPr algn="ctr">
+              <a:lnSpc>
+                <a:spcPct val="100000"/>
+              </a:lnSpc>
+            </a:pPr>
+            <a:r>
+              <a:rPr sz="800" b="0">
+                <a:solidFill>
+                  <a:srgbClr val="94A3B8"/>
+                </a:solidFill>
+                <a:latin typeface="Microsoft YaHei"/>
+              </a:rPr>
+              <a:t>↓</a:t>
+            </a:r>
+          </a:p>
+        </p:txBody>
+      </p:sp>
+      <p:sp>
+        <p:nvSpPr>
+          <p:cNvPr id="7" name="Rounded Rectangle 6"/>
+          <p:cNvSpPr/>
+          <p:nvPr/>
+        </p:nvSpPr>
+        <p:spPr>
+          <a:xfrm>
+            <a:off x="3063240" y="1709547"/>
+            <a:ext cx="6080760" cy="305943"/>
+          </a:xfrm>
+          <a:prstGeom prst="roundRect">
+            <a:avLst>
+              <a:gd name="adj" fmla="val 12000"/>
+            </a:avLst>
+          </a:prstGeom>
+          <a:solidFill>
+            <a:srgbClr val="D97706"/>
+          </a:solidFill>
+          <a:ln>
+            <a:noFill/>
+          </a:ln>
+          <a:effectLst/>
+        </p:spPr>
+        <p:style>
+          <a:lnRef idx="1">
+            <a:schemeClr val="accent1"/>
+          </a:lnRef>
+          <a:fillRef idx="3">
+            <a:schemeClr val="accent1"/>
+          </a:fillRef>
+          <a:effectRef idx="2">
+            <a:schemeClr val="accent1"/>
+          </a:effectRef>
+          <a:fontRef idx="minor">
+            <a:schemeClr val="lt1"/>
+          </a:fontRef>
+        </p:style>
+        <p:txBody>
+          <a:bodyPr wrap="square" lIns="54864" tIns="9144" rIns="54864" bIns="9144" rtlCol="0" anchor="ctr"/>
+          <a:lstStyle/>
+          <a:p>
+            <a:pPr algn="ctr">
+              <a:lnSpc>
+                <a:spcPct val="100000"/>
+              </a:lnSpc>
+            </a:pPr>
+            <a:r>
+              <a:rPr sz="950" b="1">
+                <a:solidFill>
+                  <a:srgbClr val="FFFFFF"/>
+                </a:solidFill>
+                <a:latin typeface="Consolas"/>
+              </a:rPr>
+              <a:t>reduce_scatter (TP)</a:t>
+            </a:r>
+          </a:p>
+          <a:p>
+            <a:pPr algn="ctr">
+              <a:lnSpc>
+                <a:spcPct val="100000"/>
+              </a:lnSpc>
+            </a:pPr>
+            <a:r>
+              <a:rPr sz="700" b="0">
+                <a:solidFill>
+                  <a:srgbClr val="FFFFFF"/>
+                </a:solidFill>
+                <a:latin typeface="Consolas"/>
+              </a:rPr>
+              <a:t>[T, 2048] → [T/2, 2048]</a:t>
+            </a:r>
+            <a:r>
+              <a:rPr sz="700" b="0">
+                <a:solidFill>
+                  <a:srgbClr val="FFFFFF"/>
+                </a:solidFill>
+                <a:latin typeface="Microsoft YaHei"/>
+              </a:rPr>
+              <a:t>  ·  充当 expert combine 的前半段</a:t>
+            </a:r>
+          </a:p>
+        </p:txBody>
+      </p:sp>
+      <p:sp>
+        <p:nvSpPr>
+          <p:cNvPr id="8" name="TextBox 7"/>
+          <p:cNvSpPr txBox="1"/>
+          <p:nvPr/>
+        </p:nvSpPr>
+        <p:spPr>
+          <a:xfrm>
+            <a:off x="3063240" y="2015490"/>
+            <a:ext cx="6080760" cy="77724"/>
+          </a:xfrm>
+          <a:prstGeom prst="rect">
+            <a:avLst/>
+          </a:prstGeom>
+          <a:noFill/>
+        </p:spPr>
+        <p:txBody>
+          <a:bodyPr wrap="square" lIns="0" tIns="9144" rIns="0" bIns="9144" anchor="ctr">
+            <a:spAutoFit/>
+          </a:bodyPr>
+          <a:lstStyle/>
+          <a:p>
+            <a:pPr algn="ctr">
+              <a:lnSpc>
+                <a:spcPct val="100000"/>
+              </a:lnSpc>
+            </a:pPr>
+            <a:r>
+              <a:rPr sz="800" b="0">
+                <a:solidFill>
+                  <a:srgbClr val="94A3B8"/>
+                </a:solidFill>
+                <a:latin typeface="Microsoft YaHei"/>
+              </a:rPr>
+              <a:t>↓</a:t>
+            </a:r>
+          </a:p>
+        </p:txBody>
+      </p:sp>
+      <p:sp>
+        <p:nvSpPr>
+          <p:cNvPr id="9" name="Rounded Rectangle 8"/>
+          <p:cNvSpPr/>
+          <p:nvPr/>
+        </p:nvSpPr>
+        <p:spPr>
+          <a:xfrm>
+            <a:off x="3063240" y="2093214"/>
+            <a:ext cx="6080760" cy="305943"/>
+          </a:xfrm>
+          <a:prstGeom prst="roundRect">
+            <a:avLst>
+              <a:gd name="adj" fmla="val 12000"/>
+            </a:avLst>
+          </a:prstGeom>
+          <a:solidFill>
+            <a:srgbClr val="059669"/>
+          </a:solidFill>
+          <a:ln>
+            <a:noFill/>
+          </a:ln>
+          <a:effectLst/>
+        </p:spPr>
+        <p:style>
+          <a:lnRef idx="1">
+            <a:schemeClr val="accent1"/>
+          </a:lnRef>
+          <a:fillRef idx="3">
+            <a:schemeClr val="accent1"/>
+          </a:fillRef>
+          <a:effectRef idx="2">
+            <a:schemeClr val="accent1"/>
+          </a:effectRef>
+          <a:fontRef idx="minor">
+            <a:schemeClr val="lt1"/>
+          </a:fontRef>
+        </p:style>
+        <p:txBody>
+          <a:bodyPr wrap="square" lIns="54864" tIns="9144" rIns="54864" bIns="9144" rtlCol="0" anchor="ctr"/>
+          <a:lstStyle/>
+          <a:p>
+            <a:pPr algn="ctr">
+              <a:lnSpc>
+                <a:spcPct val="100000"/>
+              </a:lnSpc>
+            </a:pPr>
+            <a:r>
+              <a:rPr sz="950" b="1">
+                <a:solidFill>
+                  <a:srgbClr val="FFFFFF"/>
+                </a:solidFill>
+                <a:latin typeface="Consolas"/>
+              </a:rPr>
+              <a:t>maybe_chunk_residual + npu_add_rms_norm_bias</a:t>
+            </a:r>
+          </a:p>
+          <a:p>
+            <a:pPr algn="ctr">
+              <a:lnSpc>
+                <a:spcPct val="100000"/>
+              </a:lnSpc>
+            </a:pPr>
+            <a:r>
+              <a:rPr sz="700" b="0">
+                <a:solidFill>
+                  <a:srgbClr val="FFFFFF"/>
+                </a:solidFill>
+                <a:latin typeface="Consolas"/>
+              </a:rPr>
+              <a:t>[T/2, 2048]</a:t>
+            </a:r>
+          </a:p>
+        </p:txBody>
+      </p:sp>
+      <p:sp>
+        <p:nvSpPr>
+          <p:cNvPr id="10" name="TextBox 9"/>
+          <p:cNvSpPr txBox="1"/>
+          <p:nvPr/>
+        </p:nvSpPr>
+        <p:spPr>
+          <a:xfrm>
+            <a:off x="3063240" y="2399157"/>
+            <a:ext cx="6080760" cy="77724"/>
+          </a:xfrm>
+          <a:prstGeom prst="rect">
+            <a:avLst/>
+          </a:prstGeom>
+          <a:noFill/>
+        </p:spPr>
+        <p:txBody>
+          <a:bodyPr wrap="square" lIns="0" tIns="9144" rIns="0" bIns="9144" anchor="ctr">
+            <a:spAutoFit/>
+          </a:bodyPr>
+          <a:lstStyle/>
+          <a:p>
+            <a:pPr algn="ctr">
+              <a:lnSpc>
+                <a:spcPct val="100000"/>
+              </a:lnSpc>
+            </a:pPr>
+            <a:r>
+              <a:rPr sz="800" b="0">
+                <a:solidFill>
+                  <a:srgbClr val="94A3B8"/>
+                </a:solidFill>
+                <a:latin typeface="Microsoft YaHei"/>
+              </a:rPr>
+              <a:t>↓</a:t>
+            </a:r>
+          </a:p>
+        </p:txBody>
+      </p:sp>
+      <p:sp>
+        <p:nvSpPr>
+          <p:cNvPr id="11" name="Rounded Rectangle 10"/>
+          <p:cNvSpPr/>
+          <p:nvPr/>
+        </p:nvSpPr>
+        <p:spPr>
+          <a:xfrm>
+            <a:off x="3063240" y="2476881"/>
+            <a:ext cx="6080760" cy="305943"/>
+          </a:xfrm>
+          <a:prstGeom prst="roundRect">
+            <a:avLst>
+              <a:gd name="adj" fmla="val 12000"/>
+            </a:avLst>
+          </a:prstGeom>
+          <a:solidFill>
+            <a:srgbClr val="D97706"/>
+          </a:solidFill>
+          <a:ln>
+            <a:noFill/>
+          </a:ln>
+          <a:effectLst/>
+        </p:spPr>
+        <p:style>
+          <a:lnRef idx="1">
+            <a:schemeClr val="accent1"/>
+          </a:lnRef>
+          <a:fillRef idx="3">
+            <a:schemeClr val="accent1"/>
+          </a:fillRef>
+          <a:effectRef idx="2">
+            <a:schemeClr val="accent1"/>
+          </a:effectRef>
+          <a:fontRef idx="minor">
+            <a:schemeClr val="lt1"/>
+          </a:fontRef>
+        </p:style>
+        <p:txBody>
+          <a:bodyPr wrap="square" lIns="54864" tIns="9144" rIns="54864" bIns="9144" rtlCol="0" anchor="ctr"/>
+          <a:lstStyle/>
+          <a:p>
+            <a:pPr algn="ctr">
+              <a:lnSpc>
+                <a:spcPct val="100000"/>
+              </a:lnSpc>
+            </a:pPr>
+            <a:r>
+              <a:rPr sz="950" b="1">
+                <a:solidFill>
+                  <a:srgbClr val="FFFFFF"/>
+                </a:solidFill>
+                <a:latin typeface="Consolas"/>
+              </a:rPr>
+              <a:t>all_gather (TP)</a:t>
+            </a:r>
+          </a:p>
+          <a:p>
+            <a:pPr algn="ctr">
+              <a:lnSpc>
+                <a:spcPct val="100000"/>
+              </a:lnSpc>
+            </a:pPr>
+            <a:r>
+              <a:rPr sz="700" b="0">
+                <a:solidFill>
+                  <a:srgbClr val="FFFFFF"/>
+                </a:solidFill>
+                <a:latin typeface="Consolas"/>
+              </a:rPr>
+              <a:t>[T/2, 2048] → [T, 2048]</a:t>
+            </a:r>
+          </a:p>
+        </p:txBody>
+      </p:sp>
+      <p:sp>
+        <p:nvSpPr>
+          <p:cNvPr id="12" name="TextBox 11"/>
+          <p:cNvSpPr txBox="1"/>
+          <p:nvPr/>
+        </p:nvSpPr>
+        <p:spPr>
+          <a:xfrm>
+            <a:off x="3063240" y="2782824"/>
+            <a:ext cx="6080760" cy="77724"/>
+          </a:xfrm>
+          <a:prstGeom prst="rect">
+            <a:avLst/>
+          </a:prstGeom>
+          <a:noFill/>
+        </p:spPr>
+        <p:txBody>
+          <a:bodyPr wrap="square" lIns="0" tIns="9144" rIns="0" bIns="9144" anchor="ctr">
+            <a:spAutoFit/>
+          </a:bodyPr>
+          <a:lstStyle/>
+          <a:p>
+            <a:pPr algn="ctr">
+              <a:lnSpc>
+                <a:spcPct val="100000"/>
+              </a:lnSpc>
+            </a:pPr>
+            <a:r>
+              <a:rPr sz="800" b="0">
+                <a:solidFill>
+                  <a:srgbClr val="94A3B8"/>
+                </a:solidFill>
+                <a:latin typeface="Microsoft YaHei"/>
+              </a:rPr>
+              <a:t>↓</a:t>
+            </a:r>
+          </a:p>
+        </p:txBody>
+      </p:sp>
+      <p:sp>
+        <p:nvSpPr>
+          <p:cNvPr id="13" name="Rounded Rectangle 12"/>
+          <p:cNvSpPr/>
+          <p:nvPr/>
+        </p:nvSpPr>
+        <p:spPr>
+          <a:xfrm>
+            <a:off x="3063240" y="2860548"/>
+            <a:ext cx="6080760" cy="305943"/>
+          </a:xfrm>
+          <a:prstGeom prst="roundRect">
+            <a:avLst>
+              <a:gd name="adj" fmla="val 12000"/>
+            </a:avLst>
+          </a:prstGeom>
+          <a:solidFill>
+            <a:srgbClr val="2563EB"/>
+          </a:solidFill>
+          <a:ln>
+            <a:noFill/>
+          </a:ln>
+          <a:effectLst/>
+        </p:spPr>
+        <p:style>
+          <a:lnRef idx="1">
+            <a:schemeClr val="accent1"/>
+          </a:lnRef>
+          <a:fillRef idx="3">
+            <a:schemeClr val="accent1"/>
+          </a:fillRef>
+          <a:effectRef idx="2">
+            <a:schemeClr val="accent1"/>
+          </a:effectRef>
+          <a:fontRef idx="minor">
+            <a:schemeClr val="lt1"/>
+          </a:fontRef>
+        </p:style>
+        <p:txBody>
+          <a:bodyPr wrap="square" lIns="54864" tIns="9144" rIns="54864" bIns="9144" rtlCol="0" anchor="ctr"/>
+          <a:lstStyle/>
+          <a:p>
+            <a:pPr algn="ctr">
+              <a:lnSpc>
+                <a:spcPct val="100000"/>
+              </a:lnSpc>
+            </a:pPr>
+            <a:r>
+              <a:rPr sz="950" b="1">
+                <a:solidFill>
+                  <a:srgbClr val="FFFFFF"/>
+                </a:solidFill>
+                <a:latin typeface="Consolas"/>
+              </a:rPr>
+              <a:t>unquantized_gemm (qkv_proj)</a:t>
+            </a:r>
+          </a:p>
+          <a:p>
+            <a:pPr algn="ctr">
+              <a:lnSpc>
+                <a:spcPct val="100000"/>
+              </a:lnSpc>
+            </a:pPr>
+            <a:r>
+              <a:rPr sz="700" b="0">
+                <a:solidFill>
+                  <a:srgbClr val="FFFFFF"/>
+                </a:solidFill>
+                <a:latin typeface="Consolas"/>
+              </a:rPr>
+              <a:t>[T, 2048] × [2048, 2560] → [T, 2560]</a:t>
+            </a:r>
+          </a:p>
+        </p:txBody>
+      </p:sp>
+      <p:sp>
+        <p:nvSpPr>
+          <p:cNvPr id="14" name="TextBox 13"/>
+          <p:cNvSpPr txBox="1"/>
+          <p:nvPr/>
+        </p:nvSpPr>
+        <p:spPr>
+          <a:xfrm>
+            <a:off x="3063240" y="3166491"/>
+            <a:ext cx="6080760" cy="77724"/>
+          </a:xfrm>
+          <a:prstGeom prst="rect">
+            <a:avLst/>
+          </a:prstGeom>
+          <a:noFill/>
+        </p:spPr>
+        <p:txBody>
+          <a:bodyPr wrap="square" lIns="0" tIns="9144" rIns="0" bIns="9144" anchor="ctr">
+            <a:spAutoFit/>
+          </a:bodyPr>
+          <a:lstStyle/>
+          <a:p>
+            <a:pPr algn="ctr">
+              <a:lnSpc>
+                <a:spcPct val="100000"/>
+              </a:lnSpc>
+            </a:pPr>
+            <a:r>
+              <a:rPr sz="800" b="0">
+                <a:solidFill>
+                  <a:srgbClr val="94A3B8"/>
+                </a:solidFill>
+                <a:latin typeface="Microsoft YaHei"/>
+              </a:rPr>
+              <a:t>↓</a:t>
+            </a:r>
+          </a:p>
+        </p:txBody>
+      </p:sp>
+      <p:sp>
+        <p:nvSpPr>
+          <p:cNvPr id="15" name="Rounded Rectangle 14"/>
+          <p:cNvSpPr/>
+          <p:nvPr/>
+        </p:nvSpPr>
+        <p:spPr>
+          <a:xfrm>
+            <a:off x="3063240" y="3244215"/>
+            <a:ext cx="6080760" cy="305943"/>
+          </a:xfrm>
+          <a:prstGeom prst="roundRect">
+            <a:avLst>
+              <a:gd name="adj" fmla="val 12000"/>
+            </a:avLst>
+          </a:prstGeom>
+          <a:solidFill>
+            <a:srgbClr val="7C3AED"/>
+          </a:solidFill>
+          <a:ln>
+            <a:noFill/>
+          </a:ln>
+          <a:effectLst/>
+        </p:spPr>
+        <p:style>
+          <a:lnRef idx="1">
+            <a:schemeClr val="accent1"/>
+          </a:lnRef>
+          <a:fillRef idx="3">
+            <a:schemeClr val="accent1"/>
+          </a:fillRef>
+          <a:effectRef idx="2">
+            <a:schemeClr val="accent1"/>
+          </a:effectRef>
+          <a:fontRef idx="minor">
+            <a:schemeClr val="lt1"/>
+          </a:fontRef>
+        </p:style>
+        <p:txBody>
+          <a:bodyPr wrap="square" lIns="54864" tIns="9144" rIns="54864" bIns="9144" rtlCol="0" anchor="ctr"/>
+          <a:lstStyle/>
+          <a:p>
+            <a:pPr algn="ctr">
+              <a:lnSpc>
+                <a:spcPct val="100000"/>
+              </a:lnSpc>
+            </a:pPr>
+            <a:r>
+              <a:rPr sz="950" b="1">
+                <a:solidFill>
+                  <a:srgbClr val="FFFFFF"/>
+                </a:solidFill>
+                <a:latin typeface="Consolas"/>
+              </a:rPr>
+              <a:t>qkv_rmsnorm_rope + unified_attention</a:t>
+            </a:r>
+          </a:p>
+          <a:p>
+            <a:pPr algn="ctr">
+              <a:lnSpc>
+                <a:spcPct val="100000"/>
+              </a:lnSpc>
+            </a:pPr>
+            <a:r>
+              <a:rPr sz="700" b="0">
+                <a:solidFill>
+                  <a:srgbClr val="FFFFFF"/>
+                </a:solidFill>
+                <a:latin typeface="Consolas"/>
+              </a:rPr>
+              <a:t>q [T, 16, 128] / kv [T, 2, 128] → [T, 2048]</a:t>
+            </a:r>
+          </a:p>
+        </p:txBody>
+      </p:sp>
+      <p:sp>
+        <p:nvSpPr>
+          <p:cNvPr id="16" name="TextBox 15"/>
+          <p:cNvSpPr txBox="1"/>
+          <p:nvPr/>
+        </p:nvSpPr>
+        <p:spPr>
+          <a:xfrm>
+            <a:off x="3063240" y="3550158"/>
+            <a:ext cx="6080760" cy="77724"/>
+          </a:xfrm>
+          <a:prstGeom prst="rect">
+            <a:avLst/>
+          </a:prstGeom>
+          <a:noFill/>
+        </p:spPr>
+        <p:txBody>
+          <a:bodyPr wrap="square" lIns="0" tIns="9144" rIns="0" bIns="9144" anchor="ctr">
+            <a:spAutoFit/>
+          </a:bodyPr>
+          <a:lstStyle/>
+          <a:p>
+            <a:pPr algn="ctr">
+              <a:lnSpc>
+                <a:spcPct val="100000"/>
+              </a:lnSpc>
+            </a:pPr>
+            <a:r>
+              <a:rPr sz="800" b="0">
+                <a:solidFill>
+                  <a:srgbClr val="94A3B8"/>
+                </a:solidFill>
+                <a:latin typeface="Microsoft YaHei"/>
+              </a:rPr>
+              <a:t>↓</a:t>
+            </a:r>
+          </a:p>
+        </p:txBody>
+      </p:sp>
+      <p:sp>
+        <p:nvSpPr>
+          <p:cNvPr id="17" name="Rounded Rectangle 16"/>
+          <p:cNvSpPr/>
+          <p:nvPr/>
+        </p:nvSpPr>
+        <p:spPr>
+          <a:xfrm>
+            <a:off x="3063240" y="3627882"/>
+            <a:ext cx="6080760" cy="305943"/>
+          </a:xfrm>
+          <a:prstGeom prst="roundRect">
+            <a:avLst>
+              <a:gd name="adj" fmla="val 12000"/>
+            </a:avLst>
+          </a:prstGeom>
+          <a:solidFill>
+            <a:srgbClr val="2563EB"/>
+          </a:solidFill>
+          <a:ln>
+            <a:noFill/>
+          </a:ln>
+          <a:effectLst/>
+        </p:spPr>
+        <p:style>
+          <a:lnRef idx="1">
+            <a:schemeClr val="accent1"/>
+          </a:lnRef>
+          <a:fillRef idx="3">
+            <a:schemeClr val="accent1"/>
+          </a:fillRef>
+          <a:effectRef idx="2">
+            <a:schemeClr val="accent1"/>
+          </a:effectRef>
+          <a:fontRef idx="minor">
+            <a:schemeClr val="lt1"/>
+          </a:fontRef>
+        </p:style>
+        <p:txBody>
+          <a:bodyPr wrap="square" lIns="54864" tIns="9144" rIns="54864" bIns="9144" rtlCol="0" anchor="ctr"/>
+          <a:lstStyle/>
+          <a:p>
+            <a:pPr algn="ctr">
+              <a:lnSpc>
+                <a:spcPct val="100000"/>
+              </a:lnSpc>
+            </a:pPr>
+            <a:r>
+              <a:rPr sz="950" b="1">
+                <a:solidFill>
+                  <a:srgbClr val="FFFFFF"/>
+                </a:solidFill>
+                <a:latin typeface="Consolas"/>
+              </a:rPr>
+              <a:t>unquantized_gemm (o_proj)</a:t>
+            </a:r>
+          </a:p>
+          <a:p>
+            <a:pPr algn="ctr">
+              <a:lnSpc>
+                <a:spcPct val="100000"/>
+              </a:lnSpc>
+            </a:pPr>
+            <a:r>
+              <a:rPr sz="700" b="0">
+                <a:solidFill>
+                  <a:srgbClr val="FFFFFF"/>
+                </a:solidFill>
+                <a:latin typeface="Consolas"/>
+              </a:rPr>
+              <a:t>[T, 2048] × [2048, 2048] → [T, 2048]</a:t>
+            </a:r>
+          </a:p>
+        </p:txBody>
+      </p:sp>
+      <p:sp>
+        <p:nvSpPr>
+          <p:cNvPr id="18" name="TextBox 17"/>
+          <p:cNvSpPr txBox="1"/>
+          <p:nvPr/>
+        </p:nvSpPr>
+        <p:spPr>
+          <a:xfrm>
+            <a:off x="3063240" y="3933825"/>
+            <a:ext cx="6080760" cy="77724"/>
+          </a:xfrm>
+          <a:prstGeom prst="rect">
+            <a:avLst/>
+          </a:prstGeom>
+          <a:noFill/>
+        </p:spPr>
+        <p:txBody>
+          <a:bodyPr wrap="square" lIns="0" tIns="9144" rIns="0" bIns="9144" anchor="ctr">
+            <a:spAutoFit/>
+          </a:bodyPr>
+          <a:lstStyle/>
+          <a:p>
+            <a:pPr algn="ctr">
+              <a:lnSpc>
+                <a:spcPct val="100000"/>
+              </a:lnSpc>
+            </a:pPr>
+            <a:r>
+              <a:rPr sz="800" b="0">
+                <a:solidFill>
+                  <a:srgbClr val="94A3B8"/>
+                </a:solidFill>
+                <a:latin typeface="Microsoft YaHei"/>
+              </a:rPr>
+              <a:t>↓</a:t>
+            </a:r>
+          </a:p>
+        </p:txBody>
+      </p:sp>
+      <p:sp>
+        <p:nvSpPr>
+          <p:cNvPr id="19" name="Rounded Rectangle 18"/>
+          <p:cNvSpPr/>
+          <p:nvPr/>
+        </p:nvSpPr>
+        <p:spPr>
+          <a:xfrm>
+            <a:off x="3063240" y="4011549"/>
+            <a:ext cx="6080760" cy="305943"/>
+          </a:xfrm>
+          <a:prstGeom prst="roundRect">
+            <a:avLst>
+              <a:gd name="adj" fmla="val 12000"/>
+            </a:avLst>
+          </a:prstGeom>
+          <a:solidFill>
+            <a:srgbClr val="D97706"/>
+          </a:solidFill>
+          <a:ln>
+            <a:noFill/>
+          </a:ln>
+          <a:effectLst/>
+        </p:spPr>
+        <p:style>
+          <a:lnRef idx="1">
+            <a:schemeClr val="accent1"/>
+          </a:lnRef>
+          <a:fillRef idx="3">
+            <a:schemeClr val="accent1"/>
+          </a:fillRef>
+          <a:effectRef idx="2">
+            <a:schemeClr val="accent1"/>
+          </a:effectRef>
+          <a:fontRef idx="minor">
+            <a:schemeClr val="lt1"/>
+          </a:fontRef>
+        </p:style>
+        <p:txBody>
+          <a:bodyPr wrap="square" lIns="54864" tIns="9144" rIns="54864" bIns="9144" rtlCol="0" anchor="ctr"/>
+          <a:lstStyle/>
+          <a:p>
+            <a:pPr algn="ctr">
+              <a:lnSpc>
+                <a:spcPct val="100000"/>
+              </a:lnSpc>
+            </a:pPr>
+            <a:r>
+              <a:rPr sz="950" b="1">
+                <a:solidFill>
+                  <a:srgbClr val="FFFFFF"/>
+                </a:solidFill>
+                <a:latin typeface="Consolas"/>
+              </a:rPr>
+              <a:t>reduce_scatter (TP)</a:t>
+            </a:r>
+          </a:p>
+          <a:p>
+            <a:pPr algn="ctr">
+              <a:lnSpc>
+                <a:spcPct val="100000"/>
+              </a:lnSpc>
+            </a:pPr>
+            <a:r>
+              <a:rPr sz="700" b="0">
+                <a:solidFill>
+                  <a:srgbClr val="FFFFFF"/>
+                </a:solidFill>
+                <a:latin typeface="Consolas"/>
+              </a:rPr>
+              <a:t>[T, 2048] → [T/2, 2048]</a:t>
+            </a:r>
+          </a:p>
+        </p:txBody>
+      </p:sp>
+      <p:sp>
+        <p:nvSpPr>
+          <p:cNvPr id="20" name="TextBox 19"/>
+          <p:cNvSpPr txBox="1"/>
+          <p:nvPr/>
+        </p:nvSpPr>
+        <p:spPr>
+          <a:xfrm>
+            <a:off x="3063240" y="4317492"/>
+            <a:ext cx="6080760" cy="77724"/>
+          </a:xfrm>
+          <a:prstGeom prst="rect">
+            <a:avLst/>
+          </a:prstGeom>
+          <a:noFill/>
+        </p:spPr>
+        <p:txBody>
+          <a:bodyPr wrap="square" lIns="0" tIns="9144" rIns="0" bIns="9144" anchor="ctr">
+            <a:spAutoFit/>
+          </a:bodyPr>
+          <a:lstStyle/>
+          <a:p>
+            <a:pPr algn="ctr">
+              <a:lnSpc>
+                <a:spcPct val="100000"/>
+              </a:lnSpc>
+            </a:pPr>
+            <a:r>
+              <a:rPr sz="800" b="0">
+                <a:solidFill>
+                  <a:srgbClr val="94A3B8"/>
+                </a:solidFill>
+                <a:latin typeface="Microsoft YaHei"/>
+              </a:rPr>
+              <a:t>↓</a:t>
+            </a:r>
+          </a:p>
+        </p:txBody>
+      </p:sp>
+      <p:sp>
+        <p:nvSpPr>
+          <p:cNvPr id="21" name="Rounded Rectangle 20"/>
+          <p:cNvSpPr/>
+          <p:nvPr/>
+        </p:nvSpPr>
+        <p:spPr>
+          <a:xfrm>
+            <a:off x="3063240" y="4395216"/>
+            <a:ext cx="6080760" cy="305943"/>
+          </a:xfrm>
+          <a:prstGeom prst="roundRect">
+            <a:avLst>
+              <a:gd name="adj" fmla="val 12000"/>
+            </a:avLst>
+          </a:prstGeom>
+          <a:solidFill>
+            <a:srgbClr val="059669"/>
+          </a:solidFill>
+          <a:ln>
+            <a:noFill/>
+          </a:ln>
+          <a:effectLst/>
+        </p:spPr>
+        <p:style>
+          <a:lnRef idx="1">
+            <a:schemeClr val="accent1"/>
+          </a:lnRef>
+          <a:fillRef idx="3">
+            <a:schemeClr val="accent1"/>
+          </a:fillRef>
+          <a:effectRef idx="2">
+            <a:schemeClr val="accent1"/>
+          </a:effectRef>
+          <a:fontRef idx="minor">
+            <a:schemeClr val="lt1"/>
+          </a:fontRef>
+        </p:style>
+        <p:txBody>
+          <a:bodyPr wrap="square" lIns="54864" tIns="9144" rIns="54864" bIns="9144" rtlCol="0" anchor="ctr"/>
+          <a:lstStyle/>
+          <a:p>
+            <a:pPr algn="ctr">
+              <a:lnSpc>
+                <a:spcPct val="100000"/>
+              </a:lnSpc>
+            </a:pPr>
+            <a:r>
+              <a:rPr sz="950" b="1">
+                <a:solidFill>
+                  <a:srgbClr val="FFFFFF"/>
+                </a:solidFill>
+                <a:latin typeface="Consolas"/>
+              </a:rPr>
+              <a:t>maybe_chunk_residual + npu_add_rms_norm_bias</a:t>
+            </a:r>
+          </a:p>
+          <a:p>
+            <a:pPr algn="ctr">
+              <a:lnSpc>
+                <a:spcPct val="100000"/>
+              </a:lnSpc>
+            </a:pPr>
+            <a:r>
+              <a:rPr sz="700" b="0">
+                <a:solidFill>
+                  <a:srgbClr val="FFFFFF"/>
+                </a:solidFill>
+                <a:latin typeface="Consolas"/>
+              </a:rPr>
+              <a:t>[T/2, 2048]</a:t>
+            </a:r>
+          </a:p>
+        </p:txBody>
+      </p:sp>
+      <p:sp>
+        <p:nvSpPr>
+          <p:cNvPr id="22" name="TextBox 21"/>
+          <p:cNvSpPr txBox="1"/>
+          <p:nvPr/>
+        </p:nvSpPr>
+        <p:spPr>
+          <a:xfrm>
+            <a:off x="3063240" y="4701159"/>
+            <a:ext cx="6080760" cy="77724"/>
+          </a:xfrm>
+          <a:prstGeom prst="rect">
+            <a:avLst/>
+          </a:prstGeom>
+          <a:noFill/>
+        </p:spPr>
+        <p:txBody>
+          <a:bodyPr wrap="square" lIns="0" tIns="9144" rIns="0" bIns="9144" anchor="ctr">
+            <a:spAutoFit/>
+          </a:bodyPr>
+          <a:lstStyle/>
+          <a:p>
+            <a:pPr algn="ctr">
+              <a:lnSpc>
+                <a:spcPct val="100000"/>
+              </a:lnSpc>
+            </a:pPr>
+            <a:r>
+              <a:rPr sz="800" b="0">
+                <a:solidFill>
+                  <a:srgbClr val="94A3B8"/>
+                </a:solidFill>
+                <a:latin typeface="Microsoft YaHei"/>
+              </a:rPr>
+              <a:t>↓</a:t>
+            </a:r>
+          </a:p>
+        </p:txBody>
+      </p:sp>
+      <p:sp>
+        <p:nvSpPr>
+          <p:cNvPr id="23" name="Rounded Rectangle 22"/>
+          <p:cNvSpPr/>
+          <p:nvPr/>
+        </p:nvSpPr>
+        <p:spPr>
+          <a:xfrm>
+            <a:off x="3063240" y="4778883"/>
+            <a:ext cx="6080760" cy="305943"/>
+          </a:xfrm>
+          <a:prstGeom prst="roundRect">
+            <a:avLst>
+              <a:gd name="adj" fmla="val 12000"/>
+            </a:avLst>
+          </a:prstGeom>
+          <a:solidFill>
+            <a:srgbClr val="D97706"/>
+          </a:solidFill>
+          <a:ln>
+            <a:noFill/>
+          </a:ln>
+          <a:effectLst/>
+        </p:spPr>
+        <p:style>
+          <a:lnRef idx="1">
+            <a:schemeClr val="accent1"/>
+          </a:lnRef>
+          <a:fillRef idx="3">
+            <a:schemeClr val="accent1"/>
+          </a:fillRef>
+          <a:effectRef idx="2">
+            <a:schemeClr val="accent1"/>
+          </a:effectRef>
+          <a:fontRef idx="minor">
+            <a:schemeClr val="lt1"/>
+          </a:fontRef>
+        </p:style>
+        <p:txBody>
+          <a:bodyPr wrap="square" lIns="54864" tIns="9144" rIns="54864" bIns="9144" rtlCol="0" anchor="ctr"/>
+          <a:lstStyle/>
+          <a:p>
+            <a:pPr algn="ctr">
+              <a:lnSpc>
+                <a:spcPct val="100000"/>
+              </a:lnSpc>
+            </a:pPr>
+            <a:r>
+              <a:rPr sz="950" b="1">
+                <a:solidFill>
+                  <a:srgbClr val="FFFFFF"/>
+                </a:solidFill>
+                <a:latin typeface="Consolas"/>
+              </a:rPr>
+              <a:t>all_gather (TP)</a:t>
+            </a:r>
+          </a:p>
+          <a:p>
+            <a:pPr algn="ctr">
+              <a:lnSpc>
+                <a:spcPct val="100000"/>
+              </a:lnSpc>
+            </a:pPr>
+            <a:r>
+              <a:rPr sz="700" b="0">
+                <a:solidFill>
+                  <a:srgbClr val="FFFFFF"/>
+                </a:solidFill>
+                <a:latin typeface="Consolas"/>
+              </a:rPr>
+              <a:t>[T/2, 2048] → [T, 2048]</a:t>
+            </a:r>
+            <a:r>
+              <a:rPr sz="700" b="0">
+                <a:solidFill>
+                  <a:srgbClr val="FFFFFF"/>
+                </a:solidFill>
+                <a:latin typeface="Microsoft YaHei"/>
+              </a:rPr>
+              <a:t>  ·  充当 expert dispatch</a:t>
+            </a:r>
+          </a:p>
+        </p:txBody>
+      </p:sp>
+      <p:sp>
+        <p:nvSpPr>
+          <p:cNvPr id="24" name="TextBox 23"/>
+          <p:cNvSpPr txBox="1"/>
+          <p:nvPr/>
+        </p:nvSpPr>
+        <p:spPr>
+          <a:xfrm>
+            <a:off x="3063240" y="5084826"/>
+            <a:ext cx="6080760" cy="77724"/>
+          </a:xfrm>
+          <a:prstGeom prst="rect">
+            <a:avLst/>
+          </a:prstGeom>
+          <a:noFill/>
+        </p:spPr>
+        <p:txBody>
+          <a:bodyPr wrap="square" lIns="0" tIns="9144" rIns="0" bIns="9144" anchor="ctr">
+            <a:spAutoFit/>
+          </a:bodyPr>
+          <a:lstStyle/>
+          <a:p>
+            <a:pPr algn="ctr">
+              <a:lnSpc>
+                <a:spcPct val="100000"/>
+              </a:lnSpc>
+            </a:pPr>
+            <a:r>
+              <a:rPr sz="800" b="0">
+                <a:solidFill>
+                  <a:srgbClr val="94A3B8"/>
+                </a:solidFill>
+                <a:latin typeface="Microsoft YaHei"/>
+              </a:rPr>
+              <a:t>↓</a:t>
+            </a:r>
+          </a:p>
+        </p:txBody>
+      </p:sp>
+      <p:sp>
+        <p:nvSpPr>
+          <p:cNvPr id="25" name="Rounded Rectangle 24"/>
+          <p:cNvSpPr/>
+          <p:nvPr/>
+        </p:nvSpPr>
+        <p:spPr>
+          <a:xfrm>
+            <a:off x="3063240" y="5162550"/>
+            <a:ext cx="6080760" cy="305943"/>
+          </a:xfrm>
+          <a:prstGeom prst="roundRect">
+            <a:avLst>
+              <a:gd name="adj" fmla="val 12000"/>
+            </a:avLst>
+          </a:prstGeom>
+          <a:solidFill>
+            <a:srgbClr val="2563EB"/>
+          </a:solidFill>
+          <a:ln>
+            <a:noFill/>
+          </a:ln>
+          <a:effectLst/>
+        </p:spPr>
+        <p:style>
+          <a:lnRef idx="1">
+            <a:schemeClr val="accent1"/>
+          </a:lnRef>
+          <a:fillRef idx="3">
+            <a:schemeClr val="accent1"/>
+          </a:fillRef>
+          <a:effectRef idx="2">
+            <a:schemeClr val="accent1"/>
+          </a:effectRef>
+          <a:fontRef idx="minor">
+            <a:schemeClr val="lt1"/>
+          </a:fontRef>
+        </p:style>
+        <p:txBody>
+          <a:bodyPr wrap="square" lIns="54864" tIns="9144" rIns="54864" bIns="9144" rtlCol="0" anchor="ctr"/>
+          <a:lstStyle/>
+          <a:p>
+            <a:pPr algn="ctr">
+              <a:lnSpc>
+                <a:spcPct val="100000"/>
+              </a:lnSpc>
+            </a:pPr>
+            <a:r>
+              <a:rPr sz="950" b="1">
+                <a:solidFill>
+                  <a:srgbClr val="FFFFFF"/>
+                </a:solidFill>
+                <a:latin typeface="Consolas"/>
+              </a:rPr>
+              <a:t>unquantized_gemm (gate / router)</a:t>
+            </a:r>
+          </a:p>
+          <a:p>
+            <a:pPr algn="ctr">
+              <a:lnSpc>
+                <a:spcPct val="100000"/>
+              </a:lnSpc>
+            </a:pPr>
+            <a:r>
+              <a:rPr sz="700" b="0">
+                <a:solidFill>
+                  <a:srgbClr val="FFFFFF"/>
+                </a:solidFill>
+                <a:latin typeface="Consolas"/>
+              </a:rPr>
+              <a:t>[T, 2048] × [2048, 128] → [T, 128]</a:t>
+            </a:r>
+          </a:p>
+        </p:txBody>
+      </p:sp>
+      <p:sp>
+        <p:nvSpPr>
+          <p:cNvPr id="26" name="TextBox 25"/>
+          <p:cNvSpPr txBox="1"/>
+          <p:nvPr/>
+        </p:nvSpPr>
+        <p:spPr>
+          <a:xfrm>
+            <a:off x="3063240" y="5468493"/>
+            <a:ext cx="6080760" cy="77724"/>
+          </a:xfrm>
+          <a:prstGeom prst="rect">
+            <a:avLst/>
+          </a:prstGeom>
+          <a:noFill/>
+        </p:spPr>
+        <p:txBody>
+          <a:bodyPr wrap="square" lIns="0" tIns="9144" rIns="0" bIns="9144" anchor="ctr">
+            <a:spAutoFit/>
+          </a:bodyPr>
+          <a:lstStyle/>
+          <a:p>
+            <a:pPr algn="ctr">
+              <a:lnSpc>
+                <a:spcPct val="100000"/>
+              </a:lnSpc>
+            </a:pPr>
+            <a:r>
+              <a:rPr sz="800" b="0">
+                <a:solidFill>
+                  <a:srgbClr val="94A3B8"/>
+                </a:solidFill>
+                <a:latin typeface="Microsoft YaHei"/>
+              </a:rPr>
+              <a:t>↓</a:t>
+            </a:r>
+          </a:p>
+        </p:txBody>
+      </p:sp>
+      <p:sp>
+        <p:nvSpPr>
+          <p:cNvPr id="27" name="Rounded Rectangle 26"/>
+          <p:cNvSpPr/>
+          <p:nvPr/>
+        </p:nvSpPr>
+        <p:spPr>
+          <a:xfrm>
+            <a:off x="3063240" y="5546217"/>
+            <a:ext cx="6080760" cy="305943"/>
+          </a:xfrm>
+          <a:prstGeom prst="roundRect">
+            <a:avLst>
+              <a:gd name="adj" fmla="val 12000"/>
+            </a:avLst>
+          </a:prstGeom>
+          <a:solidFill>
+            <a:srgbClr val="DC2626"/>
+          </a:solidFill>
+          <a:ln>
+            <a:noFill/>
+          </a:ln>
+          <a:effectLst/>
+        </p:spPr>
+        <p:style>
+          <a:lnRef idx="1">
+            <a:schemeClr val="accent1"/>
+          </a:lnRef>
+          <a:fillRef idx="3">
+            <a:schemeClr val="accent1"/>
+          </a:fillRef>
+          <a:effectRef idx="2">
+            <a:schemeClr val="accent1"/>
+          </a:effectRef>
+          <a:fontRef idx="minor">
+            <a:schemeClr val="lt1"/>
+          </a:fontRef>
+        </p:style>
+        <p:txBody>
+          <a:bodyPr wrap="square" lIns="54864" tIns="9144" rIns="54864" bIns="9144" rtlCol="0" anchor="ctr"/>
+          <a:lstStyle/>
+          <a:p>
+            <a:pPr algn="ctr">
+              <a:lnSpc>
+                <a:spcPct val="100000"/>
+              </a:lnSpc>
+            </a:pPr>
+            <a:r>
+              <a:rPr sz="950" b="1">
+                <a:solidFill>
+                  <a:srgbClr val="FFFFFF"/>
+                </a:solidFill>
+                <a:latin typeface="Consolas"/>
+              </a:rPr>
+              <a:t>moe_forward</a:t>
+            </a:r>
+          </a:p>
+          <a:p>
+            <a:pPr algn="ctr">
+              <a:lnSpc>
+                <a:spcPct val="100000"/>
+              </a:lnSpc>
+            </a:pPr>
+            <a:r>
+              <a:rPr sz="700" b="0">
+                <a:solidFill>
+                  <a:srgbClr val="FFFFFF"/>
+                </a:solidFill>
+                <a:latin typeface="Consolas"/>
+              </a:rPr>
+              <a:t>in [T, 2048] → out [T, 2048]</a:t>
+            </a:r>
+            <a:r>
+              <a:rPr sz="700" b="0">
+                <a:solidFill>
+                  <a:srgbClr val="FFFFFF"/>
+                </a:solidFill>
+                <a:latin typeface="Microsoft YaHei"/>
+              </a:rPr>
+              <a:t>  ·  无 all2all；expert 按 TP 切分（intermediate 768 → 384/rank）</a:t>
+            </a:r>
+          </a:p>
+        </p:txBody>
+      </p:sp>
+      <p:sp>
+        <p:nvSpPr>
+          <p:cNvPr id="28" name="Rounded Rectangle 27"/>
+          <p:cNvSpPr/>
+          <p:nvPr/>
+        </p:nvSpPr>
+        <p:spPr>
+          <a:xfrm>
+            <a:off x="457200" y="5925312"/>
+            <a:ext cx="11292840" cy="804672"/>
+          </a:xfrm>
+          <a:prstGeom prst="roundRect">
+            <a:avLst>
+              <a:gd name="adj" fmla="val 12000"/>
+            </a:avLst>
+          </a:prstGeom>
+          <a:solidFill>
+            <a:srgbClr val="FFFFFF"/>
+          </a:solidFill>
+          <a:ln w="12700">
+            <a:solidFill>
+              <a:srgbClr val="E2E8F0"/>
+            </a:solidFill>
+          </a:ln>
+          <a:effectLst/>
+        </p:spPr>
+        <p:style>
+          <a:lnRef idx="1">
+            <a:schemeClr val="accent1"/>
+          </a:lnRef>
+          <a:fillRef idx="3">
+            <a:schemeClr val="accent1"/>
+          </a:fillRef>
+          <a:effectRef idx="2">
+            <a:schemeClr val="accent1"/>
+          </a:effectRef>
+          <a:fontRef idx="minor">
+            <a:schemeClr val="lt1"/>
+          </a:fontRef>
+        </p:style>
+        <p:txBody>
+          <a:bodyPr wrap="square" lIns="109728" tIns="9144" rIns="109728" bIns="9144" rtlCol="0" anchor="ctr"/>
+          <a:lstStyle/>
+          <a:p>
+            <a:pPr algn="l">
+              <a:lnSpc>
+                <a:spcPct val="100000"/>
+              </a:lnSpc>
+            </a:pPr>
+            <a:r>
+              <a:rPr sz="1050" b="1">
+                <a:solidFill>
+                  <a:srgbClr val="1E293B"/>
+                </a:solidFill>
+                <a:latin typeface="Microsoft YaHei"/>
+              </a:rPr>
+              <a:t>• </a:t>
+            </a:r>
+            <a:r>
+              <a:rPr sz="950" b="0">
+                <a:solidFill>
+                  <a:srgbClr val="1E293B"/>
+                </a:solidFill>
+                <a:latin typeface="Microsoft YaHei"/>
+              </a:rPr>
+              <a:t>MoE 内部无 all2all：expert 权重按 TP 切分（moe_intermediate 768 → 384/rank），输入输出均为 [T, 2048] 完整 tensor。</a:t>
+            </a:r>
+          </a:p>
+          <a:p>
+            <a:pPr algn="l">
+              <a:lnSpc>
+                <a:spcPct val="100000"/>
+              </a:lnSpc>
+            </a:pPr>
+            <a:r>
+              <a:rPr sz="1050" b="1">
+                <a:solidFill>
+                  <a:srgbClr val="1E293B"/>
+                </a:solidFill>
+                <a:latin typeface="Microsoft YaHei"/>
+              </a:rPr>
+              <a:t>• </a:t>
+            </a:r>
+            <a:r>
+              <a:rPr sz="950" b="0">
+                <a:solidFill>
+                  <a:srgbClr val="1E293B"/>
+                </a:solidFill>
+                <a:latin typeface="Microsoft YaHei"/>
+              </a:rPr>
+              <a:t>MoE 前的 all_gather 实际充当 expert </a:t>
+            </a:r>
+            <a:r>
+              <a:rPr sz="950" b="1">
+                <a:solidFill>
+                  <a:srgbClr val="1E293B"/>
+                </a:solidFill>
+                <a:latin typeface="Microsoft YaHei"/>
+              </a:rPr>
+              <a:t>dispatch</a:t>
+            </a:r>
+            <a:r>
+              <a:rPr sz="950" b="0">
+                <a:solidFill>
+                  <a:srgbClr val="1E293B"/>
+                </a:solidFill>
+                <a:latin typeface="Microsoft YaHei"/>
+              </a:rPr>
+              <a:t>，MoE 后的 reduce_scatter + all_gather 充当 </a:t>
+            </a:r>
+            <a:r>
+              <a:rPr sz="950" b="1">
+                <a:solidFill>
+                  <a:srgbClr val="1E293B"/>
+                </a:solidFill>
+                <a:latin typeface="Microsoft YaHei"/>
+              </a:rPr>
+              <a:t>combine</a:t>
+            </a:r>
+            <a:r>
+              <a:rPr sz="950" b="0">
+                <a:solidFill>
+                  <a:srgbClr val="1E293B"/>
+                </a:solidFill>
+                <a:latin typeface="Microsoft YaHei"/>
+              </a:rPr>
+              <a:t>。</a:t>
+            </a:r>
+          </a:p>
+        </p:txBody>
+      </p:sp>
+    </p:spTree>
+  </p:cSld>
+  <p:clrMapOvr>
+    <a:masterClrMapping/>
+  </p:clrMapOvr>
+</p:sld>
+</file>
+
+<file path=ppt/slides/slide6.xml><?xml version="1.0" encoding="utf-8"?>
 <p:sld xmlns:a="http://schemas.openxmlformats.org/drawingml/2006/main" xmlns:r="http://schemas.openxmlformats.org/officeDocument/2006/relationships" xmlns:p="http://schemas.openxmlformats.org/presentationml/2006/main">
   <p:cSld>
     <p:spTree>
